--- a/Excelppt.pptx
+++ b/Excelppt.pptx
@@ -5,10 +5,20 @@
     <p:sldMasterId id="2147483648" r:id="rId1"/>
   </p:sldMasterIdLst>
   <p:sldIdLst>
-    <p:sldId id="258" r:id="rId2"/>
-    <p:sldId id="259" r:id="rId3"/>
-    <p:sldId id="257" r:id="rId4"/>
-    <p:sldId id="256" r:id="rId5"/>
+    <p:sldId id="266" r:id="rId2"/>
+    <p:sldId id="258" r:id="rId3"/>
+    <p:sldId id="259" r:id="rId4"/>
+    <p:sldId id="257" r:id="rId5"/>
+    <p:sldId id="256" r:id="rId6"/>
+    <p:sldId id="260" r:id="rId7"/>
+    <p:sldId id="267" r:id="rId8"/>
+    <p:sldId id="262" r:id="rId9"/>
+    <p:sldId id="269" r:id="rId10"/>
+    <p:sldId id="268" r:id="rId11"/>
+    <p:sldId id="265" r:id="rId12"/>
+    <p:sldId id="261" r:id="rId13"/>
+    <p:sldId id="264" r:id="rId14"/>
+    <p:sldId id="263" r:id="rId15"/>
   </p:sldIdLst>
   <p:sldSz cx="12192000" cy="6858000"/>
   <p:notesSz cx="6858000" cy="9144000"/>
@@ -107,6 +117,11 @@
       </a:defRPr>
     </a:lvl9pPr>
   </p:defaultTextStyle>
+  <p:extLst>
+    <p:ext uri="{EFAFB233-063F-42B5-8137-9DF3F51BA10A}">
+      <p15:sldGuideLst xmlns:p15="http://schemas.microsoft.com/office/powerpoint/2012/main"/>
+    </p:ext>
+  </p:extLst>
 </p:presentation>
 </file>
 
@@ -2352,6 +2367,753 @@
 </file>
 
 <file path=ppt/diagrams/colors4.xml><?xml version="1.0" encoding="utf-8"?>
+<dgm:colorsDef xmlns:dgm="http://schemas.openxmlformats.org/drawingml/2006/diagram" xmlns:a="http://schemas.openxmlformats.org/drawingml/2006/main" uniqueId="urn:microsoft.com/office/officeart/2005/8/colors/accent1_2">
+  <dgm:title val=""/>
+  <dgm:desc val=""/>
+  <dgm:catLst>
+    <dgm:cat type="accent1" pri="11200"/>
+  </dgm:catLst>
+  <dgm:styleLbl name="node0">
+    <dgm:fillClrLst meth="repeat">
+      <a:schemeClr val="accent1"/>
+    </dgm:fillClrLst>
+    <dgm:linClrLst meth="repeat">
+      <a:schemeClr val="lt1"/>
+    </dgm:linClrLst>
+    <dgm:effectClrLst/>
+    <dgm:txLinClrLst/>
+    <dgm:txFillClrLst/>
+    <dgm:txEffectClrLst/>
+  </dgm:styleLbl>
+  <dgm:styleLbl name="alignNode1">
+    <dgm:fillClrLst meth="repeat">
+      <a:schemeClr val="accent1"/>
+    </dgm:fillClrLst>
+    <dgm:linClrLst meth="repeat">
+      <a:schemeClr val="accent1"/>
+    </dgm:linClrLst>
+    <dgm:effectClrLst/>
+    <dgm:txLinClrLst/>
+    <dgm:txFillClrLst/>
+    <dgm:txEffectClrLst/>
+  </dgm:styleLbl>
+  <dgm:styleLbl name="node1">
+    <dgm:fillClrLst meth="repeat">
+      <a:schemeClr val="accent1"/>
+    </dgm:fillClrLst>
+    <dgm:linClrLst meth="repeat">
+      <a:schemeClr val="lt1"/>
+    </dgm:linClrLst>
+    <dgm:effectClrLst/>
+    <dgm:txLinClrLst/>
+    <dgm:txFillClrLst/>
+    <dgm:txEffectClrLst/>
+  </dgm:styleLbl>
+  <dgm:styleLbl name="lnNode1">
+    <dgm:fillClrLst meth="repeat">
+      <a:schemeClr val="accent1"/>
+    </dgm:fillClrLst>
+    <dgm:linClrLst meth="repeat">
+      <a:schemeClr val="lt1"/>
+    </dgm:linClrLst>
+    <dgm:effectClrLst/>
+    <dgm:txLinClrLst/>
+    <dgm:txFillClrLst/>
+    <dgm:txEffectClrLst/>
+  </dgm:styleLbl>
+  <dgm:styleLbl name="vennNode1">
+    <dgm:fillClrLst meth="repeat">
+      <a:schemeClr val="accent1">
+        <a:alpha val="50000"/>
+      </a:schemeClr>
+    </dgm:fillClrLst>
+    <dgm:linClrLst meth="repeat">
+      <a:schemeClr val="lt1"/>
+    </dgm:linClrLst>
+    <dgm:effectClrLst/>
+    <dgm:txLinClrLst/>
+    <dgm:txFillClrLst/>
+    <dgm:txEffectClrLst/>
+  </dgm:styleLbl>
+  <dgm:styleLbl name="node2">
+    <dgm:fillClrLst meth="repeat">
+      <a:schemeClr val="accent1"/>
+    </dgm:fillClrLst>
+    <dgm:linClrLst meth="repeat">
+      <a:schemeClr val="lt1"/>
+    </dgm:linClrLst>
+    <dgm:effectClrLst/>
+    <dgm:txLinClrLst/>
+    <dgm:txFillClrLst/>
+    <dgm:txEffectClrLst/>
+  </dgm:styleLbl>
+  <dgm:styleLbl name="node3">
+    <dgm:fillClrLst meth="repeat">
+      <a:schemeClr val="accent1"/>
+    </dgm:fillClrLst>
+    <dgm:linClrLst meth="repeat">
+      <a:schemeClr val="lt1"/>
+    </dgm:linClrLst>
+    <dgm:effectClrLst/>
+    <dgm:txLinClrLst/>
+    <dgm:txFillClrLst/>
+    <dgm:txEffectClrLst/>
+  </dgm:styleLbl>
+  <dgm:styleLbl name="node4">
+    <dgm:fillClrLst meth="repeat">
+      <a:schemeClr val="accent1"/>
+    </dgm:fillClrLst>
+    <dgm:linClrLst meth="repeat">
+      <a:schemeClr val="lt1"/>
+    </dgm:linClrLst>
+    <dgm:effectClrLst/>
+    <dgm:txLinClrLst/>
+    <dgm:txFillClrLst/>
+    <dgm:txEffectClrLst/>
+  </dgm:styleLbl>
+  <dgm:styleLbl name="fgImgPlace1">
+    <dgm:fillClrLst meth="repeat">
+      <a:schemeClr val="accent1">
+        <a:tint val="50000"/>
+      </a:schemeClr>
+    </dgm:fillClrLst>
+    <dgm:linClrLst meth="repeat">
+      <a:schemeClr val="lt1"/>
+    </dgm:linClrLst>
+    <dgm:effectClrLst/>
+    <dgm:txLinClrLst/>
+    <dgm:txFillClrLst meth="repeat">
+      <a:schemeClr val="lt1"/>
+    </dgm:txFillClrLst>
+    <dgm:txEffectClrLst/>
+  </dgm:styleLbl>
+  <dgm:styleLbl name="alignImgPlace1">
+    <dgm:fillClrLst meth="repeat">
+      <a:schemeClr val="accent1">
+        <a:tint val="50000"/>
+      </a:schemeClr>
+    </dgm:fillClrLst>
+    <dgm:linClrLst meth="repeat">
+      <a:schemeClr val="lt1"/>
+    </dgm:linClrLst>
+    <dgm:effectClrLst/>
+    <dgm:txLinClrLst/>
+    <dgm:txFillClrLst meth="repeat">
+      <a:schemeClr val="lt1"/>
+    </dgm:txFillClrLst>
+    <dgm:txEffectClrLst/>
+  </dgm:styleLbl>
+  <dgm:styleLbl name="bgImgPlace1">
+    <dgm:fillClrLst meth="repeat">
+      <a:schemeClr val="accent1">
+        <a:tint val="50000"/>
+      </a:schemeClr>
+    </dgm:fillClrLst>
+    <dgm:linClrLst meth="repeat">
+      <a:schemeClr val="lt1"/>
+    </dgm:linClrLst>
+    <dgm:effectClrLst/>
+    <dgm:txLinClrLst/>
+    <dgm:txFillClrLst meth="repeat">
+      <a:schemeClr val="lt1"/>
+    </dgm:txFillClrLst>
+    <dgm:txEffectClrLst/>
+  </dgm:styleLbl>
+  <dgm:styleLbl name="sibTrans2D1">
+    <dgm:fillClrLst meth="repeat">
+      <a:schemeClr val="accent1">
+        <a:tint val="60000"/>
+      </a:schemeClr>
+    </dgm:fillClrLst>
+    <dgm:linClrLst meth="repeat">
+      <a:schemeClr val="accent1">
+        <a:tint val="60000"/>
+      </a:schemeClr>
+    </dgm:linClrLst>
+    <dgm:effectClrLst/>
+    <dgm:txLinClrLst/>
+    <dgm:txFillClrLst/>
+    <dgm:txEffectClrLst/>
+  </dgm:styleLbl>
+  <dgm:styleLbl name="fgSibTrans2D1">
+    <dgm:fillClrLst meth="repeat">
+      <a:schemeClr val="accent1">
+        <a:tint val="60000"/>
+      </a:schemeClr>
+    </dgm:fillClrLst>
+    <dgm:linClrLst meth="repeat">
+      <a:schemeClr val="accent1">
+        <a:tint val="60000"/>
+      </a:schemeClr>
+    </dgm:linClrLst>
+    <dgm:effectClrLst/>
+    <dgm:txLinClrLst/>
+    <dgm:txFillClrLst/>
+    <dgm:txEffectClrLst/>
+  </dgm:styleLbl>
+  <dgm:styleLbl name="bgSibTrans2D1">
+    <dgm:fillClrLst meth="repeat">
+      <a:schemeClr val="accent1">
+        <a:tint val="60000"/>
+      </a:schemeClr>
+    </dgm:fillClrLst>
+    <dgm:linClrLst meth="repeat">
+      <a:schemeClr val="accent1">
+        <a:tint val="60000"/>
+      </a:schemeClr>
+    </dgm:linClrLst>
+    <dgm:effectClrLst/>
+    <dgm:txLinClrLst/>
+    <dgm:txFillClrLst/>
+    <dgm:txEffectClrLst/>
+  </dgm:styleLbl>
+  <dgm:styleLbl name="sibTrans1D1">
+    <dgm:fillClrLst meth="repeat">
+      <a:schemeClr val="accent1"/>
+    </dgm:fillClrLst>
+    <dgm:linClrLst meth="repeat">
+      <a:schemeClr val="accent1"/>
+    </dgm:linClrLst>
+    <dgm:effectClrLst/>
+    <dgm:txLinClrLst/>
+    <dgm:txFillClrLst meth="repeat">
+      <a:schemeClr val="tx1"/>
+    </dgm:txFillClrLst>
+    <dgm:txEffectClrLst/>
+  </dgm:styleLbl>
+  <dgm:styleLbl name="callout">
+    <dgm:fillClrLst meth="repeat">
+      <a:schemeClr val="accent1"/>
+    </dgm:fillClrLst>
+    <dgm:linClrLst meth="repeat">
+      <a:schemeClr val="accent1">
+        <a:tint val="50000"/>
+      </a:schemeClr>
+    </dgm:linClrLst>
+    <dgm:effectClrLst/>
+    <dgm:txLinClrLst/>
+    <dgm:txFillClrLst meth="repeat">
+      <a:schemeClr val="tx1"/>
+    </dgm:txFillClrLst>
+    <dgm:txEffectClrLst/>
+  </dgm:styleLbl>
+  <dgm:styleLbl name="asst0">
+    <dgm:fillClrLst meth="repeat">
+      <a:schemeClr val="accent1"/>
+    </dgm:fillClrLst>
+    <dgm:linClrLst meth="repeat">
+      <a:schemeClr val="lt1"/>
+    </dgm:linClrLst>
+    <dgm:effectClrLst/>
+    <dgm:txLinClrLst/>
+    <dgm:txFillClrLst/>
+    <dgm:txEffectClrLst/>
+  </dgm:styleLbl>
+  <dgm:styleLbl name="asst1">
+    <dgm:fillClrLst meth="repeat">
+      <a:schemeClr val="accent1"/>
+    </dgm:fillClrLst>
+    <dgm:linClrLst meth="repeat">
+      <a:schemeClr val="lt1"/>
+    </dgm:linClrLst>
+    <dgm:effectClrLst/>
+    <dgm:txLinClrLst/>
+    <dgm:txFillClrLst/>
+    <dgm:txEffectClrLst/>
+  </dgm:styleLbl>
+  <dgm:styleLbl name="asst2">
+    <dgm:fillClrLst meth="repeat">
+      <a:schemeClr val="accent1"/>
+    </dgm:fillClrLst>
+    <dgm:linClrLst meth="repeat">
+      <a:schemeClr val="lt1"/>
+    </dgm:linClrLst>
+    <dgm:effectClrLst/>
+    <dgm:txLinClrLst/>
+    <dgm:txFillClrLst/>
+    <dgm:txEffectClrLst/>
+  </dgm:styleLbl>
+  <dgm:styleLbl name="asst3">
+    <dgm:fillClrLst meth="repeat">
+      <a:schemeClr val="accent1"/>
+    </dgm:fillClrLst>
+    <dgm:linClrLst meth="repeat">
+      <a:schemeClr val="lt1"/>
+    </dgm:linClrLst>
+    <dgm:effectClrLst/>
+    <dgm:txLinClrLst/>
+    <dgm:txFillClrLst/>
+    <dgm:txEffectClrLst/>
+  </dgm:styleLbl>
+  <dgm:styleLbl name="asst4">
+    <dgm:fillClrLst meth="repeat">
+      <a:schemeClr val="accent1"/>
+    </dgm:fillClrLst>
+    <dgm:linClrLst meth="repeat">
+      <a:schemeClr val="lt1"/>
+    </dgm:linClrLst>
+    <dgm:effectClrLst/>
+    <dgm:txLinClrLst/>
+    <dgm:txFillClrLst/>
+    <dgm:txEffectClrLst/>
+  </dgm:styleLbl>
+  <dgm:styleLbl name="parChTrans2D1">
+    <dgm:fillClrLst meth="repeat">
+      <a:schemeClr val="accent1">
+        <a:tint val="60000"/>
+      </a:schemeClr>
+    </dgm:fillClrLst>
+    <dgm:linClrLst meth="repeat">
+      <a:schemeClr val="accent1">
+        <a:tint val="60000"/>
+      </a:schemeClr>
+    </dgm:linClrLst>
+    <dgm:effectClrLst/>
+    <dgm:txLinClrLst/>
+    <dgm:txFillClrLst meth="repeat">
+      <a:schemeClr val="lt1"/>
+    </dgm:txFillClrLst>
+    <dgm:txEffectClrLst/>
+  </dgm:styleLbl>
+  <dgm:styleLbl name="parChTrans2D2">
+    <dgm:fillClrLst meth="repeat">
+      <a:schemeClr val="accent1"/>
+    </dgm:fillClrLst>
+    <dgm:linClrLst meth="repeat">
+      <a:schemeClr val="accent1"/>
+    </dgm:linClrLst>
+    <dgm:effectClrLst/>
+    <dgm:txLinClrLst/>
+    <dgm:txFillClrLst meth="repeat">
+      <a:schemeClr val="lt1"/>
+    </dgm:txFillClrLst>
+    <dgm:txEffectClrLst/>
+  </dgm:styleLbl>
+  <dgm:styleLbl name="parChTrans2D3">
+    <dgm:fillClrLst meth="repeat">
+      <a:schemeClr val="accent1"/>
+    </dgm:fillClrLst>
+    <dgm:linClrLst meth="repeat">
+      <a:schemeClr val="accent1"/>
+    </dgm:linClrLst>
+    <dgm:effectClrLst/>
+    <dgm:txLinClrLst/>
+    <dgm:txFillClrLst meth="repeat">
+      <a:schemeClr val="lt1"/>
+    </dgm:txFillClrLst>
+    <dgm:txEffectClrLst/>
+  </dgm:styleLbl>
+  <dgm:styleLbl name="parChTrans2D4">
+    <dgm:fillClrLst meth="repeat">
+      <a:schemeClr val="accent1"/>
+    </dgm:fillClrLst>
+    <dgm:linClrLst meth="repeat">
+      <a:schemeClr val="accent1"/>
+    </dgm:linClrLst>
+    <dgm:effectClrLst/>
+    <dgm:txLinClrLst/>
+    <dgm:txFillClrLst meth="repeat">
+      <a:schemeClr val="lt1"/>
+    </dgm:txFillClrLst>
+    <dgm:txEffectClrLst/>
+  </dgm:styleLbl>
+  <dgm:styleLbl name="parChTrans1D1">
+    <dgm:fillClrLst meth="repeat">
+      <a:schemeClr val="accent1"/>
+    </dgm:fillClrLst>
+    <dgm:linClrLst meth="repeat">
+      <a:schemeClr val="accent1">
+        <a:shade val="60000"/>
+      </a:schemeClr>
+    </dgm:linClrLst>
+    <dgm:effectClrLst/>
+    <dgm:txLinClrLst/>
+    <dgm:txFillClrLst meth="repeat">
+      <a:schemeClr val="tx1"/>
+    </dgm:txFillClrLst>
+    <dgm:txEffectClrLst/>
+  </dgm:styleLbl>
+  <dgm:styleLbl name="parChTrans1D2">
+    <dgm:fillClrLst meth="repeat">
+      <a:schemeClr val="accent1"/>
+    </dgm:fillClrLst>
+    <dgm:linClrLst meth="repeat">
+      <a:schemeClr val="accent1">
+        <a:shade val="60000"/>
+      </a:schemeClr>
+    </dgm:linClrLst>
+    <dgm:effectClrLst/>
+    <dgm:txLinClrLst/>
+    <dgm:txFillClrLst meth="repeat">
+      <a:schemeClr val="tx1"/>
+    </dgm:txFillClrLst>
+    <dgm:txEffectClrLst/>
+  </dgm:styleLbl>
+  <dgm:styleLbl name="parChTrans1D3">
+    <dgm:fillClrLst meth="repeat">
+      <a:schemeClr val="accent1"/>
+    </dgm:fillClrLst>
+    <dgm:linClrLst meth="repeat">
+      <a:schemeClr val="accent1">
+        <a:shade val="80000"/>
+      </a:schemeClr>
+    </dgm:linClrLst>
+    <dgm:effectClrLst/>
+    <dgm:txLinClrLst/>
+    <dgm:txFillClrLst meth="repeat">
+      <a:schemeClr val="tx1"/>
+    </dgm:txFillClrLst>
+    <dgm:txEffectClrLst/>
+  </dgm:styleLbl>
+  <dgm:styleLbl name="parChTrans1D4">
+    <dgm:fillClrLst meth="repeat">
+      <a:schemeClr val="accent1"/>
+    </dgm:fillClrLst>
+    <dgm:linClrLst meth="repeat">
+      <a:schemeClr val="accent1">
+        <a:shade val="80000"/>
+      </a:schemeClr>
+    </dgm:linClrLst>
+    <dgm:effectClrLst/>
+    <dgm:txLinClrLst/>
+    <dgm:txFillClrLst meth="repeat">
+      <a:schemeClr val="tx1"/>
+    </dgm:txFillClrLst>
+    <dgm:txEffectClrLst/>
+  </dgm:styleLbl>
+  <dgm:styleLbl name="fgAcc1">
+    <dgm:fillClrLst meth="repeat">
+      <a:schemeClr val="lt1">
+        <a:alpha val="90000"/>
+      </a:schemeClr>
+    </dgm:fillClrLst>
+    <dgm:linClrLst meth="repeat">
+      <a:schemeClr val="accent1"/>
+    </dgm:linClrLst>
+    <dgm:effectClrLst/>
+    <dgm:txLinClrLst/>
+    <dgm:txFillClrLst meth="repeat">
+      <a:schemeClr val="dk1"/>
+    </dgm:txFillClrLst>
+    <dgm:txEffectClrLst/>
+  </dgm:styleLbl>
+  <dgm:styleLbl name="conFgAcc1">
+    <dgm:fillClrLst meth="repeat">
+      <a:schemeClr val="lt1">
+        <a:alpha val="90000"/>
+      </a:schemeClr>
+    </dgm:fillClrLst>
+    <dgm:linClrLst meth="repeat">
+      <a:schemeClr val="accent1"/>
+    </dgm:linClrLst>
+    <dgm:effectClrLst/>
+    <dgm:txLinClrLst/>
+    <dgm:txFillClrLst meth="repeat">
+      <a:schemeClr val="dk1"/>
+    </dgm:txFillClrLst>
+    <dgm:txEffectClrLst/>
+  </dgm:styleLbl>
+  <dgm:styleLbl name="alignAcc1">
+    <dgm:fillClrLst meth="repeat">
+      <a:schemeClr val="lt1">
+        <a:alpha val="90000"/>
+      </a:schemeClr>
+    </dgm:fillClrLst>
+    <dgm:linClrLst meth="repeat">
+      <a:schemeClr val="accent1"/>
+    </dgm:linClrLst>
+    <dgm:effectClrLst/>
+    <dgm:txLinClrLst/>
+    <dgm:txFillClrLst meth="repeat">
+      <a:schemeClr val="dk1"/>
+    </dgm:txFillClrLst>
+    <dgm:txEffectClrLst/>
+  </dgm:styleLbl>
+  <dgm:styleLbl name="trAlignAcc1">
+    <dgm:fillClrLst meth="repeat">
+      <a:schemeClr val="lt1">
+        <a:alpha val="40000"/>
+      </a:schemeClr>
+    </dgm:fillClrLst>
+    <dgm:linClrLst meth="repeat">
+      <a:schemeClr val="accent1"/>
+    </dgm:linClrLst>
+    <dgm:effectClrLst/>
+    <dgm:txLinClrLst/>
+    <dgm:txFillClrLst meth="repeat">
+      <a:schemeClr val="dk1"/>
+    </dgm:txFillClrLst>
+    <dgm:txEffectClrLst/>
+  </dgm:styleLbl>
+  <dgm:styleLbl name="bgAcc1">
+    <dgm:fillClrLst meth="repeat">
+      <a:schemeClr val="lt1">
+        <a:alpha val="90000"/>
+      </a:schemeClr>
+    </dgm:fillClrLst>
+    <dgm:linClrLst meth="repeat">
+      <a:schemeClr val="accent1"/>
+    </dgm:linClrLst>
+    <dgm:effectClrLst/>
+    <dgm:txLinClrLst/>
+    <dgm:txFillClrLst meth="repeat">
+      <a:schemeClr val="dk1"/>
+    </dgm:txFillClrLst>
+    <dgm:txEffectClrLst/>
+  </dgm:styleLbl>
+  <dgm:styleLbl name="solidFgAcc1">
+    <dgm:fillClrLst meth="repeat">
+      <a:schemeClr val="lt1"/>
+    </dgm:fillClrLst>
+    <dgm:linClrLst meth="repeat">
+      <a:schemeClr val="accent1"/>
+    </dgm:linClrLst>
+    <dgm:effectClrLst/>
+    <dgm:txLinClrLst/>
+    <dgm:txFillClrLst meth="repeat">
+      <a:schemeClr val="dk1"/>
+    </dgm:txFillClrLst>
+    <dgm:txEffectClrLst/>
+  </dgm:styleLbl>
+  <dgm:styleLbl name="solidAlignAcc1">
+    <dgm:fillClrLst meth="repeat">
+      <a:schemeClr val="lt1"/>
+    </dgm:fillClrLst>
+    <dgm:linClrLst meth="repeat">
+      <a:schemeClr val="accent1"/>
+    </dgm:linClrLst>
+    <dgm:effectClrLst/>
+    <dgm:txLinClrLst/>
+    <dgm:txFillClrLst meth="repeat">
+      <a:schemeClr val="dk1"/>
+    </dgm:txFillClrLst>
+    <dgm:txEffectClrLst/>
+  </dgm:styleLbl>
+  <dgm:styleLbl name="solidBgAcc1">
+    <dgm:fillClrLst meth="repeat">
+      <a:schemeClr val="lt1"/>
+    </dgm:fillClrLst>
+    <dgm:linClrLst meth="repeat">
+      <a:schemeClr val="accent1"/>
+    </dgm:linClrLst>
+    <dgm:effectClrLst/>
+    <dgm:txLinClrLst/>
+    <dgm:txFillClrLst meth="repeat">
+      <a:schemeClr val="dk1"/>
+    </dgm:txFillClrLst>
+    <dgm:txEffectClrLst/>
+  </dgm:styleLbl>
+  <dgm:styleLbl name="fgAccFollowNode1">
+    <dgm:fillClrLst meth="repeat">
+      <a:schemeClr val="accent1">
+        <a:alpha val="90000"/>
+        <a:tint val="40000"/>
+      </a:schemeClr>
+    </dgm:fillClrLst>
+    <dgm:linClrLst meth="repeat">
+      <a:schemeClr val="accent1">
+        <a:alpha val="90000"/>
+        <a:tint val="40000"/>
+      </a:schemeClr>
+    </dgm:linClrLst>
+    <dgm:effectClrLst/>
+    <dgm:txLinClrLst/>
+    <dgm:txFillClrLst meth="repeat">
+      <a:schemeClr val="dk1"/>
+    </dgm:txFillClrLst>
+    <dgm:txEffectClrLst/>
+  </dgm:styleLbl>
+  <dgm:styleLbl name="alignAccFollowNode1">
+    <dgm:fillClrLst meth="repeat">
+      <a:schemeClr val="accent1">
+        <a:alpha val="90000"/>
+        <a:tint val="40000"/>
+      </a:schemeClr>
+    </dgm:fillClrLst>
+    <dgm:linClrLst meth="repeat">
+      <a:schemeClr val="accent1">
+        <a:alpha val="90000"/>
+        <a:tint val="40000"/>
+      </a:schemeClr>
+    </dgm:linClrLst>
+    <dgm:effectClrLst/>
+    <dgm:txLinClrLst/>
+    <dgm:txFillClrLst meth="repeat">
+      <a:schemeClr val="dk1"/>
+    </dgm:txFillClrLst>
+    <dgm:txEffectClrLst/>
+  </dgm:styleLbl>
+  <dgm:styleLbl name="bgAccFollowNode1">
+    <dgm:fillClrLst meth="repeat">
+      <a:schemeClr val="accent1">
+        <a:alpha val="90000"/>
+        <a:tint val="40000"/>
+      </a:schemeClr>
+    </dgm:fillClrLst>
+    <dgm:linClrLst meth="repeat">
+      <a:schemeClr val="accent1">
+        <a:alpha val="90000"/>
+        <a:tint val="40000"/>
+      </a:schemeClr>
+    </dgm:linClrLst>
+    <dgm:effectClrLst/>
+    <dgm:txLinClrLst/>
+    <dgm:txFillClrLst meth="repeat">
+      <a:schemeClr val="dk1"/>
+    </dgm:txFillClrLst>
+    <dgm:txEffectClrLst/>
+  </dgm:styleLbl>
+  <dgm:styleLbl name="fgAcc0">
+    <dgm:fillClrLst meth="repeat">
+      <a:schemeClr val="lt1">
+        <a:alpha val="90000"/>
+      </a:schemeClr>
+    </dgm:fillClrLst>
+    <dgm:linClrLst meth="repeat">
+      <a:schemeClr val="accent1"/>
+    </dgm:linClrLst>
+    <dgm:effectClrLst/>
+    <dgm:txLinClrLst/>
+    <dgm:txFillClrLst meth="repeat">
+      <a:schemeClr val="dk1"/>
+    </dgm:txFillClrLst>
+    <dgm:txEffectClrLst/>
+  </dgm:styleLbl>
+  <dgm:styleLbl name="fgAcc2">
+    <dgm:fillClrLst meth="repeat">
+      <a:schemeClr val="lt1">
+        <a:alpha val="90000"/>
+      </a:schemeClr>
+    </dgm:fillClrLst>
+    <dgm:linClrLst meth="repeat">
+      <a:schemeClr val="accent1"/>
+    </dgm:linClrLst>
+    <dgm:effectClrLst/>
+    <dgm:txLinClrLst/>
+    <dgm:txFillClrLst meth="repeat">
+      <a:schemeClr val="dk1"/>
+    </dgm:txFillClrLst>
+    <dgm:txEffectClrLst/>
+  </dgm:styleLbl>
+  <dgm:styleLbl name="fgAcc3">
+    <dgm:fillClrLst meth="repeat">
+      <a:schemeClr val="lt1">
+        <a:alpha val="90000"/>
+      </a:schemeClr>
+    </dgm:fillClrLst>
+    <dgm:linClrLst meth="repeat">
+      <a:schemeClr val="accent1"/>
+    </dgm:linClrLst>
+    <dgm:effectClrLst/>
+    <dgm:txLinClrLst/>
+    <dgm:txFillClrLst meth="repeat">
+      <a:schemeClr val="dk1"/>
+    </dgm:txFillClrLst>
+    <dgm:txEffectClrLst/>
+  </dgm:styleLbl>
+  <dgm:styleLbl name="fgAcc4">
+    <dgm:fillClrLst meth="repeat">
+      <a:schemeClr val="lt1">
+        <a:alpha val="90000"/>
+      </a:schemeClr>
+    </dgm:fillClrLst>
+    <dgm:linClrLst meth="repeat">
+      <a:schemeClr val="accent1"/>
+    </dgm:linClrLst>
+    <dgm:effectClrLst/>
+    <dgm:txLinClrLst/>
+    <dgm:txFillClrLst meth="repeat">
+      <a:schemeClr val="dk1"/>
+    </dgm:txFillClrLst>
+    <dgm:txEffectClrLst/>
+  </dgm:styleLbl>
+  <dgm:styleLbl name="bgShp">
+    <dgm:fillClrLst meth="repeat">
+      <a:schemeClr val="accent1">
+        <a:tint val="40000"/>
+      </a:schemeClr>
+    </dgm:fillClrLst>
+    <dgm:linClrLst meth="repeat">
+      <a:schemeClr val="accent1"/>
+    </dgm:linClrLst>
+    <dgm:effectClrLst/>
+    <dgm:txLinClrLst/>
+    <dgm:txFillClrLst meth="repeat">
+      <a:schemeClr val="dk1"/>
+    </dgm:txFillClrLst>
+    <dgm:txEffectClrLst/>
+  </dgm:styleLbl>
+  <dgm:styleLbl name="dkBgShp">
+    <dgm:fillClrLst meth="repeat">
+      <a:schemeClr val="accent1">
+        <a:shade val="80000"/>
+      </a:schemeClr>
+    </dgm:fillClrLst>
+    <dgm:linClrLst meth="repeat">
+      <a:schemeClr val="accent1"/>
+    </dgm:linClrLst>
+    <dgm:effectClrLst/>
+    <dgm:txLinClrLst/>
+    <dgm:txFillClrLst meth="repeat">
+      <a:schemeClr val="lt1"/>
+    </dgm:txFillClrLst>
+    <dgm:txEffectClrLst/>
+  </dgm:styleLbl>
+  <dgm:styleLbl name="trBgShp">
+    <dgm:fillClrLst meth="repeat">
+      <a:schemeClr val="accent1">
+        <a:tint val="50000"/>
+        <a:alpha val="40000"/>
+      </a:schemeClr>
+    </dgm:fillClrLst>
+    <dgm:linClrLst meth="repeat">
+      <a:schemeClr val="accent1"/>
+    </dgm:linClrLst>
+    <dgm:effectClrLst/>
+    <dgm:txLinClrLst/>
+    <dgm:txFillClrLst meth="repeat">
+      <a:schemeClr val="lt1"/>
+    </dgm:txFillClrLst>
+    <dgm:txEffectClrLst/>
+  </dgm:styleLbl>
+  <dgm:styleLbl name="fgShp">
+    <dgm:fillClrLst meth="repeat">
+      <a:schemeClr val="accent1">
+        <a:tint val="60000"/>
+      </a:schemeClr>
+    </dgm:fillClrLst>
+    <dgm:linClrLst meth="repeat">
+      <a:schemeClr val="lt1"/>
+    </dgm:linClrLst>
+    <dgm:effectClrLst/>
+    <dgm:txLinClrLst/>
+    <dgm:txFillClrLst meth="repeat">
+      <a:schemeClr val="dk1"/>
+    </dgm:txFillClrLst>
+    <dgm:txEffectClrLst/>
+  </dgm:styleLbl>
+  <dgm:styleLbl name="revTx">
+    <dgm:fillClrLst meth="repeat">
+      <a:schemeClr val="lt1">
+        <a:alpha val="0"/>
+      </a:schemeClr>
+    </dgm:fillClrLst>
+    <dgm:linClrLst meth="repeat">
+      <a:schemeClr val="dk1">
+        <a:alpha val="0"/>
+      </a:schemeClr>
+    </dgm:linClrLst>
+    <dgm:effectClrLst/>
+    <dgm:txLinClrLst/>
+    <dgm:txFillClrLst meth="repeat">
+      <a:schemeClr val="tx1"/>
+    </dgm:txFillClrLst>
+    <dgm:txEffectClrLst/>
+  </dgm:styleLbl>
+</dgm:colorsDef>
+</file>
+
+<file path=ppt/diagrams/colors5.xml><?xml version="1.0" encoding="utf-8"?>
 <dgm:colorsDef xmlns:dgm="http://schemas.openxmlformats.org/drawingml/2006/diagram" xmlns:a="http://schemas.openxmlformats.org/drawingml/2006/main" uniqueId="urn:microsoft.com/office/officeart/2005/8/colors/accent1_2">
   <dgm:title val=""/>
   <dgm:desc val=""/>
@@ -6971,6 +7733,272 @@
     <dgm:cxn modelId="{483FDDFE-E982-4800-B9FE-5FCC8ABDB39B}" type="presParOf" srcId="{2FB997C0-A761-4B28-A27C-5908080E5028}" destId="{B027FC31-0B99-45C5-91D4-C00FF6FA29D1}" srcOrd="2" destOrd="0" presId="urn:microsoft.com/office/officeart/2009/3/layout/HorizontalOrganizationChart"/>
     <dgm:cxn modelId="{411F864C-B84D-447B-8305-75FA8557D026}" type="presParOf" srcId="{E0765ABA-3993-40AE-BAA4-15B04D180699}" destId="{4044FAE7-8E34-493D-AFC0-94EF337D6BD4}" srcOrd="2" destOrd="0" presId="urn:microsoft.com/office/officeart/2009/3/layout/HorizontalOrganizationChart"/>
     <dgm:cxn modelId="{AD561AE3-9FFA-45E7-8847-9639DD9F5DA5}" type="presParOf" srcId="{31E86044-25DD-41DC-B382-4D53A9AF89FA}" destId="{7BB8F53B-C912-4F5C-BB1B-CE9AFB713119}" srcOrd="2" destOrd="0" presId="urn:microsoft.com/office/officeart/2009/3/layout/HorizontalOrganizationChart"/>
+  </dgm:cxnLst>
+  <dgm:bg/>
+  <dgm:whole/>
+  <dgm:extLst>
+    <a:ext uri="http://schemas.microsoft.com/office/drawing/2008/diagram">
+      <dsp:dataModelExt xmlns:dsp="http://schemas.microsoft.com/office/drawing/2008/diagram" relId="rId6" minVer="http://schemas.openxmlformats.org/drawingml/2006/diagram"/>
+    </a:ext>
+  </dgm:extLst>
+</dgm:dataModel>
+</file>
+
+<file path=ppt/diagrams/data5.xml><?xml version="1.0" encoding="utf-8"?>
+<dgm:dataModel xmlns:dgm="http://schemas.openxmlformats.org/drawingml/2006/diagram" xmlns:a="http://schemas.openxmlformats.org/drawingml/2006/main">
+  <dgm:ptLst>
+    <dgm:pt modelId="{840CA87D-DCDD-402B-AE8A-41B95D31F2B6}" type="doc">
+      <dgm:prSet loTypeId="urn:microsoft.com/office/officeart/2005/8/layout/chevron1" loCatId="process" qsTypeId="urn:microsoft.com/office/officeart/2005/8/quickstyle/simple1" qsCatId="simple" csTypeId="urn:microsoft.com/office/officeart/2005/8/colors/accent1_2" csCatId="accent1" phldr="1"/>
+      <dgm:spPr/>
+    </dgm:pt>
+    <dgm:pt modelId="{1EDC6EF7-7548-4A78-876B-5754445755B2}">
+      <dgm:prSet phldrT="[Text]"/>
+      <dgm:spPr/>
+      <dgm:t>
+        <a:bodyPr/>
+        <a:lstStyle/>
+        <a:p>
+          <a:r>
+            <a:rPr lang="en-US" dirty="0"/>
+            <a:t>1. Data Storage (</a:t>
+          </a:r>
+          <a:r>
+            <a:rPr lang="th-TH" dirty="0"/>
+            <a:t>ต้นน้ำ: การเก็บข้อมูลและฐานข้อมูล)</a:t>
+          </a:r>
+          <a:endParaRPr lang="en-US" dirty="0"/>
+        </a:p>
+      </dgm:t>
+    </dgm:pt>
+    <dgm:pt modelId="{B8FEEF1C-1D37-4F3F-909D-69802E828613}" type="parTrans" cxnId="{463974DE-2616-411E-8D65-614D34A372AB}">
+      <dgm:prSet/>
+      <dgm:spPr/>
+      <dgm:t>
+        <a:bodyPr/>
+        <a:lstStyle/>
+        <a:p>
+          <a:endParaRPr lang="en-US"/>
+        </a:p>
+      </dgm:t>
+    </dgm:pt>
+    <dgm:pt modelId="{3E45BA9D-1FFF-4897-A128-1B7EDBA73A61}" type="sibTrans" cxnId="{463974DE-2616-411E-8D65-614D34A372AB}">
+      <dgm:prSet/>
+      <dgm:spPr/>
+      <dgm:t>
+        <a:bodyPr/>
+        <a:lstStyle/>
+        <a:p>
+          <a:endParaRPr lang="en-US"/>
+        </a:p>
+      </dgm:t>
+    </dgm:pt>
+    <dgm:pt modelId="{34462F1D-A63E-4B08-AAB8-7D20924F5B00}">
+      <dgm:prSet/>
+      <dgm:spPr/>
+      <dgm:t>
+        <a:bodyPr/>
+        <a:lstStyle/>
+        <a:p>
+          <a:r>
+            <a:rPr lang="en-US" dirty="0"/>
+            <a:t>2. Data Manipulation &amp; Retrieval (</a:t>
+          </a:r>
+          <a:r>
+            <a:rPr lang="th-TH" dirty="0"/>
+            <a:t>กลางน้ำ: การจัดการและดึงข้อมูล)</a:t>
+          </a:r>
+          <a:endParaRPr lang="en-US" dirty="0"/>
+        </a:p>
+      </dgm:t>
+    </dgm:pt>
+    <dgm:pt modelId="{0594B591-8A85-476D-835E-6F521DAB9A2F}" type="parTrans" cxnId="{574CAFC8-CEFB-49A5-BAC1-F51CD46F629A}">
+      <dgm:prSet/>
+      <dgm:spPr/>
+      <dgm:t>
+        <a:bodyPr/>
+        <a:lstStyle/>
+        <a:p>
+          <a:endParaRPr lang="en-US"/>
+        </a:p>
+      </dgm:t>
+    </dgm:pt>
+    <dgm:pt modelId="{78DF9CBF-419D-45F7-9BA5-A7C5FB9C60BD}" type="sibTrans" cxnId="{574CAFC8-CEFB-49A5-BAC1-F51CD46F629A}">
+      <dgm:prSet/>
+      <dgm:spPr/>
+      <dgm:t>
+        <a:bodyPr/>
+        <a:lstStyle/>
+        <a:p>
+          <a:endParaRPr lang="en-US"/>
+        </a:p>
+      </dgm:t>
+    </dgm:pt>
+    <dgm:pt modelId="{8ACB38C8-C2B4-4479-B90A-4EB37D3421D3}">
+      <dgm:prSet/>
+      <dgm:spPr/>
+      <dgm:t>
+        <a:bodyPr/>
+        <a:lstStyle/>
+        <a:p>
+          <a:r>
+            <a:rPr lang="en-US" dirty="0"/>
+            <a:t>3. Calculation &amp; Analysis (</a:t>
+          </a:r>
+          <a:r>
+            <a:rPr lang="th-TH" dirty="0"/>
+            <a:t>กลางน้ำ: การคำนวณและวิเคราะห์)</a:t>
+          </a:r>
+          <a:endParaRPr lang="en-US" dirty="0"/>
+        </a:p>
+      </dgm:t>
+    </dgm:pt>
+    <dgm:pt modelId="{1B3FB370-85A7-4D9D-8A62-B764E2138749}" type="parTrans" cxnId="{9071AEB9-2669-4957-A317-E278C4AD83AC}">
+      <dgm:prSet/>
+      <dgm:spPr/>
+      <dgm:t>
+        <a:bodyPr/>
+        <a:lstStyle/>
+        <a:p>
+          <a:endParaRPr lang="en-US"/>
+        </a:p>
+      </dgm:t>
+    </dgm:pt>
+    <dgm:pt modelId="{7F5AAD3B-E009-4D28-8C5B-F6FA1F701E0E}" type="sibTrans" cxnId="{9071AEB9-2669-4957-A317-E278C4AD83AC}">
+      <dgm:prSet/>
+      <dgm:spPr/>
+      <dgm:t>
+        <a:bodyPr/>
+        <a:lstStyle/>
+        <a:p>
+          <a:endParaRPr lang="en-US"/>
+        </a:p>
+      </dgm:t>
+    </dgm:pt>
+    <dgm:pt modelId="{DC4BD975-FCD8-4610-A360-E8A7587B35AD}">
+      <dgm:prSet/>
+      <dgm:spPr/>
+      <dgm:t>
+        <a:bodyPr/>
+        <a:lstStyle/>
+        <a:p>
+          <a:r>
+            <a:rPr lang="en-US" dirty="0"/>
+            <a:t>4. Presentation &amp; Reporting (</a:t>
+          </a:r>
+          <a:r>
+            <a:rPr lang="th-TH" dirty="0"/>
+            <a:t>ปลายน้ำ: การนำเสนอและ</a:t>
+          </a:r>
+          <a:r>
+            <a:rPr lang="th-TH"/>
+            <a:t>สรุปผล)</a:t>
+          </a:r>
+          <a:endParaRPr lang="en-US" dirty="0"/>
+        </a:p>
+      </dgm:t>
+    </dgm:pt>
+    <dgm:pt modelId="{0A5CE3C1-048E-4139-B940-ADE3E51D9D7B}" type="parTrans" cxnId="{847846D2-E181-4154-9D0A-F2763E893963}">
+      <dgm:prSet/>
+      <dgm:spPr/>
+      <dgm:t>
+        <a:bodyPr/>
+        <a:lstStyle/>
+        <a:p>
+          <a:endParaRPr lang="en-US"/>
+        </a:p>
+      </dgm:t>
+    </dgm:pt>
+    <dgm:pt modelId="{90604DAF-49BC-457F-B861-7373EFD182C7}" type="sibTrans" cxnId="{847846D2-E181-4154-9D0A-F2763E893963}">
+      <dgm:prSet/>
+      <dgm:spPr/>
+      <dgm:t>
+        <a:bodyPr/>
+        <a:lstStyle/>
+        <a:p>
+          <a:endParaRPr lang="en-US"/>
+        </a:p>
+      </dgm:t>
+    </dgm:pt>
+    <dgm:pt modelId="{BB5E4746-27F5-405E-9088-3FEC5F552D46}" type="pres">
+      <dgm:prSet presAssocID="{840CA87D-DCDD-402B-AE8A-41B95D31F2B6}" presName="Name0" presStyleCnt="0">
+        <dgm:presLayoutVars>
+          <dgm:dir/>
+          <dgm:animLvl val="lvl"/>
+          <dgm:resizeHandles val="exact"/>
+        </dgm:presLayoutVars>
+      </dgm:prSet>
+      <dgm:spPr/>
+    </dgm:pt>
+    <dgm:pt modelId="{73957BBF-E697-4E88-BDBB-8D67B611E292}" type="pres">
+      <dgm:prSet presAssocID="{1EDC6EF7-7548-4A78-876B-5754445755B2}" presName="parTxOnly" presStyleLbl="node1" presStyleIdx="0" presStyleCnt="4">
+        <dgm:presLayoutVars>
+          <dgm:chMax val="0"/>
+          <dgm:chPref val="0"/>
+          <dgm:bulletEnabled val="1"/>
+        </dgm:presLayoutVars>
+      </dgm:prSet>
+      <dgm:spPr/>
+    </dgm:pt>
+    <dgm:pt modelId="{FA18F5B4-3D9E-474D-ACF3-3D324F4AA307}" type="pres">
+      <dgm:prSet presAssocID="{3E45BA9D-1FFF-4897-A128-1B7EDBA73A61}" presName="parTxOnlySpace" presStyleCnt="0"/>
+      <dgm:spPr/>
+    </dgm:pt>
+    <dgm:pt modelId="{FA48B935-448B-49B6-B2CD-4261BE012359}" type="pres">
+      <dgm:prSet presAssocID="{34462F1D-A63E-4B08-AAB8-7D20924F5B00}" presName="parTxOnly" presStyleLbl="node1" presStyleIdx="1" presStyleCnt="4">
+        <dgm:presLayoutVars>
+          <dgm:chMax val="0"/>
+          <dgm:chPref val="0"/>
+          <dgm:bulletEnabled val="1"/>
+        </dgm:presLayoutVars>
+      </dgm:prSet>
+      <dgm:spPr/>
+    </dgm:pt>
+    <dgm:pt modelId="{3143711B-D345-484C-ABEE-BAFBF08C3470}" type="pres">
+      <dgm:prSet presAssocID="{78DF9CBF-419D-45F7-9BA5-A7C5FB9C60BD}" presName="parTxOnlySpace" presStyleCnt="0"/>
+      <dgm:spPr/>
+    </dgm:pt>
+    <dgm:pt modelId="{FA80D5BE-188D-43B1-AF9C-2339775AEBD0}" type="pres">
+      <dgm:prSet presAssocID="{8ACB38C8-C2B4-4479-B90A-4EB37D3421D3}" presName="parTxOnly" presStyleLbl="node1" presStyleIdx="2" presStyleCnt="4">
+        <dgm:presLayoutVars>
+          <dgm:chMax val="0"/>
+          <dgm:chPref val="0"/>
+          <dgm:bulletEnabled val="1"/>
+        </dgm:presLayoutVars>
+      </dgm:prSet>
+      <dgm:spPr/>
+    </dgm:pt>
+    <dgm:pt modelId="{72E6E3E7-6428-476B-9046-8BBE0A67C217}" type="pres">
+      <dgm:prSet presAssocID="{7F5AAD3B-E009-4D28-8C5B-F6FA1F701E0E}" presName="parTxOnlySpace" presStyleCnt="0"/>
+      <dgm:spPr/>
+    </dgm:pt>
+    <dgm:pt modelId="{94AC7049-1EBC-47E0-B3D8-A01454738AE7}" type="pres">
+      <dgm:prSet presAssocID="{DC4BD975-FCD8-4610-A360-E8A7587B35AD}" presName="parTxOnly" presStyleLbl="node1" presStyleIdx="3" presStyleCnt="4">
+        <dgm:presLayoutVars>
+          <dgm:chMax val="0"/>
+          <dgm:chPref val="0"/>
+          <dgm:bulletEnabled val="1"/>
+        </dgm:presLayoutVars>
+      </dgm:prSet>
+      <dgm:spPr/>
+    </dgm:pt>
+  </dgm:ptLst>
+  <dgm:cxnLst>
+    <dgm:cxn modelId="{9E7C0D2A-6A3C-455D-BB91-F0C20077DCC2}" type="presOf" srcId="{34462F1D-A63E-4B08-AAB8-7D20924F5B00}" destId="{FA48B935-448B-49B6-B2CD-4261BE012359}" srcOrd="0" destOrd="0" presId="urn:microsoft.com/office/officeart/2005/8/layout/chevron1"/>
+    <dgm:cxn modelId="{9486F63F-5F52-4248-97AA-335F9BD18447}" type="presOf" srcId="{DC4BD975-FCD8-4610-A360-E8A7587B35AD}" destId="{94AC7049-1EBC-47E0-B3D8-A01454738AE7}" srcOrd="0" destOrd="0" presId="urn:microsoft.com/office/officeart/2005/8/layout/chevron1"/>
+    <dgm:cxn modelId="{D6530D50-319C-4EFD-AEB4-A3EE65C93F12}" type="presOf" srcId="{8ACB38C8-C2B4-4479-B90A-4EB37D3421D3}" destId="{FA80D5BE-188D-43B1-AF9C-2339775AEBD0}" srcOrd="0" destOrd="0" presId="urn:microsoft.com/office/officeart/2005/8/layout/chevron1"/>
+    <dgm:cxn modelId="{9071AEB9-2669-4957-A317-E278C4AD83AC}" srcId="{840CA87D-DCDD-402B-AE8A-41B95D31F2B6}" destId="{8ACB38C8-C2B4-4479-B90A-4EB37D3421D3}" srcOrd="2" destOrd="0" parTransId="{1B3FB370-85A7-4D9D-8A62-B764E2138749}" sibTransId="{7F5AAD3B-E009-4D28-8C5B-F6FA1F701E0E}"/>
+    <dgm:cxn modelId="{574CAFC8-CEFB-49A5-BAC1-F51CD46F629A}" srcId="{840CA87D-DCDD-402B-AE8A-41B95D31F2B6}" destId="{34462F1D-A63E-4B08-AAB8-7D20924F5B00}" srcOrd="1" destOrd="0" parTransId="{0594B591-8A85-476D-835E-6F521DAB9A2F}" sibTransId="{78DF9CBF-419D-45F7-9BA5-A7C5FB9C60BD}"/>
+    <dgm:cxn modelId="{847846D2-E181-4154-9D0A-F2763E893963}" srcId="{840CA87D-DCDD-402B-AE8A-41B95D31F2B6}" destId="{DC4BD975-FCD8-4610-A360-E8A7587B35AD}" srcOrd="3" destOrd="0" parTransId="{0A5CE3C1-048E-4139-B940-ADE3E51D9D7B}" sibTransId="{90604DAF-49BC-457F-B861-7373EFD182C7}"/>
+    <dgm:cxn modelId="{F8EA31D4-1F6A-44A8-AC92-34591CFEDB26}" type="presOf" srcId="{840CA87D-DCDD-402B-AE8A-41B95D31F2B6}" destId="{BB5E4746-27F5-405E-9088-3FEC5F552D46}" srcOrd="0" destOrd="0" presId="urn:microsoft.com/office/officeart/2005/8/layout/chevron1"/>
+    <dgm:cxn modelId="{463974DE-2616-411E-8D65-614D34A372AB}" srcId="{840CA87D-DCDD-402B-AE8A-41B95D31F2B6}" destId="{1EDC6EF7-7548-4A78-876B-5754445755B2}" srcOrd="0" destOrd="0" parTransId="{B8FEEF1C-1D37-4F3F-909D-69802E828613}" sibTransId="{3E45BA9D-1FFF-4897-A128-1B7EDBA73A61}"/>
+    <dgm:cxn modelId="{9F702CE2-D291-43C1-A232-18777B871124}" type="presOf" srcId="{1EDC6EF7-7548-4A78-876B-5754445755B2}" destId="{73957BBF-E697-4E88-BDBB-8D67B611E292}" srcOrd="0" destOrd="0" presId="urn:microsoft.com/office/officeart/2005/8/layout/chevron1"/>
+    <dgm:cxn modelId="{05BEBC62-5D7B-444F-9F21-ACFA74EA97D5}" type="presParOf" srcId="{BB5E4746-27F5-405E-9088-3FEC5F552D46}" destId="{73957BBF-E697-4E88-BDBB-8D67B611E292}" srcOrd="0" destOrd="0" presId="urn:microsoft.com/office/officeart/2005/8/layout/chevron1"/>
+    <dgm:cxn modelId="{D523D7A8-4104-4E29-AD0E-24D1680A6DF3}" type="presParOf" srcId="{BB5E4746-27F5-405E-9088-3FEC5F552D46}" destId="{FA18F5B4-3D9E-474D-ACF3-3D324F4AA307}" srcOrd="1" destOrd="0" presId="urn:microsoft.com/office/officeart/2005/8/layout/chevron1"/>
+    <dgm:cxn modelId="{0270464D-45EF-4772-ACEE-C5388FAC16F3}" type="presParOf" srcId="{BB5E4746-27F5-405E-9088-3FEC5F552D46}" destId="{FA48B935-448B-49B6-B2CD-4261BE012359}" srcOrd="2" destOrd="0" presId="urn:microsoft.com/office/officeart/2005/8/layout/chevron1"/>
+    <dgm:cxn modelId="{83A2697C-8A21-4823-8938-1119330CE0C1}" type="presParOf" srcId="{BB5E4746-27F5-405E-9088-3FEC5F552D46}" destId="{3143711B-D345-484C-ABEE-BAFBF08C3470}" srcOrd="3" destOrd="0" presId="urn:microsoft.com/office/officeart/2005/8/layout/chevron1"/>
+    <dgm:cxn modelId="{28B4E377-6860-4DE9-9BDA-76718CEA3360}" type="presParOf" srcId="{BB5E4746-27F5-405E-9088-3FEC5F552D46}" destId="{FA80D5BE-188D-43B1-AF9C-2339775AEBD0}" srcOrd="4" destOrd="0" presId="urn:microsoft.com/office/officeart/2005/8/layout/chevron1"/>
+    <dgm:cxn modelId="{24FBF1F9-1DA6-491C-8B31-2CD9F7DDCC64}" type="presParOf" srcId="{BB5E4746-27F5-405E-9088-3FEC5F552D46}" destId="{72E6E3E7-6428-476B-9046-8BBE0A67C217}" srcOrd="5" destOrd="0" presId="urn:microsoft.com/office/officeart/2005/8/layout/chevron1"/>
+    <dgm:cxn modelId="{94E3173F-5722-47F5-9B57-97B4C04D48C2}" type="presParOf" srcId="{BB5E4746-27F5-405E-9088-3FEC5F552D46}" destId="{94AC7049-1EBC-47E0-B3D8-A01454738AE7}" srcOrd="6" destOrd="0" presId="urn:microsoft.com/office/officeart/2005/8/layout/chevron1"/>
   </dgm:cxnLst>
   <dgm:bg/>
   <dgm:whole/>
@@ -11440,6 +12468,354 @@
       <dsp:txXfrm>
         <a:off x="6309792" y="5930403"/>
         <a:ext cx="1968611" cy="600426"/>
+      </dsp:txXfrm>
+    </dsp:sp>
+  </dsp:spTree>
+</dsp:drawing>
+</file>
+
+<file path=ppt/diagrams/drawing5.xml><?xml version="1.0" encoding="utf-8"?>
+<dsp:drawing xmlns:dgm="http://schemas.openxmlformats.org/drawingml/2006/diagram" xmlns:dsp="http://schemas.microsoft.com/office/drawing/2008/diagram" xmlns:a="http://schemas.openxmlformats.org/drawingml/2006/main">
+  <dsp:spTree>
+    <dsp:nvGrpSpPr>
+      <dsp:cNvPr id="0" name=""/>
+      <dsp:cNvGrpSpPr/>
+    </dsp:nvGrpSpPr>
+    <dsp:grpSpPr/>
+    <dsp:sp modelId="{73957BBF-E697-4E88-BDBB-8D67B611E292}">
+      <dsp:nvSpPr>
+        <dsp:cNvPr id="0" name=""/>
+        <dsp:cNvSpPr/>
+      </dsp:nvSpPr>
+      <dsp:spPr>
+        <a:xfrm>
+          <a:off x="5249" y="2469285"/>
+          <a:ext cx="3055966" cy="1222386"/>
+        </a:xfrm>
+        <a:prstGeom prst="chevron">
+          <a:avLst/>
+        </a:prstGeom>
+        <a:solidFill>
+          <a:schemeClr val="accent1">
+            <a:hueOff val="0"/>
+            <a:satOff val="0"/>
+            <a:lumOff val="0"/>
+            <a:alphaOff val="0"/>
+          </a:schemeClr>
+        </a:solidFill>
+        <a:ln w="19050" cap="flat" cmpd="sng" algn="ctr">
+          <a:solidFill>
+            <a:schemeClr val="lt1">
+              <a:hueOff val="0"/>
+              <a:satOff val="0"/>
+              <a:lumOff val="0"/>
+              <a:alphaOff val="0"/>
+            </a:schemeClr>
+          </a:solidFill>
+          <a:prstDash val="solid"/>
+          <a:miter lim="800000"/>
+        </a:ln>
+        <a:effectLst/>
+      </dsp:spPr>
+      <dsp:style>
+        <a:lnRef idx="2">
+          <a:scrgbClr r="0" g="0" b="0"/>
+        </a:lnRef>
+        <a:fillRef idx="1">
+          <a:scrgbClr r="0" g="0" b="0"/>
+        </a:fillRef>
+        <a:effectRef idx="0">
+          <a:scrgbClr r="0" g="0" b="0"/>
+        </a:effectRef>
+        <a:fontRef idx="minor">
+          <a:schemeClr val="lt1"/>
+        </a:fontRef>
+      </dsp:style>
+      <dsp:txBody>
+        <a:bodyPr spcFirstLastPara="0" vert="horz" wrap="square" lIns="72009" tIns="24003" rIns="24003" bIns="24003" numCol="1" spcCol="1270" anchor="ctr" anchorCtr="0">
+          <a:noAutofit/>
+        </a:bodyPr>
+        <a:lstStyle/>
+        <a:p>
+          <a:pPr marL="0" lvl="0" indent="0" algn="ctr" defTabSz="800100">
+            <a:lnSpc>
+              <a:spcPct val="90000"/>
+            </a:lnSpc>
+            <a:spcBef>
+              <a:spcPct val="0"/>
+            </a:spcBef>
+            <a:spcAft>
+              <a:spcPct val="35000"/>
+            </a:spcAft>
+            <a:buNone/>
+          </a:pPr>
+          <a:r>
+            <a:rPr lang="en-US" sz="1800" kern="1200" dirty="0"/>
+            <a:t>1. Data Storage (</a:t>
+          </a:r>
+          <a:r>
+            <a:rPr lang="th-TH" sz="1800" kern="1200" dirty="0"/>
+            <a:t>ต้นน้ำ: การเก็บข้อมูลและฐานข้อมูล)</a:t>
+          </a:r>
+          <a:endParaRPr lang="en-US" sz="1800" kern="1200" dirty="0"/>
+        </a:p>
+      </dsp:txBody>
+      <dsp:txXfrm>
+        <a:off x="616442" y="2469285"/>
+        <a:ext cx="1833580" cy="1222386"/>
+      </dsp:txXfrm>
+    </dsp:sp>
+    <dsp:sp modelId="{FA48B935-448B-49B6-B2CD-4261BE012359}">
+      <dsp:nvSpPr>
+        <dsp:cNvPr id="0" name=""/>
+        <dsp:cNvSpPr/>
+      </dsp:nvSpPr>
+      <dsp:spPr>
+        <a:xfrm>
+          <a:off x="2755619" y="2469285"/>
+          <a:ext cx="3055966" cy="1222386"/>
+        </a:xfrm>
+        <a:prstGeom prst="chevron">
+          <a:avLst/>
+        </a:prstGeom>
+        <a:solidFill>
+          <a:schemeClr val="accent1">
+            <a:hueOff val="0"/>
+            <a:satOff val="0"/>
+            <a:lumOff val="0"/>
+            <a:alphaOff val="0"/>
+          </a:schemeClr>
+        </a:solidFill>
+        <a:ln w="19050" cap="flat" cmpd="sng" algn="ctr">
+          <a:solidFill>
+            <a:schemeClr val="lt1">
+              <a:hueOff val="0"/>
+              <a:satOff val="0"/>
+              <a:lumOff val="0"/>
+              <a:alphaOff val="0"/>
+            </a:schemeClr>
+          </a:solidFill>
+          <a:prstDash val="solid"/>
+          <a:miter lim="800000"/>
+        </a:ln>
+        <a:effectLst/>
+      </dsp:spPr>
+      <dsp:style>
+        <a:lnRef idx="2">
+          <a:scrgbClr r="0" g="0" b="0"/>
+        </a:lnRef>
+        <a:fillRef idx="1">
+          <a:scrgbClr r="0" g="0" b="0"/>
+        </a:fillRef>
+        <a:effectRef idx="0">
+          <a:scrgbClr r="0" g="0" b="0"/>
+        </a:effectRef>
+        <a:fontRef idx="minor">
+          <a:schemeClr val="lt1"/>
+        </a:fontRef>
+      </dsp:style>
+      <dsp:txBody>
+        <a:bodyPr spcFirstLastPara="0" vert="horz" wrap="square" lIns="72009" tIns="24003" rIns="24003" bIns="24003" numCol="1" spcCol="1270" anchor="ctr" anchorCtr="0">
+          <a:noAutofit/>
+        </a:bodyPr>
+        <a:lstStyle/>
+        <a:p>
+          <a:pPr marL="0" lvl="0" indent="0" algn="ctr" defTabSz="800100">
+            <a:lnSpc>
+              <a:spcPct val="90000"/>
+            </a:lnSpc>
+            <a:spcBef>
+              <a:spcPct val="0"/>
+            </a:spcBef>
+            <a:spcAft>
+              <a:spcPct val="35000"/>
+            </a:spcAft>
+            <a:buNone/>
+          </a:pPr>
+          <a:r>
+            <a:rPr lang="en-US" sz="1800" kern="1200" dirty="0"/>
+            <a:t>2. Data Manipulation &amp; Retrieval (</a:t>
+          </a:r>
+          <a:r>
+            <a:rPr lang="th-TH" sz="1800" kern="1200" dirty="0"/>
+            <a:t>กลางน้ำ: การจัดการและดึงข้อมูล)</a:t>
+          </a:r>
+          <a:endParaRPr lang="en-US" sz="1800" kern="1200" dirty="0"/>
+        </a:p>
+      </dsp:txBody>
+      <dsp:txXfrm>
+        <a:off x="3366812" y="2469285"/>
+        <a:ext cx="1833580" cy="1222386"/>
+      </dsp:txXfrm>
+    </dsp:sp>
+    <dsp:sp modelId="{FA80D5BE-188D-43B1-AF9C-2339775AEBD0}">
+      <dsp:nvSpPr>
+        <dsp:cNvPr id="0" name=""/>
+        <dsp:cNvSpPr/>
+      </dsp:nvSpPr>
+      <dsp:spPr>
+        <a:xfrm>
+          <a:off x="5505988" y="2469285"/>
+          <a:ext cx="3055966" cy="1222386"/>
+        </a:xfrm>
+        <a:prstGeom prst="chevron">
+          <a:avLst/>
+        </a:prstGeom>
+        <a:solidFill>
+          <a:schemeClr val="accent1">
+            <a:hueOff val="0"/>
+            <a:satOff val="0"/>
+            <a:lumOff val="0"/>
+            <a:alphaOff val="0"/>
+          </a:schemeClr>
+        </a:solidFill>
+        <a:ln w="19050" cap="flat" cmpd="sng" algn="ctr">
+          <a:solidFill>
+            <a:schemeClr val="lt1">
+              <a:hueOff val="0"/>
+              <a:satOff val="0"/>
+              <a:lumOff val="0"/>
+              <a:alphaOff val="0"/>
+            </a:schemeClr>
+          </a:solidFill>
+          <a:prstDash val="solid"/>
+          <a:miter lim="800000"/>
+        </a:ln>
+        <a:effectLst/>
+      </dsp:spPr>
+      <dsp:style>
+        <a:lnRef idx="2">
+          <a:scrgbClr r="0" g="0" b="0"/>
+        </a:lnRef>
+        <a:fillRef idx="1">
+          <a:scrgbClr r="0" g="0" b="0"/>
+        </a:fillRef>
+        <a:effectRef idx="0">
+          <a:scrgbClr r="0" g="0" b="0"/>
+        </a:effectRef>
+        <a:fontRef idx="minor">
+          <a:schemeClr val="lt1"/>
+        </a:fontRef>
+      </dsp:style>
+      <dsp:txBody>
+        <a:bodyPr spcFirstLastPara="0" vert="horz" wrap="square" lIns="72009" tIns="24003" rIns="24003" bIns="24003" numCol="1" spcCol="1270" anchor="ctr" anchorCtr="0">
+          <a:noAutofit/>
+        </a:bodyPr>
+        <a:lstStyle/>
+        <a:p>
+          <a:pPr marL="0" lvl="0" indent="0" algn="ctr" defTabSz="800100">
+            <a:lnSpc>
+              <a:spcPct val="90000"/>
+            </a:lnSpc>
+            <a:spcBef>
+              <a:spcPct val="0"/>
+            </a:spcBef>
+            <a:spcAft>
+              <a:spcPct val="35000"/>
+            </a:spcAft>
+            <a:buNone/>
+          </a:pPr>
+          <a:r>
+            <a:rPr lang="en-US" sz="1800" kern="1200" dirty="0"/>
+            <a:t>3. Calculation &amp; Analysis (</a:t>
+          </a:r>
+          <a:r>
+            <a:rPr lang="th-TH" sz="1800" kern="1200" dirty="0"/>
+            <a:t>กลางน้ำ: การคำนวณและวิเคราะห์)</a:t>
+          </a:r>
+          <a:endParaRPr lang="en-US" sz="1800" kern="1200" dirty="0"/>
+        </a:p>
+      </dsp:txBody>
+      <dsp:txXfrm>
+        <a:off x="6117181" y="2469285"/>
+        <a:ext cx="1833580" cy="1222386"/>
+      </dsp:txXfrm>
+    </dsp:sp>
+    <dsp:sp modelId="{94AC7049-1EBC-47E0-B3D8-A01454738AE7}">
+      <dsp:nvSpPr>
+        <dsp:cNvPr id="0" name=""/>
+        <dsp:cNvSpPr/>
+      </dsp:nvSpPr>
+      <dsp:spPr>
+        <a:xfrm>
+          <a:off x="8256358" y="2469285"/>
+          <a:ext cx="3055966" cy="1222386"/>
+        </a:xfrm>
+        <a:prstGeom prst="chevron">
+          <a:avLst/>
+        </a:prstGeom>
+        <a:solidFill>
+          <a:schemeClr val="accent1">
+            <a:hueOff val="0"/>
+            <a:satOff val="0"/>
+            <a:lumOff val="0"/>
+            <a:alphaOff val="0"/>
+          </a:schemeClr>
+        </a:solidFill>
+        <a:ln w="19050" cap="flat" cmpd="sng" algn="ctr">
+          <a:solidFill>
+            <a:schemeClr val="lt1">
+              <a:hueOff val="0"/>
+              <a:satOff val="0"/>
+              <a:lumOff val="0"/>
+              <a:alphaOff val="0"/>
+            </a:schemeClr>
+          </a:solidFill>
+          <a:prstDash val="solid"/>
+          <a:miter lim="800000"/>
+        </a:ln>
+        <a:effectLst/>
+      </dsp:spPr>
+      <dsp:style>
+        <a:lnRef idx="2">
+          <a:scrgbClr r="0" g="0" b="0"/>
+        </a:lnRef>
+        <a:fillRef idx="1">
+          <a:scrgbClr r="0" g="0" b="0"/>
+        </a:fillRef>
+        <a:effectRef idx="0">
+          <a:scrgbClr r="0" g="0" b="0"/>
+        </a:effectRef>
+        <a:fontRef idx="minor">
+          <a:schemeClr val="lt1"/>
+        </a:fontRef>
+      </dsp:style>
+      <dsp:txBody>
+        <a:bodyPr spcFirstLastPara="0" vert="horz" wrap="square" lIns="72009" tIns="24003" rIns="24003" bIns="24003" numCol="1" spcCol="1270" anchor="ctr" anchorCtr="0">
+          <a:noAutofit/>
+        </a:bodyPr>
+        <a:lstStyle/>
+        <a:p>
+          <a:pPr marL="0" lvl="0" indent="0" algn="ctr" defTabSz="800100">
+            <a:lnSpc>
+              <a:spcPct val="90000"/>
+            </a:lnSpc>
+            <a:spcBef>
+              <a:spcPct val="0"/>
+            </a:spcBef>
+            <a:spcAft>
+              <a:spcPct val="35000"/>
+            </a:spcAft>
+            <a:buNone/>
+          </a:pPr>
+          <a:r>
+            <a:rPr lang="en-US" sz="1800" kern="1200" dirty="0"/>
+            <a:t>4. Presentation &amp; Reporting (</a:t>
+          </a:r>
+          <a:r>
+            <a:rPr lang="th-TH" sz="1800" kern="1200" dirty="0"/>
+            <a:t>ปลายน้ำ: การนำเสนอและ</a:t>
+          </a:r>
+          <a:r>
+            <a:rPr lang="th-TH" sz="1800" kern="1200"/>
+            <a:t>สรุปผล)</a:t>
+          </a:r>
+          <a:endParaRPr lang="en-US" sz="1800" kern="1200" dirty="0"/>
+        </a:p>
+      </dsp:txBody>
+      <dsp:txXfrm>
+        <a:off x="8867551" y="2469285"/>
+        <a:ext cx="1833580" cy="1222386"/>
       </dsp:txXfrm>
     </dsp:sp>
   </dsp:spTree>
@@ -14148,6 +15524,289 @@
 </dgm:layoutDef>
 </file>
 
+<file path=ppt/diagrams/layout5.xml><?xml version="1.0" encoding="utf-8"?>
+<dgm:layoutDef xmlns:dgm="http://schemas.openxmlformats.org/drawingml/2006/diagram" xmlns:a="http://schemas.openxmlformats.org/drawingml/2006/main" uniqueId="urn:microsoft.com/office/officeart/2005/8/layout/chevron1">
+  <dgm:title val=""/>
+  <dgm:desc val=""/>
+  <dgm:catLst>
+    <dgm:cat type="process" pri="9000"/>
+  </dgm:catLst>
+  <dgm:sampData useDef="1">
+    <dgm:dataModel>
+      <dgm:ptLst/>
+      <dgm:bg/>
+      <dgm:whole/>
+    </dgm:dataModel>
+  </dgm:sampData>
+  <dgm:styleData>
+    <dgm:dataModel>
+      <dgm:ptLst>
+        <dgm:pt modelId="0" type="doc"/>
+        <dgm:pt modelId="1"/>
+        <dgm:pt modelId="2"/>
+      </dgm:ptLst>
+      <dgm:cxnLst>
+        <dgm:cxn modelId="3" srcId="0" destId="1" srcOrd="0" destOrd="0"/>
+        <dgm:cxn modelId="4" srcId="0" destId="2" srcOrd="1" destOrd="0"/>
+      </dgm:cxnLst>
+      <dgm:bg/>
+      <dgm:whole/>
+    </dgm:dataModel>
+  </dgm:styleData>
+  <dgm:clrData>
+    <dgm:dataModel>
+      <dgm:ptLst>
+        <dgm:pt modelId="0" type="doc"/>
+        <dgm:pt modelId="1"/>
+        <dgm:pt modelId="2"/>
+        <dgm:pt modelId="3"/>
+        <dgm:pt modelId="4"/>
+      </dgm:ptLst>
+      <dgm:cxnLst>
+        <dgm:cxn modelId="5" srcId="0" destId="1" srcOrd="0" destOrd="0"/>
+        <dgm:cxn modelId="6" srcId="0" destId="2" srcOrd="1" destOrd="0"/>
+        <dgm:cxn modelId="7" srcId="0" destId="3" srcOrd="2" destOrd="0"/>
+        <dgm:cxn modelId="8" srcId="0" destId="4" srcOrd="3" destOrd="0"/>
+      </dgm:cxnLst>
+      <dgm:bg/>
+      <dgm:whole/>
+    </dgm:dataModel>
+  </dgm:clrData>
+  <dgm:layoutNode name="Name0">
+    <dgm:varLst>
+      <dgm:dir/>
+      <dgm:animLvl val="lvl"/>
+      <dgm:resizeHandles val="exact"/>
+    </dgm:varLst>
+    <dgm:choose name="Name1">
+      <dgm:if name="Name2" func="var" arg="dir" op="equ" val="norm">
+        <dgm:alg type="lin"/>
+      </dgm:if>
+      <dgm:else name="Name3">
+        <dgm:alg type="lin">
+          <dgm:param type="linDir" val="fromR"/>
+        </dgm:alg>
+      </dgm:else>
+    </dgm:choose>
+    <dgm:shape xmlns:r="http://schemas.openxmlformats.org/officeDocument/2006/relationships" r:blip="">
+      <dgm:adjLst/>
+    </dgm:shape>
+    <dgm:presOf/>
+    <dgm:choose name="Name4">
+      <dgm:if name="Name5" axis="des" func="maxDepth" op="gte" val="2">
+        <dgm:constrLst>
+          <dgm:constr type="h" for="ch" forName="composite" refType="h"/>
+          <dgm:constr type="w" for="ch" forName="composite" refType="w"/>
+          <dgm:constr type="w" for="des" forName="parTx"/>
+          <dgm:constr type="h" for="des" forName="parTx" op="equ"/>
+          <dgm:constr type="w" for="des" forName="desTx"/>
+          <dgm:constr type="h" for="des" forName="desTx" op="equ"/>
+          <dgm:constr type="primFontSz" for="des" forName="parTx" val="65"/>
+          <dgm:constr type="secFontSz" for="des" forName="desTx" refType="primFontSz" refFor="des" refForName="parTx" op="equ"/>
+          <dgm:constr type="h" for="des" forName="parTx" refType="primFontSz" refFor="des" refForName="parTx" fact="1.5"/>
+          <dgm:constr type="h" for="des" forName="desTx" refType="primFontSz" refFor="des" refForName="parTx" fact="0.5"/>
+          <dgm:constr type="w" for="ch" forName="space" op="equ" val="-6"/>
+        </dgm:constrLst>
+        <dgm:ruleLst>
+          <dgm:rule type="w" for="ch" forName="composite" val="0" fact="NaN" max="NaN"/>
+          <dgm:rule type="primFontSz" for="des" forName="parTx" val="5" fact="NaN" max="NaN"/>
+        </dgm:ruleLst>
+        <dgm:forEach name="Name6" axis="ch" ptType="node">
+          <dgm:layoutNode name="composite">
+            <dgm:alg type="composite"/>
+            <dgm:shape xmlns:r="http://schemas.openxmlformats.org/officeDocument/2006/relationships" r:blip="">
+              <dgm:adjLst/>
+            </dgm:shape>
+            <dgm:presOf/>
+            <dgm:choose name="Name7">
+              <dgm:if name="Name8" func="var" arg="dir" op="equ" val="norm">
+                <dgm:constrLst>
+                  <dgm:constr type="l" for="ch" forName="parTx"/>
+                  <dgm:constr type="w" for="ch" forName="parTx" refType="w"/>
+                  <dgm:constr type="t" for="ch" forName="parTx"/>
+                  <dgm:constr type="l" for="ch" forName="desTx"/>
+                  <dgm:constr type="w" for="ch" forName="desTx" refType="w" refFor="ch" refForName="parTx" fact="0.8"/>
+                  <dgm:constr type="t" for="ch" forName="desTx" refType="h" refFor="ch" refForName="parTx" fact="1.125"/>
+                </dgm:constrLst>
+              </dgm:if>
+              <dgm:else name="Name9">
+                <dgm:constrLst>
+                  <dgm:constr type="l" for="ch" forName="parTx"/>
+                  <dgm:constr type="w" for="ch" forName="parTx" refType="w"/>
+                  <dgm:constr type="t" for="ch" forName="parTx"/>
+                  <dgm:constr type="l" for="ch" forName="desTx" refType="w" fact="0.2"/>
+                  <dgm:constr type="w" for="ch" forName="desTx" refType="w" refFor="ch" refForName="parTx" fact="0.8"/>
+                  <dgm:constr type="t" for="ch" forName="desTx" refType="h" refFor="ch" refForName="parTx" fact="1.125"/>
+                </dgm:constrLst>
+              </dgm:else>
+            </dgm:choose>
+            <dgm:ruleLst>
+              <dgm:rule type="h" val="INF" fact="NaN" max="NaN"/>
+            </dgm:ruleLst>
+            <dgm:layoutNode name="parTx">
+              <dgm:varLst>
+                <dgm:chMax val="0"/>
+                <dgm:chPref val="0"/>
+                <dgm:bulletEnabled val="1"/>
+              </dgm:varLst>
+              <dgm:alg type="tx"/>
+              <dgm:choose name="Name10">
+                <dgm:if name="Name11" func="var" arg="dir" op="equ" val="norm">
+                  <dgm:shape xmlns:r="http://schemas.openxmlformats.org/officeDocument/2006/relationships" type="chevron" r:blip="">
+                    <dgm:adjLst/>
+                  </dgm:shape>
+                </dgm:if>
+                <dgm:else name="Name12">
+                  <dgm:shape xmlns:r="http://schemas.openxmlformats.org/officeDocument/2006/relationships" rot="180" type="chevron" r:blip="">
+                    <dgm:adjLst/>
+                  </dgm:shape>
+                </dgm:else>
+              </dgm:choose>
+              <dgm:presOf axis="self" ptType="node"/>
+              <dgm:choose name="Name13">
+                <dgm:if name="Name14" func="var" arg="dir" op="equ" val="norm">
+                  <dgm:constrLst>
+                    <dgm:constr type="h" refType="w" op="lte" fact="0.4"/>
+                    <dgm:constr type="h"/>
+                    <dgm:constr type="tMarg" refType="primFontSz" fact="0.105"/>
+                    <dgm:constr type="bMarg" refType="primFontSz" fact="0.105"/>
+                    <dgm:constr type="lMarg" refType="primFontSz" fact="0.315"/>
+                    <dgm:constr type="rMarg" refType="primFontSz" fact="0.105"/>
+                  </dgm:constrLst>
+                </dgm:if>
+                <dgm:else name="Name15">
+                  <dgm:constrLst>
+                    <dgm:constr type="h" refType="w" op="lte" fact="0.4"/>
+                    <dgm:constr type="h"/>
+                    <dgm:constr type="tMarg" refType="primFontSz" fact="0.105"/>
+                    <dgm:constr type="bMarg" refType="primFontSz" fact="0.105"/>
+                    <dgm:constr type="lMarg" refType="primFontSz" fact="0.105"/>
+                    <dgm:constr type="rMarg" refType="primFontSz" fact="0.315"/>
+                  </dgm:constrLst>
+                </dgm:else>
+              </dgm:choose>
+              <dgm:ruleLst>
+                <dgm:rule type="h" val="INF" fact="NaN" max="NaN"/>
+              </dgm:ruleLst>
+            </dgm:layoutNode>
+            <dgm:layoutNode name="desTx" styleLbl="revTx">
+              <dgm:varLst>
+                <dgm:bulletEnabled val="1"/>
+              </dgm:varLst>
+              <dgm:alg type="tx">
+                <dgm:param type="stBulletLvl" val="1"/>
+              </dgm:alg>
+              <dgm:choose name="Name16">
+                <dgm:if name="Name17" axis="ch" ptType="node" func="cnt" op="gte" val="1">
+                  <dgm:shape xmlns:r="http://schemas.openxmlformats.org/officeDocument/2006/relationships" type="rect" r:blip="">
+                    <dgm:adjLst/>
+                  </dgm:shape>
+                </dgm:if>
+                <dgm:else name="Name18">
+                  <dgm:shape xmlns:r="http://schemas.openxmlformats.org/officeDocument/2006/relationships" type="rect" r:blip="" hideGeom="1">
+                    <dgm:adjLst/>
+                  </dgm:shape>
+                </dgm:else>
+              </dgm:choose>
+              <dgm:presOf axis="des" ptType="node"/>
+              <dgm:constrLst>
+                <dgm:constr type="secFontSz" val="65"/>
+                <dgm:constr type="primFontSz" refType="secFontSz"/>
+                <dgm:constr type="h"/>
+                <dgm:constr type="tMarg"/>
+                <dgm:constr type="bMarg"/>
+                <dgm:constr type="rMarg"/>
+                <dgm:constr type="lMarg"/>
+              </dgm:constrLst>
+              <dgm:ruleLst>
+                <dgm:rule type="h" val="INF" fact="NaN" max="NaN"/>
+              </dgm:ruleLst>
+            </dgm:layoutNode>
+          </dgm:layoutNode>
+          <dgm:forEach name="Name19" axis="followSib" ptType="sibTrans" cnt="1">
+            <dgm:layoutNode name="space">
+              <dgm:alg type="sp"/>
+              <dgm:shape xmlns:r="http://schemas.openxmlformats.org/officeDocument/2006/relationships" r:blip="">
+                <dgm:adjLst/>
+              </dgm:shape>
+              <dgm:presOf/>
+              <dgm:constrLst/>
+              <dgm:ruleLst/>
+            </dgm:layoutNode>
+          </dgm:forEach>
+        </dgm:forEach>
+      </dgm:if>
+      <dgm:else name="Name20">
+        <dgm:constrLst>
+          <dgm:constr type="w" for="ch" forName="parTxOnly" refType="w"/>
+          <dgm:constr type="h" for="des" forName="parTxOnly" op="equ"/>
+          <dgm:constr type="primFontSz" for="des" forName="parTxOnly" op="equ" val="65"/>
+          <dgm:constr type="w" for="ch" forName="parTxOnlySpace" refType="w" refFor="ch" refForName="parTxOnly" fact="-0.1"/>
+        </dgm:constrLst>
+        <dgm:ruleLst/>
+        <dgm:forEach name="Name21" axis="ch" ptType="node">
+          <dgm:layoutNode name="parTxOnly">
+            <dgm:varLst>
+              <dgm:chMax val="0"/>
+              <dgm:chPref val="0"/>
+              <dgm:bulletEnabled val="1"/>
+            </dgm:varLst>
+            <dgm:alg type="tx"/>
+            <dgm:choose name="Name22">
+              <dgm:if name="Name23" func="var" arg="dir" op="equ" val="norm">
+                <dgm:shape xmlns:r="http://schemas.openxmlformats.org/officeDocument/2006/relationships" type="chevron" r:blip="">
+                  <dgm:adjLst/>
+                </dgm:shape>
+              </dgm:if>
+              <dgm:else name="Name24">
+                <dgm:shape xmlns:r="http://schemas.openxmlformats.org/officeDocument/2006/relationships" rot="180" type="chevron" r:blip="">
+                  <dgm:adjLst/>
+                </dgm:shape>
+              </dgm:else>
+            </dgm:choose>
+            <dgm:presOf axis="self" ptType="node"/>
+            <dgm:choose name="Name25">
+              <dgm:if name="Name26" func="var" arg="dir" op="equ" val="norm">
+                <dgm:constrLst>
+                  <dgm:constr type="h" refType="w" op="equ" fact="0.4"/>
+                  <dgm:constr type="tMarg" refType="primFontSz" fact="0.105"/>
+                  <dgm:constr type="bMarg" refType="primFontSz" fact="0.105"/>
+                  <dgm:constr type="lMarg" refType="primFontSz" fact="0.315"/>
+                  <dgm:constr type="rMarg" refType="primFontSz" fact="0.105"/>
+                </dgm:constrLst>
+              </dgm:if>
+              <dgm:else name="Name27">
+                <dgm:constrLst>
+                  <dgm:constr type="h" refType="w" op="equ" fact="0.4"/>
+                  <dgm:constr type="tMarg" refType="primFontSz" fact="0.105"/>
+                  <dgm:constr type="bMarg" refType="primFontSz" fact="0.105"/>
+                  <dgm:constr type="lMarg" refType="primFontSz" fact="0.105"/>
+                  <dgm:constr type="rMarg" refType="primFontSz" fact="0.315"/>
+                </dgm:constrLst>
+              </dgm:else>
+            </dgm:choose>
+            <dgm:ruleLst>
+              <dgm:rule type="primFontSz" val="5" fact="NaN" max="NaN"/>
+            </dgm:ruleLst>
+          </dgm:layoutNode>
+          <dgm:forEach name="Name28" axis="followSib" ptType="sibTrans" cnt="1">
+            <dgm:layoutNode name="parTxOnlySpace">
+              <dgm:alg type="sp"/>
+              <dgm:shape xmlns:r="http://schemas.openxmlformats.org/officeDocument/2006/relationships" r:blip="">
+                <dgm:adjLst/>
+              </dgm:shape>
+              <dgm:presOf/>
+              <dgm:constrLst/>
+              <dgm:ruleLst/>
+            </dgm:layoutNode>
+          </dgm:forEach>
+        </dgm:forEach>
+      </dgm:else>
+    </dgm:choose>
+  </dgm:layoutNode>
+</dgm:layoutDef>
+</file>
+
 <file path=ppt/diagrams/quickStyle1.xml><?xml version="1.0" encoding="utf-8"?>
 <dgm:styleDef xmlns:dgm="http://schemas.openxmlformats.org/drawingml/2006/diagram" xmlns:a="http://schemas.openxmlformats.org/drawingml/2006/main" uniqueId="urn:microsoft.com/office/officeart/2005/8/quickstyle/simple1">
   <dgm:title val=""/>
@@ -17251,6 +18910,1040 @@
 </file>
 
 <file path=ppt/diagrams/quickStyle4.xml><?xml version="1.0" encoding="utf-8"?>
+<dgm:styleDef xmlns:dgm="http://schemas.openxmlformats.org/drawingml/2006/diagram" xmlns:a="http://schemas.openxmlformats.org/drawingml/2006/main" uniqueId="urn:microsoft.com/office/officeart/2005/8/quickstyle/simple1">
+  <dgm:title val=""/>
+  <dgm:desc val=""/>
+  <dgm:catLst>
+    <dgm:cat type="simple" pri="10100"/>
+  </dgm:catLst>
+  <dgm:scene3d>
+    <a:camera prst="orthographicFront"/>
+    <a:lightRig rig="threePt" dir="t"/>
+  </dgm:scene3d>
+  <dgm:styleLbl name="node0">
+    <dgm:scene3d>
+      <a:camera prst="orthographicFront"/>
+      <a:lightRig rig="threePt" dir="t"/>
+    </dgm:scene3d>
+    <dgm:sp3d/>
+    <dgm:txPr/>
+    <dgm:style>
+      <a:lnRef idx="2">
+        <a:scrgbClr r="0" g="0" b="0"/>
+      </a:lnRef>
+      <a:fillRef idx="1">
+        <a:scrgbClr r="0" g="0" b="0"/>
+      </a:fillRef>
+      <a:effectRef idx="0">
+        <a:scrgbClr r="0" g="0" b="0"/>
+      </a:effectRef>
+      <a:fontRef idx="minor">
+        <a:schemeClr val="lt1"/>
+      </a:fontRef>
+    </dgm:style>
+  </dgm:styleLbl>
+  <dgm:styleLbl name="lnNode1">
+    <dgm:scene3d>
+      <a:camera prst="orthographicFront"/>
+      <a:lightRig rig="threePt" dir="t"/>
+    </dgm:scene3d>
+    <dgm:sp3d/>
+    <dgm:txPr/>
+    <dgm:style>
+      <a:lnRef idx="2">
+        <a:scrgbClr r="0" g="0" b="0"/>
+      </a:lnRef>
+      <a:fillRef idx="1">
+        <a:scrgbClr r="0" g="0" b="0"/>
+      </a:fillRef>
+      <a:effectRef idx="0">
+        <a:scrgbClr r="0" g="0" b="0"/>
+      </a:effectRef>
+      <a:fontRef idx="minor">
+        <a:schemeClr val="lt1"/>
+      </a:fontRef>
+    </dgm:style>
+  </dgm:styleLbl>
+  <dgm:styleLbl name="vennNode1">
+    <dgm:scene3d>
+      <a:camera prst="orthographicFront"/>
+      <a:lightRig rig="threePt" dir="t"/>
+    </dgm:scene3d>
+    <dgm:sp3d/>
+    <dgm:txPr/>
+    <dgm:style>
+      <a:lnRef idx="2">
+        <a:scrgbClr r="0" g="0" b="0"/>
+      </a:lnRef>
+      <a:fillRef idx="1">
+        <a:scrgbClr r="0" g="0" b="0"/>
+      </a:fillRef>
+      <a:effectRef idx="0">
+        <a:scrgbClr r="0" g="0" b="0"/>
+      </a:effectRef>
+      <a:fontRef idx="minor">
+        <a:schemeClr val="tx1"/>
+      </a:fontRef>
+    </dgm:style>
+  </dgm:styleLbl>
+  <dgm:styleLbl name="alignNode1">
+    <dgm:scene3d>
+      <a:camera prst="orthographicFront"/>
+      <a:lightRig rig="threePt" dir="t"/>
+    </dgm:scene3d>
+    <dgm:sp3d/>
+    <dgm:txPr/>
+    <dgm:style>
+      <a:lnRef idx="2">
+        <a:scrgbClr r="0" g="0" b="0"/>
+      </a:lnRef>
+      <a:fillRef idx="1">
+        <a:scrgbClr r="0" g="0" b="0"/>
+      </a:fillRef>
+      <a:effectRef idx="0">
+        <a:scrgbClr r="0" g="0" b="0"/>
+      </a:effectRef>
+      <a:fontRef idx="minor">
+        <a:schemeClr val="lt1"/>
+      </a:fontRef>
+    </dgm:style>
+  </dgm:styleLbl>
+  <dgm:styleLbl name="node1">
+    <dgm:scene3d>
+      <a:camera prst="orthographicFront"/>
+      <a:lightRig rig="threePt" dir="t"/>
+    </dgm:scene3d>
+    <dgm:sp3d/>
+    <dgm:txPr/>
+    <dgm:style>
+      <a:lnRef idx="2">
+        <a:scrgbClr r="0" g="0" b="0"/>
+      </a:lnRef>
+      <a:fillRef idx="1">
+        <a:scrgbClr r="0" g="0" b="0"/>
+      </a:fillRef>
+      <a:effectRef idx="0">
+        <a:scrgbClr r="0" g="0" b="0"/>
+      </a:effectRef>
+      <a:fontRef idx="minor">
+        <a:schemeClr val="lt1"/>
+      </a:fontRef>
+    </dgm:style>
+  </dgm:styleLbl>
+  <dgm:styleLbl name="node2">
+    <dgm:scene3d>
+      <a:camera prst="orthographicFront"/>
+      <a:lightRig rig="threePt" dir="t"/>
+    </dgm:scene3d>
+    <dgm:sp3d/>
+    <dgm:txPr/>
+    <dgm:style>
+      <a:lnRef idx="2">
+        <a:scrgbClr r="0" g="0" b="0"/>
+      </a:lnRef>
+      <a:fillRef idx="1">
+        <a:scrgbClr r="0" g="0" b="0"/>
+      </a:fillRef>
+      <a:effectRef idx="0">
+        <a:scrgbClr r="0" g="0" b="0"/>
+      </a:effectRef>
+      <a:fontRef idx="minor">
+        <a:schemeClr val="lt1"/>
+      </a:fontRef>
+    </dgm:style>
+  </dgm:styleLbl>
+  <dgm:styleLbl name="node3">
+    <dgm:scene3d>
+      <a:camera prst="orthographicFront"/>
+      <a:lightRig rig="threePt" dir="t"/>
+    </dgm:scene3d>
+    <dgm:sp3d/>
+    <dgm:txPr/>
+    <dgm:style>
+      <a:lnRef idx="2">
+        <a:scrgbClr r="0" g="0" b="0"/>
+      </a:lnRef>
+      <a:fillRef idx="1">
+        <a:scrgbClr r="0" g="0" b="0"/>
+      </a:fillRef>
+      <a:effectRef idx="0">
+        <a:scrgbClr r="0" g="0" b="0"/>
+      </a:effectRef>
+      <a:fontRef idx="minor">
+        <a:schemeClr val="lt1"/>
+      </a:fontRef>
+    </dgm:style>
+  </dgm:styleLbl>
+  <dgm:styleLbl name="node4">
+    <dgm:scene3d>
+      <a:camera prst="orthographicFront"/>
+      <a:lightRig rig="threePt" dir="t"/>
+    </dgm:scene3d>
+    <dgm:sp3d/>
+    <dgm:txPr/>
+    <dgm:style>
+      <a:lnRef idx="2">
+        <a:scrgbClr r="0" g="0" b="0"/>
+      </a:lnRef>
+      <a:fillRef idx="1">
+        <a:scrgbClr r="0" g="0" b="0"/>
+      </a:fillRef>
+      <a:effectRef idx="0">
+        <a:scrgbClr r="0" g="0" b="0"/>
+      </a:effectRef>
+      <a:fontRef idx="minor">
+        <a:schemeClr val="lt1"/>
+      </a:fontRef>
+    </dgm:style>
+  </dgm:styleLbl>
+  <dgm:styleLbl name="fgImgPlace1">
+    <dgm:scene3d>
+      <a:camera prst="orthographicFront"/>
+      <a:lightRig rig="threePt" dir="t"/>
+    </dgm:scene3d>
+    <dgm:sp3d/>
+    <dgm:txPr/>
+    <dgm:style>
+      <a:lnRef idx="2">
+        <a:scrgbClr r="0" g="0" b="0"/>
+      </a:lnRef>
+      <a:fillRef idx="1">
+        <a:scrgbClr r="0" g="0" b="0"/>
+      </a:fillRef>
+      <a:effectRef idx="0">
+        <a:scrgbClr r="0" g="0" b="0"/>
+      </a:effectRef>
+      <a:fontRef idx="minor"/>
+    </dgm:style>
+  </dgm:styleLbl>
+  <dgm:styleLbl name="alignImgPlace1">
+    <dgm:scene3d>
+      <a:camera prst="orthographicFront"/>
+      <a:lightRig rig="threePt" dir="t"/>
+    </dgm:scene3d>
+    <dgm:sp3d/>
+    <dgm:txPr/>
+    <dgm:style>
+      <a:lnRef idx="2">
+        <a:scrgbClr r="0" g="0" b="0"/>
+      </a:lnRef>
+      <a:fillRef idx="1">
+        <a:scrgbClr r="0" g="0" b="0"/>
+      </a:fillRef>
+      <a:effectRef idx="0">
+        <a:scrgbClr r="0" g="0" b="0"/>
+      </a:effectRef>
+      <a:fontRef idx="minor"/>
+    </dgm:style>
+  </dgm:styleLbl>
+  <dgm:styleLbl name="bgImgPlace1">
+    <dgm:scene3d>
+      <a:camera prst="orthographicFront"/>
+      <a:lightRig rig="threePt" dir="t"/>
+    </dgm:scene3d>
+    <dgm:sp3d/>
+    <dgm:txPr/>
+    <dgm:style>
+      <a:lnRef idx="2">
+        <a:scrgbClr r="0" g="0" b="0"/>
+      </a:lnRef>
+      <a:fillRef idx="1">
+        <a:scrgbClr r="0" g="0" b="0"/>
+      </a:fillRef>
+      <a:effectRef idx="0">
+        <a:scrgbClr r="0" g="0" b="0"/>
+      </a:effectRef>
+      <a:fontRef idx="minor"/>
+    </dgm:style>
+  </dgm:styleLbl>
+  <dgm:styleLbl name="sibTrans2D1">
+    <dgm:scene3d>
+      <a:camera prst="orthographicFront"/>
+      <a:lightRig rig="threePt" dir="t"/>
+    </dgm:scene3d>
+    <dgm:sp3d/>
+    <dgm:txPr/>
+    <dgm:style>
+      <a:lnRef idx="0">
+        <a:scrgbClr r="0" g="0" b="0"/>
+      </a:lnRef>
+      <a:fillRef idx="1">
+        <a:scrgbClr r="0" g="0" b="0"/>
+      </a:fillRef>
+      <a:effectRef idx="0">
+        <a:scrgbClr r="0" g="0" b="0"/>
+      </a:effectRef>
+      <a:fontRef idx="minor">
+        <a:schemeClr val="lt1"/>
+      </a:fontRef>
+    </dgm:style>
+  </dgm:styleLbl>
+  <dgm:styleLbl name="fgSibTrans2D1">
+    <dgm:scene3d>
+      <a:camera prst="orthographicFront"/>
+      <a:lightRig rig="threePt" dir="t"/>
+    </dgm:scene3d>
+    <dgm:sp3d/>
+    <dgm:txPr/>
+    <dgm:style>
+      <a:lnRef idx="0">
+        <a:scrgbClr r="0" g="0" b="0"/>
+      </a:lnRef>
+      <a:fillRef idx="1">
+        <a:scrgbClr r="0" g="0" b="0"/>
+      </a:fillRef>
+      <a:effectRef idx="0">
+        <a:scrgbClr r="0" g="0" b="0"/>
+      </a:effectRef>
+      <a:fontRef idx="minor">
+        <a:schemeClr val="lt1"/>
+      </a:fontRef>
+    </dgm:style>
+  </dgm:styleLbl>
+  <dgm:styleLbl name="bgSibTrans2D1">
+    <dgm:scene3d>
+      <a:camera prst="orthographicFront"/>
+      <a:lightRig rig="threePt" dir="t"/>
+    </dgm:scene3d>
+    <dgm:sp3d/>
+    <dgm:txPr/>
+    <dgm:style>
+      <a:lnRef idx="0">
+        <a:scrgbClr r="0" g="0" b="0"/>
+      </a:lnRef>
+      <a:fillRef idx="1">
+        <a:scrgbClr r="0" g="0" b="0"/>
+      </a:fillRef>
+      <a:effectRef idx="0">
+        <a:scrgbClr r="0" g="0" b="0"/>
+      </a:effectRef>
+      <a:fontRef idx="minor">
+        <a:schemeClr val="lt1"/>
+      </a:fontRef>
+    </dgm:style>
+  </dgm:styleLbl>
+  <dgm:styleLbl name="sibTrans1D1">
+    <dgm:scene3d>
+      <a:camera prst="orthographicFront"/>
+      <a:lightRig rig="threePt" dir="t"/>
+    </dgm:scene3d>
+    <dgm:sp3d/>
+    <dgm:txPr/>
+    <dgm:style>
+      <a:lnRef idx="1">
+        <a:scrgbClr r="0" g="0" b="0"/>
+      </a:lnRef>
+      <a:fillRef idx="0">
+        <a:scrgbClr r="0" g="0" b="0"/>
+      </a:fillRef>
+      <a:effectRef idx="0">
+        <a:scrgbClr r="0" g="0" b="0"/>
+      </a:effectRef>
+      <a:fontRef idx="minor"/>
+    </dgm:style>
+  </dgm:styleLbl>
+  <dgm:styleLbl name="callout">
+    <dgm:scene3d>
+      <a:camera prst="orthographicFront"/>
+      <a:lightRig rig="threePt" dir="t"/>
+    </dgm:scene3d>
+    <dgm:sp3d/>
+    <dgm:txPr/>
+    <dgm:style>
+      <a:lnRef idx="2">
+        <a:scrgbClr r="0" g="0" b="0"/>
+      </a:lnRef>
+      <a:fillRef idx="1">
+        <a:scrgbClr r="0" g="0" b="0"/>
+      </a:fillRef>
+      <a:effectRef idx="0">
+        <a:scrgbClr r="0" g="0" b="0"/>
+      </a:effectRef>
+      <a:fontRef idx="minor"/>
+    </dgm:style>
+  </dgm:styleLbl>
+  <dgm:styleLbl name="asst0">
+    <dgm:scene3d>
+      <a:camera prst="orthographicFront"/>
+      <a:lightRig rig="threePt" dir="t"/>
+    </dgm:scene3d>
+    <dgm:sp3d/>
+    <dgm:txPr/>
+    <dgm:style>
+      <a:lnRef idx="2">
+        <a:scrgbClr r="0" g="0" b="0"/>
+      </a:lnRef>
+      <a:fillRef idx="1">
+        <a:scrgbClr r="0" g="0" b="0"/>
+      </a:fillRef>
+      <a:effectRef idx="0">
+        <a:scrgbClr r="0" g="0" b="0"/>
+      </a:effectRef>
+      <a:fontRef idx="minor">
+        <a:schemeClr val="lt1"/>
+      </a:fontRef>
+    </dgm:style>
+  </dgm:styleLbl>
+  <dgm:styleLbl name="asst1">
+    <dgm:scene3d>
+      <a:camera prst="orthographicFront"/>
+      <a:lightRig rig="threePt" dir="t"/>
+    </dgm:scene3d>
+    <dgm:sp3d/>
+    <dgm:txPr/>
+    <dgm:style>
+      <a:lnRef idx="2">
+        <a:scrgbClr r="0" g="0" b="0"/>
+      </a:lnRef>
+      <a:fillRef idx="1">
+        <a:scrgbClr r="0" g="0" b="0"/>
+      </a:fillRef>
+      <a:effectRef idx="0">
+        <a:scrgbClr r="0" g="0" b="0"/>
+      </a:effectRef>
+      <a:fontRef idx="minor">
+        <a:schemeClr val="lt1"/>
+      </a:fontRef>
+    </dgm:style>
+  </dgm:styleLbl>
+  <dgm:styleLbl name="asst2">
+    <dgm:scene3d>
+      <a:camera prst="orthographicFront"/>
+      <a:lightRig rig="threePt" dir="t"/>
+    </dgm:scene3d>
+    <dgm:sp3d/>
+    <dgm:txPr/>
+    <dgm:style>
+      <a:lnRef idx="2">
+        <a:scrgbClr r="0" g="0" b="0"/>
+      </a:lnRef>
+      <a:fillRef idx="1">
+        <a:scrgbClr r="0" g="0" b="0"/>
+      </a:fillRef>
+      <a:effectRef idx="0">
+        <a:scrgbClr r="0" g="0" b="0"/>
+      </a:effectRef>
+      <a:fontRef idx="minor">
+        <a:schemeClr val="lt1"/>
+      </a:fontRef>
+    </dgm:style>
+  </dgm:styleLbl>
+  <dgm:styleLbl name="asst3">
+    <dgm:scene3d>
+      <a:camera prst="orthographicFront"/>
+      <a:lightRig rig="threePt" dir="t"/>
+    </dgm:scene3d>
+    <dgm:sp3d/>
+    <dgm:txPr/>
+    <dgm:style>
+      <a:lnRef idx="2">
+        <a:scrgbClr r="0" g="0" b="0"/>
+      </a:lnRef>
+      <a:fillRef idx="1">
+        <a:scrgbClr r="0" g="0" b="0"/>
+      </a:fillRef>
+      <a:effectRef idx="0">
+        <a:scrgbClr r="0" g="0" b="0"/>
+      </a:effectRef>
+      <a:fontRef idx="minor">
+        <a:schemeClr val="lt1"/>
+      </a:fontRef>
+    </dgm:style>
+  </dgm:styleLbl>
+  <dgm:styleLbl name="asst4">
+    <dgm:scene3d>
+      <a:camera prst="orthographicFront"/>
+      <a:lightRig rig="threePt" dir="t"/>
+    </dgm:scene3d>
+    <dgm:sp3d/>
+    <dgm:txPr/>
+    <dgm:style>
+      <a:lnRef idx="2">
+        <a:scrgbClr r="0" g="0" b="0"/>
+      </a:lnRef>
+      <a:fillRef idx="1">
+        <a:scrgbClr r="0" g="0" b="0"/>
+      </a:fillRef>
+      <a:effectRef idx="0">
+        <a:scrgbClr r="0" g="0" b="0"/>
+      </a:effectRef>
+      <a:fontRef idx="minor">
+        <a:schemeClr val="lt1"/>
+      </a:fontRef>
+    </dgm:style>
+  </dgm:styleLbl>
+  <dgm:styleLbl name="parChTrans2D1">
+    <dgm:scene3d>
+      <a:camera prst="orthographicFront"/>
+      <a:lightRig rig="threePt" dir="t"/>
+    </dgm:scene3d>
+    <dgm:sp3d/>
+    <dgm:txPr/>
+    <dgm:style>
+      <a:lnRef idx="2">
+        <a:scrgbClr r="0" g="0" b="0"/>
+      </a:lnRef>
+      <a:fillRef idx="1">
+        <a:scrgbClr r="0" g="0" b="0"/>
+      </a:fillRef>
+      <a:effectRef idx="0">
+        <a:scrgbClr r="0" g="0" b="0"/>
+      </a:effectRef>
+      <a:fontRef idx="minor">
+        <a:schemeClr val="lt1"/>
+      </a:fontRef>
+    </dgm:style>
+  </dgm:styleLbl>
+  <dgm:styleLbl name="parChTrans2D2">
+    <dgm:scene3d>
+      <a:camera prst="orthographicFront"/>
+      <a:lightRig rig="threePt" dir="t"/>
+    </dgm:scene3d>
+    <dgm:sp3d/>
+    <dgm:txPr/>
+    <dgm:style>
+      <a:lnRef idx="2">
+        <a:scrgbClr r="0" g="0" b="0"/>
+      </a:lnRef>
+      <a:fillRef idx="1">
+        <a:scrgbClr r="0" g="0" b="0"/>
+      </a:fillRef>
+      <a:effectRef idx="0">
+        <a:scrgbClr r="0" g="0" b="0"/>
+      </a:effectRef>
+      <a:fontRef idx="minor">
+        <a:schemeClr val="lt1"/>
+      </a:fontRef>
+    </dgm:style>
+  </dgm:styleLbl>
+  <dgm:styleLbl name="parChTrans2D3">
+    <dgm:scene3d>
+      <a:camera prst="orthographicFront"/>
+      <a:lightRig rig="threePt" dir="t"/>
+    </dgm:scene3d>
+    <dgm:sp3d/>
+    <dgm:txPr/>
+    <dgm:style>
+      <a:lnRef idx="2">
+        <a:scrgbClr r="0" g="0" b="0"/>
+      </a:lnRef>
+      <a:fillRef idx="1">
+        <a:scrgbClr r="0" g="0" b="0"/>
+      </a:fillRef>
+      <a:effectRef idx="0">
+        <a:scrgbClr r="0" g="0" b="0"/>
+      </a:effectRef>
+      <a:fontRef idx="minor">
+        <a:schemeClr val="lt1"/>
+      </a:fontRef>
+    </dgm:style>
+  </dgm:styleLbl>
+  <dgm:styleLbl name="parChTrans2D4">
+    <dgm:scene3d>
+      <a:camera prst="orthographicFront"/>
+      <a:lightRig rig="threePt" dir="t"/>
+    </dgm:scene3d>
+    <dgm:sp3d/>
+    <dgm:txPr/>
+    <dgm:style>
+      <a:lnRef idx="2">
+        <a:scrgbClr r="0" g="0" b="0"/>
+      </a:lnRef>
+      <a:fillRef idx="1">
+        <a:scrgbClr r="0" g="0" b="0"/>
+      </a:fillRef>
+      <a:effectRef idx="0">
+        <a:scrgbClr r="0" g="0" b="0"/>
+      </a:effectRef>
+      <a:fontRef idx="minor">
+        <a:schemeClr val="lt1"/>
+      </a:fontRef>
+    </dgm:style>
+  </dgm:styleLbl>
+  <dgm:styleLbl name="parChTrans1D1">
+    <dgm:scene3d>
+      <a:camera prst="orthographicFront"/>
+      <a:lightRig rig="threePt" dir="t"/>
+    </dgm:scene3d>
+    <dgm:sp3d/>
+    <dgm:txPr/>
+    <dgm:style>
+      <a:lnRef idx="2">
+        <a:scrgbClr r="0" g="0" b="0"/>
+      </a:lnRef>
+      <a:fillRef idx="0">
+        <a:scrgbClr r="0" g="0" b="0"/>
+      </a:fillRef>
+      <a:effectRef idx="0">
+        <a:scrgbClr r="0" g="0" b="0"/>
+      </a:effectRef>
+      <a:fontRef idx="minor"/>
+    </dgm:style>
+  </dgm:styleLbl>
+  <dgm:styleLbl name="parChTrans1D2">
+    <dgm:scene3d>
+      <a:camera prst="orthographicFront"/>
+      <a:lightRig rig="threePt" dir="t"/>
+    </dgm:scene3d>
+    <dgm:sp3d/>
+    <dgm:txPr/>
+    <dgm:style>
+      <a:lnRef idx="2">
+        <a:scrgbClr r="0" g="0" b="0"/>
+      </a:lnRef>
+      <a:fillRef idx="0">
+        <a:scrgbClr r="0" g="0" b="0"/>
+      </a:fillRef>
+      <a:effectRef idx="0">
+        <a:scrgbClr r="0" g="0" b="0"/>
+      </a:effectRef>
+      <a:fontRef idx="minor"/>
+    </dgm:style>
+  </dgm:styleLbl>
+  <dgm:styleLbl name="parChTrans1D3">
+    <dgm:scene3d>
+      <a:camera prst="orthographicFront"/>
+      <a:lightRig rig="threePt" dir="t"/>
+    </dgm:scene3d>
+    <dgm:sp3d/>
+    <dgm:txPr/>
+    <dgm:style>
+      <a:lnRef idx="2">
+        <a:scrgbClr r="0" g="0" b="0"/>
+      </a:lnRef>
+      <a:fillRef idx="0">
+        <a:scrgbClr r="0" g="0" b="0"/>
+      </a:fillRef>
+      <a:effectRef idx="0">
+        <a:scrgbClr r="0" g="0" b="0"/>
+      </a:effectRef>
+      <a:fontRef idx="minor"/>
+    </dgm:style>
+  </dgm:styleLbl>
+  <dgm:styleLbl name="parChTrans1D4">
+    <dgm:scene3d>
+      <a:camera prst="orthographicFront"/>
+      <a:lightRig rig="threePt" dir="t"/>
+    </dgm:scene3d>
+    <dgm:sp3d/>
+    <dgm:txPr/>
+    <dgm:style>
+      <a:lnRef idx="2">
+        <a:scrgbClr r="0" g="0" b="0"/>
+      </a:lnRef>
+      <a:fillRef idx="0">
+        <a:scrgbClr r="0" g="0" b="0"/>
+      </a:fillRef>
+      <a:effectRef idx="0">
+        <a:scrgbClr r="0" g="0" b="0"/>
+      </a:effectRef>
+      <a:fontRef idx="minor"/>
+    </dgm:style>
+  </dgm:styleLbl>
+  <dgm:styleLbl name="fgAcc1">
+    <dgm:scene3d>
+      <a:camera prst="orthographicFront"/>
+      <a:lightRig rig="threePt" dir="t"/>
+    </dgm:scene3d>
+    <dgm:sp3d/>
+    <dgm:txPr/>
+    <dgm:style>
+      <a:lnRef idx="2">
+        <a:scrgbClr r="0" g="0" b="0"/>
+      </a:lnRef>
+      <a:fillRef idx="1">
+        <a:scrgbClr r="0" g="0" b="0"/>
+      </a:fillRef>
+      <a:effectRef idx="0">
+        <a:scrgbClr r="0" g="0" b="0"/>
+      </a:effectRef>
+      <a:fontRef idx="minor"/>
+    </dgm:style>
+  </dgm:styleLbl>
+  <dgm:styleLbl name="conFgAcc1">
+    <dgm:scene3d>
+      <a:camera prst="orthographicFront"/>
+      <a:lightRig rig="threePt" dir="t"/>
+    </dgm:scene3d>
+    <dgm:sp3d/>
+    <dgm:txPr/>
+    <dgm:style>
+      <a:lnRef idx="2">
+        <a:scrgbClr r="0" g="0" b="0"/>
+      </a:lnRef>
+      <a:fillRef idx="1">
+        <a:scrgbClr r="0" g="0" b="0"/>
+      </a:fillRef>
+      <a:effectRef idx="0">
+        <a:scrgbClr r="0" g="0" b="0"/>
+      </a:effectRef>
+      <a:fontRef idx="minor"/>
+    </dgm:style>
+  </dgm:styleLbl>
+  <dgm:styleLbl name="alignAcc1">
+    <dgm:scene3d>
+      <a:camera prst="orthographicFront"/>
+      <a:lightRig rig="threePt" dir="t"/>
+    </dgm:scene3d>
+    <dgm:sp3d/>
+    <dgm:txPr/>
+    <dgm:style>
+      <a:lnRef idx="2">
+        <a:scrgbClr r="0" g="0" b="0"/>
+      </a:lnRef>
+      <a:fillRef idx="1">
+        <a:scrgbClr r="0" g="0" b="0"/>
+      </a:fillRef>
+      <a:effectRef idx="0">
+        <a:scrgbClr r="0" g="0" b="0"/>
+      </a:effectRef>
+      <a:fontRef idx="minor"/>
+    </dgm:style>
+  </dgm:styleLbl>
+  <dgm:styleLbl name="trAlignAcc1">
+    <dgm:scene3d>
+      <a:camera prst="orthographicFront"/>
+      <a:lightRig rig="threePt" dir="t"/>
+    </dgm:scene3d>
+    <dgm:sp3d/>
+    <dgm:txPr/>
+    <dgm:style>
+      <a:lnRef idx="1">
+        <a:scrgbClr r="0" g="0" b="0"/>
+      </a:lnRef>
+      <a:fillRef idx="1">
+        <a:scrgbClr r="0" g="0" b="0"/>
+      </a:fillRef>
+      <a:effectRef idx="0">
+        <a:scrgbClr r="0" g="0" b="0"/>
+      </a:effectRef>
+      <a:fontRef idx="minor"/>
+    </dgm:style>
+  </dgm:styleLbl>
+  <dgm:styleLbl name="bgAcc1">
+    <dgm:scene3d>
+      <a:camera prst="orthographicFront"/>
+      <a:lightRig rig="threePt" dir="t"/>
+    </dgm:scene3d>
+    <dgm:sp3d/>
+    <dgm:txPr/>
+    <dgm:style>
+      <a:lnRef idx="2">
+        <a:scrgbClr r="0" g="0" b="0"/>
+      </a:lnRef>
+      <a:fillRef idx="1">
+        <a:scrgbClr r="0" g="0" b="0"/>
+      </a:fillRef>
+      <a:effectRef idx="0">
+        <a:scrgbClr r="0" g="0" b="0"/>
+      </a:effectRef>
+      <a:fontRef idx="minor"/>
+    </dgm:style>
+  </dgm:styleLbl>
+  <dgm:styleLbl name="solidFgAcc1">
+    <dgm:scene3d>
+      <a:camera prst="orthographicFront"/>
+      <a:lightRig rig="threePt" dir="t"/>
+    </dgm:scene3d>
+    <dgm:sp3d/>
+    <dgm:txPr/>
+    <dgm:style>
+      <a:lnRef idx="2">
+        <a:scrgbClr r="0" g="0" b="0"/>
+      </a:lnRef>
+      <a:fillRef idx="1">
+        <a:scrgbClr r="0" g="0" b="0"/>
+      </a:fillRef>
+      <a:effectRef idx="0">
+        <a:scrgbClr r="0" g="0" b="0"/>
+      </a:effectRef>
+      <a:fontRef idx="minor"/>
+    </dgm:style>
+  </dgm:styleLbl>
+  <dgm:styleLbl name="solidAlignAcc1">
+    <dgm:scene3d>
+      <a:camera prst="orthographicFront"/>
+      <a:lightRig rig="threePt" dir="t"/>
+    </dgm:scene3d>
+    <dgm:sp3d/>
+    <dgm:txPr/>
+    <dgm:style>
+      <a:lnRef idx="2">
+        <a:scrgbClr r="0" g="0" b="0"/>
+      </a:lnRef>
+      <a:fillRef idx="1">
+        <a:scrgbClr r="0" g="0" b="0"/>
+      </a:fillRef>
+      <a:effectRef idx="0">
+        <a:scrgbClr r="0" g="0" b="0"/>
+      </a:effectRef>
+      <a:fontRef idx="minor"/>
+    </dgm:style>
+  </dgm:styleLbl>
+  <dgm:styleLbl name="solidBgAcc1">
+    <dgm:scene3d>
+      <a:camera prst="orthographicFront"/>
+      <a:lightRig rig="threePt" dir="t"/>
+    </dgm:scene3d>
+    <dgm:sp3d/>
+    <dgm:txPr/>
+    <dgm:style>
+      <a:lnRef idx="2">
+        <a:scrgbClr r="0" g="0" b="0"/>
+      </a:lnRef>
+      <a:fillRef idx="1">
+        <a:scrgbClr r="0" g="0" b="0"/>
+      </a:fillRef>
+      <a:effectRef idx="0">
+        <a:scrgbClr r="0" g="0" b="0"/>
+      </a:effectRef>
+      <a:fontRef idx="minor"/>
+    </dgm:style>
+  </dgm:styleLbl>
+  <dgm:styleLbl name="fgAccFollowNode1">
+    <dgm:scene3d>
+      <a:camera prst="orthographicFront"/>
+      <a:lightRig rig="threePt" dir="t"/>
+    </dgm:scene3d>
+    <dgm:sp3d/>
+    <dgm:txPr/>
+    <dgm:style>
+      <a:lnRef idx="2">
+        <a:scrgbClr r="0" g="0" b="0"/>
+      </a:lnRef>
+      <a:fillRef idx="1">
+        <a:scrgbClr r="0" g="0" b="0"/>
+      </a:fillRef>
+      <a:effectRef idx="0">
+        <a:scrgbClr r="0" g="0" b="0"/>
+      </a:effectRef>
+      <a:fontRef idx="minor"/>
+    </dgm:style>
+  </dgm:styleLbl>
+  <dgm:styleLbl name="alignAccFollowNode1">
+    <dgm:scene3d>
+      <a:camera prst="orthographicFront"/>
+      <a:lightRig rig="threePt" dir="t"/>
+    </dgm:scene3d>
+    <dgm:sp3d/>
+    <dgm:txPr/>
+    <dgm:style>
+      <a:lnRef idx="2">
+        <a:scrgbClr r="0" g="0" b="0"/>
+      </a:lnRef>
+      <a:fillRef idx="1">
+        <a:scrgbClr r="0" g="0" b="0"/>
+      </a:fillRef>
+      <a:effectRef idx="0">
+        <a:scrgbClr r="0" g="0" b="0"/>
+      </a:effectRef>
+      <a:fontRef idx="minor"/>
+    </dgm:style>
+  </dgm:styleLbl>
+  <dgm:styleLbl name="bgAccFollowNode1">
+    <dgm:scene3d>
+      <a:camera prst="orthographicFront"/>
+      <a:lightRig rig="threePt" dir="t"/>
+    </dgm:scene3d>
+    <dgm:sp3d/>
+    <dgm:txPr/>
+    <dgm:style>
+      <a:lnRef idx="2">
+        <a:scrgbClr r="0" g="0" b="0"/>
+      </a:lnRef>
+      <a:fillRef idx="1">
+        <a:scrgbClr r="0" g="0" b="0"/>
+      </a:fillRef>
+      <a:effectRef idx="0">
+        <a:scrgbClr r="0" g="0" b="0"/>
+      </a:effectRef>
+      <a:fontRef idx="minor"/>
+    </dgm:style>
+  </dgm:styleLbl>
+  <dgm:styleLbl name="fgAcc0">
+    <dgm:scene3d>
+      <a:camera prst="orthographicFront"/>
+      <a:lightRig rig="threePt" dir="t"/>
+    </dgm:scene3d>
+    <dgm:sp3d/>
+    <dgm:txPr/>
+    <dgm:style>
+      <a:lnRef idx="2">
+        <a:scrgbClr r="0" g="0" b="0"/>
+      </a:lnRef>
+      <a:fillRef idx="1">
+        <a:scrgbClr r="0" g="0" b="0"/>
+      </a:fillRef>
+      <a:effectRef idx="0">
+        <a:scrgbClr r="0" g="0" b="0"/>
+      </a:effectRef>
+      <a:fontRef idx="minor"/>
+    </dgm:style>
+  </dgm:styleLbl>
+  <dgm:styleLbl name="fgAcc2">
+    <dgm:scene3d>
+      <a:camera prst="orthographicFront"/>
+      <a:lightRig rig="threePt" dir="t"/>
+    </dgm:scene3d>
+    <dgm:sp3d/>
+    <dgm:txPr/>
+    <dgm:style>
+      <a:lnRef idx="2">
+        <a:scrgbClr r="0" g="0" b="0"/>
+      </a:lnRef>
+      <a:fillRef idx="1">
+        <a:scrgbClr r="0" g="0" b="0"/>
+      </a:fillRef>
+      <a:effectRef idx="0">
+        <a:scrgbClr r="0" g="0" b="0"/>
+      </a:effectRef>
+      <a:fontRef idx="minor"/>
+    </dgm:style>
+  </dgm:styleLbl>
+  <dgm:styleLbl name="fgAcc3">
+    <dgm:scene3d>
+      <a:camera prst="orthographicFront"/>
+      <a:lightRig rig="threePt" dir="t"/>
+    </dgm:scene3d>
+    <dgm:sp3d/>
+    <dgm:txPr/>
+    <dgm:style>
+      <a:lnRef idx="2">
+        <a:scrgbClr r="0" g="0" b="0"/>
+      </a:lnRef>
+      <a:fillRef idx="1">
+        <a:scrgbClr r="0" g="0" b="0"/>
+      </a:fillRef>
+      <a:effectRef idx="0">
+        <a:scrgbClr r="0" g="0" b="0"/>
+      </a:effectRef>
+      <a:fontRef idx="minor"/>
+    </dgm:style>
+  </dgm:styleLbl>
+  <dgm:styleLbl name="fgAcc4">
+    <dgm:scene3d>
+      <a:camera prst="orthographicFront"/>
+      <a:lightRig rig="threePt" dir="t"/>
+    </dgm:scene3d>
+    <dgm:sp3d/>
+    <dgm:txPr/>
+    <dgm:style>
+      <a:lnRef idx="2">
+        <a:scrgbClr r="0" g="0" b="0"/>
+      </a:lnRef>
+      <a:fillRef idx="1">
+        <a:scrgbClr r="0" g="0" b="0"/>
+      </a:fillRef>
+      <a:effectRef idx="0">
+        <a:scrgbClr r="0" g="0" b="0"/>
+      </a:effectRef>
+      <a:fontRef idx="minor"/>
+    </dgm:style>
+  </dgm:styleLbl>
+  <dgm:styleLbl name="bgShp">
+    <dgm:scene3d>
+      <a:camera prst="orthographicFront"/>
+      <a:lightRig rig="threePt" dir="t"/>
+    </dgm:scene3d>
+    <dgm:sp3d/>
+    <dgm:txPr/>
+    <dgm:style>
+      <a:lnRef idx="0">
+        <a:scrgbClr r="0" g="0" b="0"/>
+      </a:lnRef>
+      <a:fillRef idx="1">
+        <a:scrgbClr r="0" g="0" b="0"/>
+      </a:fillRef>
+      <a:effectRef idx="0">
+        <a:scrgbClr r="0" g="0" b="0"/>
+      </a:effectRef>
+      <a:fontRef idx="minor"/>
+    </dgm:style>
+  </dgm:styleLbl>
+  <dgm:styleLbl name="dkBgShp">
+    <dgm:scene3d>
+      <a:camera prst="orthographicFront"/>
+      <a:lightRig rig="threePt" dir="t"/>
+    </dgm:scene3d>
+    <dgm:sp3d/>
+    <dgm:txPr/>
+    <dgm:style>
+      <a:lnRef idx="0">
+        <a:scrgbClr r="0" g="0" b="0"/>
+      </a:lnRef>
+      <a:fillRef idx="1">
+        <a:scrgbClr r="0" g="0" b="0"/>
+      </a:fillRef>
+      <a:effectRef idx="0">
+        <a:scrgbClr r="0" g="0" b="0"/>
+      </a:effectRef>
+      <a:fontRef idx="minor"/>
+    </dgm:style>
+  </dgm:styleLbl>
+  <dgm:styleLbl name="trBgShp">
+    <dgm:scene3d>
+      <a:camera prst="orthographicFront"/>
+      <a:lightRig rig="threePt" dir="t"/>
+    </dgm:scene3d>
+    <dgm:sp3d/>
+    <dgm:txPr/>
+    <dgm:style>
+      <a:lnRef idx="0">
+        <a:scrgbClr r="0" g="0" b="0"/>
+      </a:lnRef>
+      <a:fillRef idx="1">
+        <a:scrgbClr r="0" g="0" b="0"/>
+      </a:fillRef>
+      <a:effectRef idx="0">
+        <a:scrgbClr r="0" g="0" b="0"/>
+      </a:effectRef>
+      <a:fontRef idx="minor"/>
+    </dgm:style>
+  </dgm:styleLbl>
+  <dgm:styleLbl name="fgShp">
+    <dgm:scene3d>
+      <a:camera prst="orthographicFront"/>
+      <a:lightRig rig="threePt" dir="t"/>
+    </dgm:scene3d>
+    <dgm:sp3d/>
+    <dgm:txPr/>
+    <dgm:style>
+      <a:lnRef idx="2">
+        <a:scrgbClr r="0" g="0" b="0"/>
+      </a:lnRef>
+      <a:fillRef idx="1">
+        <a:scrgbClr r="0" g="0" b="0"/>
+      </a:fillRef>
+      <a:effectRef idx="0">
+        <a:scrgbClr r="0" g="0" b="0"/>
+      </a:effectRef>
+      <a:fontRef idx="minor"/>
+    </dgm:style>
+  </dgm:styleLbl>
+  <dgm:styleLbl name="revTx">
+    <dgm:scene3d>
+      <a:camera prst="orthographicFront"/>
+      <a:lightRig rig="threePt" dir="t"/>
+    </dgm:scene3d>
+    <dgm:sp3d/>
+    <dgm:txPr/>
+    <dgm:style>
+      <a:lnRef idx="0">
+        <a:scrgbClr r="0" g="0" b="0"/>
+      </a:lnRef>
+      <a:fillRef idx="0">
+        <a:scrgbClr r="0" g="0" b="0"/>
+      </a:fillRef>
+      <a:effectRef idx="0">
+        <a:scrgbClr r="0" g="0" b="0"/>
+      </a:effectRef>
+      <a:fontRef idx="minor"/>
+    </dgm:style>
+  </dgm:styleLbl>
+</dgm:styleDef>
+</file>
+
+<file path=ppt/diagrams/quickStyle5.xml><?xml version="1.0" encoding="utf-8"?>
 <dgm:styleDef xmlns:dgm="http://schemas.openxmlformats.org/drawingml/2006/diagram" xmlns:a="http://schemas.openxmlformats.org/drawingml/2006/main" uniqueId="urn:microsoft.com/office/officeart/2005/8/quickstyle/simple1">
   <dgm:title val=""/>
   <dgm:desc val=""/>
@@ -18431,7 +21124,7 @@
           <a:p>
             <a:fld id="{AB59D792-8E26-417E-8D1C-F3DFA7FD77AE}" type="datetimeFigureOut">
               <a:rPr lang="en-US" smtClean="0"/>
-              <a:t>3/20/2026</a:t>
+              <a:t>3/23/2026</a:t>
             </a:fld>
             <a:endParaRPr lang="en-US"/>
           </a:p>
@@ -18629,7 +21322,7 @@
           <a:p>
             <a:fld id="{AB59D792-8E26-417E-8D1C-F3DFA7FD77AE}" type="datetimeFigureOut">
               <a:rPr lang="en-US" smtClean="0"/>
-              <a:t>3/20/2026</a:t>
+              <a:t>3/23/2026</a:t>
             </a:fld>
             <a:endParaRPr lang="en-US"/>
           </a:p>
@@ -18837,7 +21530,7 @@
           <a:p>
             <a:fld id="{AB59D792-8E26-417E-8D1C-F3DFA7FD77AE}" type="datetimeFigureOut">
               <a:rPr lang="en-US" smtClean="0"/>
-              <a:t>3/20/2026</a:t>
+              <a:t>3/23/2026</a:t>
             </a:fld>
             <a:endParaRPr lang="en-US"/>
           </a:p>
@@ -19035,7 +21728,7 @@
           <a:p>
             <a:fld id="{AB59D792-8E26-417E-8D1C-F3DFA7FD77AE}" type="datetimeFigureOut">
               <a:rPr lang="en-US" smtClean="0"/>
-              <a:t>3/20/2026</a:t>
+              <a:t>3/23/2026</a:t>
             </a:fld>
             <a:endParaRPr lang="en-US"/>
           </a:p>
@@ -19310,7 +22003,7 @@
           <a:p>
             <a:fld id="{AB59D792-8E26-417E-8D1C-F3DFA7FD77AE}" type="datetimeFigureOut">
               <a:rPr lang="en-US" smtClean="0"/>
-              <a:t>3/20/2026</a:t>
+              <a:t>3/23/2026</a:t>
             </a:fld>
             <a:endParaRPr lang="en-US"/>
           </a:p>
@@ -19575,7 +22268,7 @@
           <a:p>
             <a:fld id="{AB59D792-8E26-417E-8D1C-F3DFA7FD77AE}" type="datetimeFigureOut">
               <a:rPr lang="en-US" smtClean="0"/>
-              <a:t>3/20/2026</a:t>
+              <a:t>3/23/2026</a:t>
             </a:fld>
             <a:endParaRPr lang="en-US"/>
           </a:p>
@@ -19987,7 +22680,7 @@
           <a:p>
             <a:fld id="{AB59D792-8E26-417E-8D1C-F3DFA7FD77AE}" type="datetimeFigureOut">
               <a:rPr lang="en-US" smtClean="0"/>
-              <a:t>3/20/2026</a:t>
+              <a:t>3/23/2026</a:t>
             </a:fld>
             <a:endParaRPr lang="en-US"/>
           </a:p>
@@ -20128,7 +22821,7 @@
           <a:p>
             <a:fld id="{AB59D792-8E26-417E-8D1C-F3DFA7FD77AE}" type="datetimeFigureOut">
               <a:rPr lang="en-US" smtClean="0"/>
-              <a:t>3/20/2026</a:t>
+              <a:t>3/23/2026</a:t>
             </a:fld>
             <a:endParaRPr lang="en-US"/>
           </a:p>
@@ -20241,7 +22934,7 @@
           <a:p>
             <a:fld id="{AB59D792-8E26-417E-8D1C-F3DFA7FD77AE}" type="datetimeFigureOut">
               <a:rPr lang="en-US" smtClean="0"/>
-              <a:t>3/20/2026</a:t>
+              <a:t>3/23/2026</a:t>
             </a:fld>
             <a:endParaRPr lang="en-US"/>
           </a:p>
@@ -20552,7 +23245,7 @@
           <a:p>
             <a:fld id="{AB59D792-8E26-417E-8D1C-F3DFA7FD77AE}" type="datetimeFigureOut">
               <a:rPr lang="en-US" smtClean="0"/>
-              <a:t>3/20/2026</a:t>
+              <a:t>3/23/2026</a:t>
             </a:fld>
             <a:endParaRPr lang="en-US"/>
           </a:p>
@@ -20840,7 +23533,7 @@
           <a:p>
             <a:fld id="{AB59D792-8E26-417E-8D1C-F3DFA7FD77AE}" type="datetimeFigureOut">
               <a:rPr lang="en-US" smtClean="0"/>
-              <a:t>3/20/2026</a:t>
+              <a:t>3/23/2026</a:t>
             </a:fld>
             <a:endParaRPr lang="en-US"/>
           </a:p>
@@ -21081,7 +23774,7 @@
           <a:p>
             <a:fld id="{AB59D792-8E26-417E-8D1C-F3DFA7FD77AE}" type="datetimeFigureOut">
               <a:rPr lang="en-US" smtClean="0"/>
-              <a:t>3/20/2026</a:t>
+              <a:t>3/23/2026</a:t>
             </a:fld>
             <a:endParaRPr lang="en-US"/>
           </a:p>
@@ -21498,6 +24191,661 @@
           <a:chExt cx="0" cy="0"/>
         </a:xfrm>
       </p:grpSpPr>
+      <p:sp>
+        <p:nvSpPr>
+          <p:cNvPr id="2" name="Rectangle 1">
+            <a:extLst>
+              <a:ext uri="{FF2B5EF4-FFF2-40B4-BE49-F238E27FC236}">
+                <a16:creationId xmlns:a16="http://schemas.microsoft.com/office/drawing/2014/main" id="{66F65533-7196-B10E-1857-A880CAD76DD6}"/>
+              </a:ext>
+            </a:extLst>
+          </p:cNvPr>
+          <p:cNvSpPr/>
+          <p:nvPr/>
+        </p:nvSpPr>
+        <p:spPr>
+          <a:xfrm>
+            <a:off x="4418699" y="1408358"/>
+            <a:ext cx="3114763" cy="923330"/>
+          </a:xfrm>
+          <a:prstGeom prst="rect">
+            <a:avLst/>
+          </a:prstGeom>
+          <a:noFill/>
+        </p:spPr>
+        <p:txBody>
+          <a:bodyPr wrap="none" lIns="91440" tIns="45720" rIns="91440" bIns="45720">
+            <a:spAutoFit/>
+          </a:bodyPr>
+          <a:lstStyle/>
+          <a:p>
+            <a:pPr algn="ctr"/>
+            <a:r>
+              <a:rPr lang="en-US" sz="5400" b="1" cap="none" spc="0" dirty="0">
+                <a:ln w="9525">
+                  <a:solidFill>
+                    <a:schemeClr val="bg1"/>
+                  </a:solidFill>
+                  <a:prstDash val="solid"/>
+                </a:ln>
+                <a:solidFill>
+                  <a:schemeClr val="accent5"/>
+                </a:solidFill>
+                <a:effectLst>
+                  <a:outerShdw blurRad="12700" dist="38100" dir="2700000" algn="tl" rotWithShape="0">
+                    <a:schemeClr val="accent5">
+                      <a:lumMod val="60000"/>
+                      <a:lumOff val="40000"/>
+                    </a:schemeClr>
+                  </a:outerShdw>
+                </a:effectLst>
+              </a:rPr>
+              <a:t>Chapter1</a:t>
+            </a:r>
+          </a:p>
+        </p:txBody>
+      </p:sp>
+    </p:spTree>
+    <p:extLst>
+      <p:ext uri="{BB962C8B-B14F-4D97-AF65-F5344CB8AC3E}">
+        <p14:creationId xmlns:p14="http://schemas.microsoft.com/office/powerpoint/2010/main" val="3026860652"/>
+      </p:ext>
+    </p:extLst>
+  </p:cSld>
+  <p:clrMapOvr>
+    <a:masterClrMapping/>
+  </p:clrMapOvr>
+</p:sld>
+</file>
+
+<file path=ppt/slides/slide10.xml><?xml version="1.0" encoding="utf-8"?>
+<p:sld xmlns:a="http://schemas.openxmlformats.org/drawingml/2006/main" xmlns:r="http://schemas.openxmlformats.org/officeDocument/2006/relationships" xmlns:p="http://schemas.openxmlformats.org/presentationml/2006/main">
+  <p:cSld>
+    <p:spTree>
+      <p:nvGrpSpPr>
+        <p:cNvPr id="1" name="">
+          <a:extLst>
+            <a:ext uri="{FF2B5EF4-FFF2-40B4-BE49-F238E27FC236}">
+              <a16:creationId xmlns:a16="http://schemas.microsoft.com/office/drawing/2014/main" id="{010D52CB-C1DA-C008-5EDA-DE0D12BE4369}"/>
+            </a:ext>
+          </a:extLst>
+        </p:cNvPr>
+        <p:cNvGrpSpPr/>
+        <p:nvPr/>
+      </p:nvGrpSpPr>
+      <p:grpSpPr>
+        <a:xfrm>
+          <a:off x="0" y="0"/>
+          <a:ext cx="0" cy="0"/>
+          <a:chOff x="0" y="0"/>
+          <a:chExt cx="0" cy="0"/>
+        </a:xfrm>
+      </p:grpSpPr>
+      <p:sp>
+        <p:nvSpPr>
+          <p:cNvPr id="3" name="TextBox 2">
+            <a:extLst>
+              <a:ext uri="{FF2B5EF4-FFF2-40B4-BE49-F238E27FC236}">
+                <a16:creationId xmlns:a16="http://schemas.microsoft.com/office/drawing/2014/main" id="{1CD8BDE6-FAD4-F4A7-DAA8-768436A7A767}"/>
+              </a:ext>
+            </a:extLst>
+          </p:cNvPr>
+          <p:cNvSpPr txBox="1"/>
+          <p:nvPr/>
+        </p:nvSpPr>
+        <p:spPr>
+          <a:xfrm>
+            <a:off x="948194" y="2608289"/>
+            <a:ext cx="9949655" cy="2677656"/>
+          </a:xfrm>
+          <a:prstGeom prst="rect">
+            <a:avLst/>
+          </a:prstGeom>
+          <a:noFill/>
+        </p:spPr>
+        <p:txBody>
+          <a:bodyPr wrap="square">
+            <a:spAutoFit/>
+          </a:bodyPr>
+          <a:lstStyle/>
+          <a:p>
+            <a:endParaRPr lang="th-TH" sz="2800" dirty="0">
+              <a:latin typeface="CordiaUPC" panose="020B0304020202020204" pitchFamily="34" charset="-34"/>
+              <a:cs typeface="CordiaUPC" panose="020B0304020202020204" pitchFamily="34" charset="-34"/>
+            </a:endParaRPr>
+          </a:p>
+          <a:p>
+            <a:r>
+              <a:rPr lang="th-TH" sz="2800" dirty="0">
+                <a:latin typeface="CordiaUPC" panose="020B0304020202020204" pitchFamily="34" charset="-34"/>
+                <a:cs typeface="CordiaUPC" panose="020B0304020202020204" pitchFamily="34" charset="-34"/>
+              </a:rPr>
+              <a:t>* **เนื้อหาหลัก:**</a:t>
+            </a:r>
+          </a:p>
+          <a:p>
+            <a:r>
+              <a:rPr lang="th-TH" sz="2800" dirty="0">
+                <a:latin typeface="CordiaUPC" panose="020B0304020202020204" pitchFamily="34" charset="-34"/>
+                <a:cs typeface="CordiaUPC" panose="020B0304020202020204" pitchFamily="34" charset="-34"/>
+              </a:rPr>
+              <a:t>    * **</a:t>
+            </a:r>
+            <a:r>
+              <a:rPr lang="en-US" sz="2800" dirty="0">
+                <a:latin typeface="CordiaUPC" panose="020B0304020202020204" pitchFamily="34" charset="-34"/>
+                <a:cs typeface="CordiaUPC" panose="020B0304020202020204" pitchFamily="34" charset="-34"/>
+              </a:rPr>
+              <a:t>Basic Formula:** </a:t>
+            </a:r>
+            <a:r>
+              <a:rPr lang="th-TH" sz="2800" dirty="0">
+                <a:latin typeface="CordiaUPC" panose="020B0304020202020204" pitchFamily="34" charset="-34"/>
+                <a:cs typeface="CordiaUPC" panose="020B0304020202020204" pitchFamily="34" charset="-34"/>
+              </a:rPr>
+              <a:t>บวก ลบ คูณ หาร และสูตรพื้นฐาน (</a:t>
+            </a:r>
+            <a:r>
+              <a:rPr lang="en-US" sz="2800" dirty="0">
+                <a:latin typeface="CordiaUPC" panose="020B0304020202020204" pitchFamily="34" charset="-34"/>
+                <a:cs typeface="CordiaUPC" panose="020B0304020202020204" pitchFamily="34" charset="-34"/>
+              </a:rPr>
+              <a:t>SUM, AVERAGE, COUNT)</a:t>
+            </a:r>
+          </a:p>
+          <a:p>
+            <a:r>
+              <a:rPr lang="en-US" sz="2800" dirty="0">
+                <a:latin typeface="CordiaUPC" panose="020B0304020202020204" pitchFamily="34" charset="-34"/>
+                <a:cs typeface="CordiaUPC" panose="020B0304020202020204" pitchFamily="34" charset="-34"/>
+              </a:rPr>
+              <a:t>    * **Logical Functions:** </a:t>
+            </a:r>
+            <a:r>
+              <a:rPr lang="th-TH" sz="2800" dirty="0">
+                <a:latin typeface="CordiaUPC" panose="020B0304020202020204" pitchFamily="34" charset="-34"/>
+                <a:cs typeface="CordiaUPC" panose="020B0304020202020204" pitchFamily="34" charset="-34"/>
+              </a:rPr>
+              <a:t>การใช้เงื่อนไขเพื่อช่วยตัดสินใจ (</a:t>
+            </a:r>
+            <a:r>
+              <a:rPr lang="en-US" sz="2800" dirty="0">
+                <a:latin typeface="CordiaUPC" panose="020B0304020202020204" pitchFamily="34" charset="-34"/>
+                <a:cs typeface="CordiaUPC" panose="020B0304020202020204" pitchFamily="34" charset="-34"/>
+              </a:rPr>
+              <a:t>IF, AND, OR)</a:t>
+            </a:r>
+          </a:p>
+          <a:p>
+            <a:r>
+              <a:rPr lang="en-US" sz="2800" dirty="0">
+                <a:latin typeface="CordiaUPC" panose="020B0304020202020204" pitchFamily="34" charset="-34"/>
+                <a:cs typeface="CordiaUPC" panose="020B0304020202020204" pitchFamily="34" charset="-34"/>
+              </a:rPr>
+              <a:t>    * **Advanced Analysis:** </a:t>
+            </a:r>
+            <a:r>
+              <a:rPr lang="th-TH" sz="2800" dirty="0">
+                <a:latin typeface="CordiaUPC" panose="020B0304020202020204" pitchFamily="34" charset="-34"/>
+                <a:cs typeface="CordiaUPC" panose="020B0304020202020204" pitchFamily="34" charset="-34"/>
+              </a:rPr>
+              <a:t>การสรุปผลข้อมูลจำนวนมากด้วย **</a:t>
+            </a:r>
+            <a:r>
+              <a:rPr lang="en-US" sz="2800" dirty="0">
+                <a:latin typeface="CordiaUPC" panose="020B0304020202020204" pitchFamily="34" charset="-34"/>
+                <a:cs typeface="CordiaUPC" panose="020B0304020202020204" pitchFamily="34" charset="-34"/>
+              </a:rPr>
+              <a:t>PivotTable** (</a:t>
+            </a:r>
+            <a:r>
+              <a:rPr lang="th-TH" sz="2800" dirty="0">
+                <a:latin typeface="CordiaUPC" panose="020B0304020202020204" pitchFamily="34" charset="-34"/>
+                <a:cs typeface="CordiaUPC" panose="020B0304020202020204" pitchFamily="34" charset="-34"/>
+              </a:rPr>
+              <a:t>ซึ่งเป็นหัวใจสำคัญของ </a:t>
+            </a:r>
+            <a:r>
+              <a:rPr lang="en-US" sz="2800" dirty="0">
+                <a:latin typeface="CordiaUPC" panose="020B0304020202020204" pitchFamily="34" charset="-34"/>
+                <a:cs typeface="CordiaUPC" panose="020B0304020202020204" pitchFamily="34" charset="-34"/>
+              </a:rPr>
+              <a:t>Excel Advance)</a:t>
+            </a:r>
+          </a:p>
+        </p:txBody>
+      </p:sp>
+      <p:sp>
+        <p:nvSpPr>
+          <p:cNvPr id="4" name="Rectangle 3">
+            <a:extLst>
+              <a:ext uri="{FF2B5EF4-FFF2-40B4-BE49-F238E27FC236}">
+                <a16:creationId xmlns:a16="http://schemas.microsoft.com/office/drawing/2014/main" id="{F356B131-8715-9159-7B4C-AE9DFED11120}"/>
+              </a:ext>
+            </a:extLst>
+          </p:cNvPr>
+          <p:cNvSpPr/>
+          <p:nvPr/>
+        </p:nvSpPr>
+        <p:spPr>
+          <a:xfrm>
+            <a:off x="948194" y="688830"/>
+            <a:ext cx="7578806" cy="1754326"/>
+          </a:xfrm>
+          <a:prstGeom prst="rect">
+            <a:avLst/>
+          </a:prstGeom>
+          <a:noFill/>
+        </p:spPr>
+        <p:txBody>
+          <a:bodyPr wrap="none" lIns="91440" tIns="45720" rIns="91440" bIns="45720">
+            <a:spAutoFit/>
+            <a:scene3d>
+              <a:camera prst="orthographicFront"/>
+              <a:lightRig rig="soft" dir="t">
+                <a:rot lat="0" lon="0" rev="15600000"/>
+              </a:lightRig>
+            </a:scene3d>
+            <a:sp3d extrusionH="57150" prstMaterial="softEdge">
+              <a:bevelT w="25400" h="38100"/>
+            </a:sp3d>
+          </a:bodyPr>
+          <a:lstStyle/>
+          <a:p>
+            <a:pPr algn="ctr"/>
+            <a:r>
+              <a:rPr lang="en-US" sz="5400" dirty="0"/>
+              <a:t>3. Calculation &amp; Analysis</a:t>
+            </a:r>
+          </a:p>
+          <a:p>
+            <a:pPr algn="ctr"/>
+            <a:r>
+              <a:rPr lang="en-US" sz="5400" dirty="0"/>
+              <a:t> (</a:t>
+            </a:r>
+            <a:r>
+              <a:rPr lang="th-TH" sz="5400" dirty="0"/>
+              <a:t>กลางน้ำ: การคำนวณและวิเคราะห์)</a:t>
+            </a:r>
+          </a:p>
+        </p:txBody>
+      </p:sp>
+    </p:spTree>
+    <p:extLst>
+      <p:ext uri="{BB962C8B-B14F-4D97-AF65-F5344CB8AC3E}">
+        <p14:creationId xmlns:p14="http://schemas.microsoft.com/office/powerpoint/2010/main" val="1359744184"/>
+      </p:ext>
+    </p:extLst>
+  </p:cSld>
+  <p:clrMapOvr>
+    <a:masterClrMapping/>
+  </p:clrMapOvr>
+</p:sld>
+</file>
+
+<file path=ppt/slides/slide11.xml><?xml version="1.0" encoding="utf-8"?>
+<p:sld xmlns:a="http://schemas.openxmlformats.org/drawingml/2006/main" xmlns:r="http://schemas.openxmlformats.org/officeDocument/2006/relationships" xmlns:p="http://schemas.openxmlformats.org/presentationml/2006/main">
+  <p:cSld>
+    <p:spTree>
+      <p:nvGrpSpPr>
+        <p:cNvPr id="1" name="">
+          <a:extLst>
+            <a:ext uri="{FF2B5EF4-FFF2-40B4-BE49-F238E27FC236}">
+              <a16:creationId xmlns:a16="http://schemas.microsoft.com/office/drawing/2014/main" id="{FFAEFE02-3FC8-2A3A-F0FD-E2E69199FA4A}"/>
+            </a:ext>
+          </a:extLst>
+        </p:cNvPr>
+        <p:cNvGrpSpPr/>
+        <p:nvPr/>
+      </p:nvGrpSpPr>
+      <p:grpSpPr>
+        <a:xfrm>
+          <a:off x="0" y="0"/>
+          <a:ext cx="0" cy="0"/>
+          <a:chOff x="0" y="0"/>
+          <a:chExt cx="0" cy="0"/>
+        </a:xfrm>
+      </p:grpSpPr>
+      <p:sp>
+        <p:nvSpPr>
+          <p:cNvPr id="3" name="TextBox 2">
+            <a:extLst>
+              <a:ext uri="{FF2B5EF4-FFF2-40B4-BE49-F238E27FC236}">
+                <a16:creationId xmlns:a16="http://schemas.microsoft.com/office/drawing/2014/main" id="{211CE1F2-7575-85B6-E315-B1EA8E677CBA}"/>
+              </a:ext>
+            </a:extLst>
+          </p:cNvPr>
+          <p:cNvSpPr txBox="1"/>
+          <p:nvPr/>
+        </p:nvSpPr>
+        <p:spPr>
+          <a:xfrm>
+            <a:off x="1482756" y="2840763"/>
+            <a:ext cx="9877502" cy="2523768"/>
+          </a:xfrm>
+          <a:prstGeom prst="rect">
+            <a:avLst/>
+          </a:prstGeom>
+          <a:noFill/>
+        </p:spPr>
+        <p:txBody>
+          <a:bodyPr wrap="square">
+            <a:spAutoFit/>
+          </a:bodyPr>
+          <a:lstStyle/>
+          <a:p>
+            <a:endParaRPr lang="th-TH" dirty="0"/>
+          </a:p>
+          <a:p>
+            <a:r>
+              <a:rPr lang="th-TH" sz="2800" dirty="0">
+                <a:latin typeface="CordiaUPC" panose="020B0304020202020204" pitchFamily="34" charset="-34"/>
+                <a:cs typeface="CordiaUPC" panose="020B0304020202020204" pitchFamily="34" charset="-34"/>
+              </a:rPr>
+              <a:t>* **เนื้อหาหลัก:**</a:t>
+            </a:r>
+          </a:p>
+          <a:p>
+            <a:r>
+              <a:rPr lang="th-TH" sz="2800" dirty="0">
+                <a:latin typeface="CordiaUPC" panose="020B0304020202020204" pitchFamily="34" charset="-34"/>
+                <a:cs typeface="CordiaUPC" panose="020B0304020202020204" pitchFamily="34" charset="-34"/>
+              </a:rPr>
+              <a:t>    * **</a:t>
+            </a:r>
+            <a:r>
+              <a:rPr lang="en-US" sz="2800" dirty="0">
+                <a:latin typeface="CordiaUPC" panose="020B0304020202020204" pitchFamily="34" charset="-34"/>
+                <a:cs typeface="CordiaUPC" panose="020B0304020202020204" pitchFamily="34" charset="-34"/>
+              </a:rPr>
+              <a:t>Summary Tables:** </a:t>
+            </a:r>
+            <a:r>
+              <a:rPr lang="th-TH" sz="2800" dirty="0">
+                <a:latin typeface="CordiaUPC" panose="020B0304020202020204" pitchFamily="34" charset="-34"/>
+                <a:cs typeface="CordiaUPC" panose="020B0304020202020204" pitchFamily="34" charset="-34"/>
+              </a:rPr>
+              <a:t>การทำตารางสรุปผลที่ดูง่าย</a:t>
+            </a:r>
+          </a:p>
+          <a:p>
+            <a:r>
+              <a:rPr lang="th-TH" sz="2800" dirty="0">
+                <a:latin typeface="CordiaUPC" panose="020B0304020202020204" pitchFamily="34" charset="-34"/>
+                <a:cs typeface="CordiaUPC" panose="020B0304020202020204" pitchFamily="34" charset="-34"/>
+              </a:rPr>
+              <a:t>    * **</a:t>
+            </a:r>
+            <a:r>
+              <a:rPr lang="en-US" sz="2800" dirty="0">
+                <a:latin typeface="CordiaUPC" panose="020B0304020202020204" pitchFamily="34" charset="-34"/>
+                <a:cs typeface="CordiaUPC" panose="020B0304020202020204" pitchFamily="34" charset="-34"/>
+              </a:rPr>
+              <a:t>Data Visualization:** </a:t>
+            </a:r>
+            <a:r>
+              <a:rPr lang="th-TH" sz="2800" dirty="0">
+                <a:latin typeface="CordiaUPC" panose="020B0304020202020204" pitchFamily="34" charset="-34"/>
+                <a:cs typeface="CordiaUPC" panose="020B0304020202020204" pitchFamily="34" charset="-34"/>
+              </a:rPr>
+              <a:t>การใช้ </a:t>
+            </a:r>
+            <a:r>
+              <a:rPr lang="en-US" sz="2800" dirty="0">
+                <a:latin typeface="CordiaUPC" panose="020B0304020202020204" pitchFamily="34" charset="-34"/>
+                <a:cs typeface="CordiaUPC" panose="020B0304020202020204" pitchFamily="34" charset="-34"/>
+              </a:rPr>
+              <a:t>Graph/Chart (</a:t>
+            </a:r>
+            <a:r>
+              <a:rPr lang="th-TH" sz="2800" dirty="0">
+                <a:latin typeface="CordiaUPC" panose="020B0304020202020204" pitchFamily="34" charset="-34"/>
+                <a:cs typeface="CordiaUPC" panose="020B0304020202020204" pitchFamily="34" charset="-34"/>
+              </a:rPr>
+              <a:t>แท่ง, เส้น, วงกลม) ให้เหมาะสมกับข้อมูล</a:t>
+            </a:r>
+          </a:p>
+          <a:p>
+            <a:r>
+              <a:rPr lang="th-TH" sz="2800" dirty="0">
+                <a:latin typeface="CordiaUPC" panose="020B0304020202020204" pitchFamily="34" charset="-34"/>
+                <a:cs typeface="CordiaUPC" panose="020B0304020202020204" pitchFamily="34" charset="-34"/>
+              </a:rPr>
+              <a:t>    * **</a:t>
+            </a:r>
+            <a:r>
+              <a:rPr lang="en-US" sz="2800" dirty="0">
+                <a:latin typeface="CordiaUPC" panose="020B0304020202020204" pitchFamily="34" charset="-34"/>
+                <a:cs typeface="CordiaUPC" panose="020B0304020202020204" pitchFamily="34" charset="-34"/>
+              </a:rPr>
+              <a:t>Conditional Formatting:** </a:t>
+            </a:r>
+            <a:r>
+              <a:rPr lang="th-TH" sz="2800" dirty="0">
+                <a:latin typeface="CordiaUPC" panose="020B0304020202020204" pitchFamily="34" charset="-34"/>
+                <a:cs typeface="CordiaUPC" panose="020B0304020202020204" pitchFamily="34" charset="-34"/>
+              </a:rPr>
+              <a:t>การใช้สีช่วยเน้นข้อมูล (เช่น ยอดขายต่ำกว่าเป้าให้เป็นสีแดง)</a:t>
+            </a:r>
+          </a:p>
+          <a:p>
+            <a:r>
+              <a:rPr lang="th-TH" sz="2800" dirty="0">
+                <a:latin typeface="CordiaUPC" panose="020B0304020202020204" pitchFamily="34" charset="-34"/>
+                <a:cs typeface="CordiaUPC" panose="020B0304020202020204" pitchFamily="34" charset="-34"/>
+              </a:rPr>
+              <a:t>    * **</a:t>
+            </a:r>
+            <a:r>
+              <a:rPr lang="en-US" sz="2800" dirty="0">
+                <a:latin typeface="CordiaUPC" panose="020B0304020202020204" pitchFamily="34" charset="-34"/>
+                <a:cs typeface="CordiaUPC" panose="020B0304020202020204" pitchFamily="34" charset="-34"/>
+              </a:rPr>
+              <a:t>Dashboard:** </a:t>
+            </a:r>
+            <a:r>
+              <a:rPr lang="th-TH" sz="2800" dirty="0">
+                <a:latin typeface="CordiaUPC" panose="020B0304020202020204" pitchFamily="34" charset="-34"/>
+                <a:cs typeface="CordiaUPC" panose="020B0304020202020204" pitchFamily="34" charset="-34"/>
+              </a:rPr>
+              <a:t>การรวมสรุปผลทุกอย่างไว้ในหน้าเดียว</a:t>
+            </a:r>
+            <a:endParaRPr lang="en-US" sz="2800" dirty="0">
+              <a:latin typeface="CordiaUPC" panose="020B0304020202020204" pitchFamily="34" charset="-34"/>
+              <a:cs typeface="CordiaUPC" panose="020B0304020202020204" pitchFamily="34" charset="-34"/>
+            </a:endParaRPr>
+          </a:p>
+        </p:txBody>
+      </p:sp>
+      <p:sp>
+        <p:nvSpPr>
+          <p:cNvPr id="4" name="Rectangle 3">
+            <a:extLst>
+              <a:ext uri="{FF2B5EF4-FFF2-40B4-BE49-F238E27FC236}">
+                <a16:creationId xmlns:a16="http://schemas.microsoft.com/office/drawing/2014/main" id="{6501679B-FDE8-BD35-19B1-A54F2E77D8DD}"/>
+              </a:ext>
+            </a:extLst>
+          </p:cNvPr>
+          <p:cNvSpPr/>
+          <p:nvPr/>
+        </p:nvSpPr>
+        <p:spPr>
+          <a:xfrm>
+            <a:off x="510800" y="688830"/>
+            <a:ext cx="8453596" cy="1754326"/>
+          </a:xfrm>
+          <a:prstGeom prst="rect">
+            <a:avLst/>
+          </a:prstGeom>
+          <a:noFill/>
+        </p:spPr>
+        <p:txBody>
+          <a:bodyPr wrap="none" lIns="91440" tIns="45720" rIns="91440" bIns="45720">
+            <a:spAutoFit/>
+            <a:scene3d>
+              <a:camera prst="orthographicFront"/>
+              <a:lightRig rig="soft" dir="t">
+                <a:rot lat="0" lon="0" rev="15600000"/>
+              </a:lightRig>
+            </a:scene3d>
+            <a:sp3d extrusionH="57150" prstMaterial="softEdge">
+              <a:bevelT w="25400" h="38100"/>
+            </a:sp3d>
+          </a:bodyPr>
+          <a:lstStyle/>
+          <a:p>
+            <a:pPr algn="ctr"/>
+            <a:r>
+              <a:rPr lang="en-US" sz="5400" dirty="0"/>
+              <a:t>4. Presentation &amp; Reporting </a:t>
+            </a:r>
+          </a:p>
+          <a:p>
+            <a:pPr algn="ctr"/>
+            <a:r>
+              <a:rPr lang="en-US" sz="5400" dirty="0"/>
+              <a:t>(</a:t>
+            </a:r>
+            <a:r>
+              <a:rPr lang="th-TH" sz="5400" dirty="0"/>
+              <a:t>ปลายน้ำ: การนำเสนอและสรุปผล)</a:t>
+            </a:r>
+          </a:p>
+        </p:txBody>
+      </p:sp>
+    </p:spTree>
+    <p:extLst>
+      <p:ext uri="{BB962C8B-B14F-4D97-AF65-F5344CB8AC3E}">
+        <p14:creationId xmlns:p14="http://schemas.microsoft.com/office/powerpoint/2010/main" val="2248581493"/>
+      </p:ext>
+    </p:extLst>
+  </p:cSld>
+  <p:clrMapOvr>
+    <a:masterClrMapping/>
+  </p:clrMapOvr>
+</p:sld>
+</file>
+
+<file path=ppt/slides/slide12.xml><?xml version="1.0" encoding="utf-8"?>
+<p:sld xmlns:a="http://schemas.openxmlformats.org/drawingml/2006/main" xmlns:r="http://schemas.openxmlformats.org/officeDocument/2006/relationships" xmlns:p="http://schemas.openxmlformats.org/presentationml/2006/main">
+  <p:cSld>
+    <p:spTree>
+      <p:nvGrpSpPr>
+        <p:cNvPr id="1" name=""/>
+        <p:cNvGrpSpPr/>
+        <p:nvPr/>
+      </p:nvGrpSpPr>
+      <p:grpSpPr>
+        <a:xfrm>
+          <a:off x="0" y="0"/>
+          <a:ext cx="0" cy="0"/>
+          <a:chOff x="0" y="0"/>
+          <a:chExt cx="0" cy="0"/>
+        </a:xfrm>
+      </p:grpSpPr>
+    </p:spTree>
+    <p:extLst>
+      <p:ext uri="{BB962C8B-B14F-4D97-AF65-F5344CB8AC3E}">
+        <p14:creationId xmlns:p14="http://schemas.microsoft.com/office/powerpoint/2010/main" val="364260371"/>
+      </p:ext>
+    </p:extLst>
+  </p:cSld>
+  <p:clrMapOvr>
+    <a:masterClrMapping/>
+  </p:clrMapOvr>
+</p:sld>
+</file>
+
+<file path=ppt/slides/slide13.xml><?xml version="1.0" encoding="utf-8"?>
+<p:sld xmlns:a="http://schemas.openxmlformats.org/drawingml/2006/main" xmlns:r="http://schemas.openxmlformats.org/officeDocument/2006/relationships" xmlns:p="http://schemas.openxmlformats.org/presentationml/2006/main">
+  <p:cSld>
+    <p:spTree>
+      <p:nvGrpSpPr>
+        <p:cNvPr id="1" name="">
+          <a:extLst>
+            <a:ext uri="{FF2B5EF4-FFF2-40B4-BE49-F238E27FC236}">
+              <a16:creationId xmlns:a16="http://schemas.microsoft.com/office/drawing/2014/main" id="{80C0B76F-B5C6-8C52-2224-03051142BEF5}"/>
+            </a:ext>
+          </a:extLst>
+        </p:cNvPr>
+        <p:cNvGrpSpPr/>
+        <p:nvPr/>
+      </p:nvGrpSpPr>
+      <p:grpSpPr>
+        <a:xfrm>
+          <a:off x="0" y="0"/>
+          <a:ext cx="0" cy="0"/>
+          <a:chOff x="0" y="0"/>
+          <a:chExt cx="0" cy="0"/>
+        </a:xfrm>
+      </p:grpSpPr>
+    </p:spTree>
+    <p:extLst>
+      <p:ext uri="{BB962C8B-B14F-4D97-AF65-F5344CB8AC3E}">
+        <p14:creationId xmlns:p14="http://schemas.microsoft.com/office/powerpoint/2010/main" val="212156797"/>
+      </p:ext>
+    </p:extLst>
+  </p:cSld>
+  <p:clrMapOvr>
+    <a:masterClrMapping/>
+  </p:clrMapOvr>
+</p:sld>
+</file>
+
+<file path=ppt/slides/slide14.xml><?xml version="1.0" encoding="utf-8"?>
+<p:sld xmlns:a="http://schemas.openxmlformats.org/drawingml/2006/main" xmlns:r="http://schemas.openxmlformats.org/officeDocument/2006/relationships" xmlns:p="http://schemas.openxmlformats.org/presentationml/2006/main">
+  <p:cSld>
+    <p:spTree>
+      <p:nvGrpSpPr>
+        <p:cNvPr id="1" name="">
+          <a:extLst>
+            <a:ext uri="{FF2B5EF4-FFF2-40B4-BE49-F238E27FC236}">
+              <a16:creationId xmlns:a16="http://schemas.microsoft.com/office/drawing/2014/main" id="{F6E86FFE-E478-BCFA-35BB-8D3653B2A78A}"/>
+            </a:ext>
+          </a:extLst>
+        </p:cNvPr>
+        <p:cNvGrpSpPr/>
+        <p:nvPr/>
+      </p:nvGrpSpPr>
+      <p:grpSpPr>
+        <a:xfrm>
+          <a:off x="0" y="0"/>
+          <a:ext cx="0" cy="0"/>
+          <a:chOff x="0" y="0"/>
+          <a:chExt cx="0" cy="0"/>
+        </a:xfrm>
+      </p:grpSpPr>
+    </p:spTree>
+    <p:extLst>
+      <p:ext uri="{BB962C8B-B14F-4D97-AF65-F5344CB8AC3E}">
+        <p14:creationId xmlns:p14="http://schemas.microsoft.com/office/powerpoint/2010/main" val="3666000379"/>
+      </p:ext>
+    </p:extLst>
+  </p:cSld>
+  <p:clrMapOvr>
+    <a:masterClrMapping/>
+  </p:clrMapOvr>
+</p:sld>
+</file>
+
+<file path=ppt/slides/slide2.xml><?xml version="1.0" encoding="utf-8"?>
+<p:sld xmlns:a="http://schemas.openxmlformats.org/drawingml/2006/main" xmlns:r="http://schemas.openxmlformats.org/officeDocument/2006/relationships" xmlns:p="http://schemas.openxmlformats.org/presentationml/2006/main">
+  <p:cSld>
+    <p:spTree>
+      <p:nvGrpSpPr>
+        <p:cNvPr id="1" name=""/>
+        <p:cNvGrpSpPr/>
+        <p:nvPr/>
+      </p:nvGrpSpPr>
+      <p:grpSpPr>
+        <a:xfrm>
+          <a:off x="0" y="0"/>
+          <a:ext cx="0" cy="0"/>
+          <a:chOff x="0" y="0"/>
+          <a:chExt cx="0" cy="0"/>
+        </a:xfrm>
+      </p:grpSpPr>
       <p:graphicFrame>
         <p:nvGraphicFramePr>
           <p:cNvPr id="2" name="Diagram 1">
@@ -21539,7 +24887,7 @@
 </p:sld>
 </file>
 
-<file path=ppt/slides/slide2.xml><?xml version="1.0" encoding="utf-8"?>
+<file path=ppt/slides/slide3.xml><?xml version="1.0" encoding="utf-8"?>
 <p:sld xmlns:a="http://schemas.openxmlformats.org/drawingml/2006/main" xmlns:r="http://schemas.openxmlformats.org/officeDocument/2006/relationships" xmlns:p="http://schemas.openxmlformats.org/presentationml/2006/main">
   <p:cSld>
     <p:spTree>
@@ -21603,7 +24951,7 @@
 </p:sld>
 </file>
 
-<file path=ppt/slides/slide3.xml><?xml version="1.0" encoding="utf-8"?>
+<file path=ppt/slides/slide4.xml><?xml version="1.0" encoding="utf-8"?>
 <p:sld xmlns:a="http://schemas.openxmlformats.org/drawingml/2006/main" xmlns:r="http://schemas.openxmlformats.org/officeDocument/2006/relationships" xmlns:p="http://schemas.openxmlformats.org/presentationml/2006/main">
   <p:cSld>
     <p:spTree>
@@ -21661,7 +25009,7 @@
 </p:sld>
 </file>
 
-<file path=ppt/slides/slide4.xml><?xml version="1.0" encoding="utf-8"?>
+<file path=ppt/slides/slide5.xml><?xml version="1.0" encoding="utf-8"?>
 <p:sld xmlns:a="http://schemas.openxmlformats.org/drawingml/2006/main" xmlns:r="http://schemas.openxmlformats.org/officeDocument/2006/relationships" xmlns:p="http://schemas.openxmlformats.org/presentationml/2006/main">
   <p:cSld>
     <p:spTree>
@@ -21710,6 +25058,797 @@
     <p:extLst>
       <p:ext uri="{BB962C8B-B14F-4D97-AF65-F5344CB8AC3E}">
         <p14:creationId xmlns:p14="http://schemas.microsoft.com/office/powerpoint/2010/main" val="4232600412"/>
+      </p:ext>
+    </p:extLst>
+  </p:cSld>
+  <p:clrMapOvr>
+    <a:masterClrMapping/>
+  </p:clrMapOvr>
+</p:sld>
+</file>
+
+<file path=ppt/slides/slide6.xml><?xml version="1.0" encoding="utf-8"?>
+<p:sld xmlns:a="http://schemas.openxmlformats.org/drawingml/2006/main" xmlns:r="http://schemas.openxmlformats.org/officeDocument/2006/relationships" xmlns:p="http://schemas.openxmlformats.org/presentationml/2006/main">
+  <p:cSld>
+    <p:spTree>
+      <p:nvGrpSpPr>
+        <p:cNvPr id="1" name=""/>
+        <p:cNvGrpSpPr/>
+        <p:nvPr/>
+      </p:nvGrpSpPr>
+      <p:grpSpPr>
+        <a:xfrm>
+          <a:off x="0" y="0"/>
+          <a:ext cx="0" cy="0"/>
+          <a:chOff x="0" y="0"/>
+          <a:chExt cx="0" cy="0"/>
+        </a:xfrm>
+      </p:grpSpPr>
+      <p:graphicFrame>
+        <p:nvGraphicFramePr>
+          <p:cNvPr id="2" name="Diagram 1">
+            <a:extLst>
+              <a:ext uri="{FF2B5EF4-FFF2-40B4-BE49-F238E27FC236}">
+                <a16:creationId xmlns:a16="http://schemas.microsoft.com/office/drawing/2014/main" id="{12EA214F-7063-DF94-F242-D4804794FA3D}"/>
+              </a:ext>
+            </a:extLst>
+          </p:cNvPr>
+          <p:cNvGraphicFramePr/>
+          <p:nvPr>
+            <p:extLst>
+              <p:ext uri="{D42A27DB-BD31-4B8C-83A1-F6EECF244321}">
+                <p14:modId xmlns:p14="http://schemas.microsoft.com/office/powerpoint/2010/main" val="4028100130"/>
+              </p:ext>
+            </p:extLst>
+          </p:nvPr>
+        </p:nvGraphicFramePr>
+        <p:xfrm>
+          <a:off x="638744" y="1525389"/>
+          <a:ext cx="11317574" cy="6160958"/>
+        </p:xfrm>
+        <a:graphic>
+          <a:graphicData uri="http://schemas.openxmlformats.org/drawingml/2006/diagram">
+            <dgm:relIds xmlns:dgm="http://schemas.openxmlformats.org/drawingml/2006/diagram" xmlns:r="http://schemas.openxmlformats.org/officeDocument/2006/relationships" r:dm="rId2" r:lo="rId3" r:qs="rId4" r:cs="rId5"/>
+          </a:graphicData>
+        </a:graphic>
+      </p:graphicFrame>
+      <p:sp>
+        <p:nvSpPr>
+          <p:cNvPr id="3" name="Rectangle 2">
+            <a:extLst>
+              <a:ext uri="{FF2B5EF4-FFF2-40B4-BE49-F238E27FC236}">
+                <a16:creationId xmlns:a16="http://schemas.microsoft.com/office/drawing/2014/main" id="{EB2E3FC9-90F1-5C2E-3E47-8232A135E970}"/>
+              </a:ext>
+            </a:extLst>
+          </p:cNvPr>
+          <p:cNvSpPr/>
+          <p:nvPr/>
+        </p:nvSpPr>
+        <p:spPr>
+          <a:xfrm>
+            <a:off x="2154264" y="224852"/>
+            <a:ext cx="8286534" cy="2585323"/>
+          </a:xfrm>
+          <a:prstGeom prst="rect">
+            <a:avLst/>
+          </a:prstGeom>
+          <a:noFill/>
+        </p:spPr>
+        <p:txBody>
+          <a:bodyPr wrap="square" lIns="91440" tIns="45720" rIns="91440" bIns="45720">
+            <a:spAutoFit/>
+          </a:bodyPr>
+          <a:lstStyle/>
+          <a:p>
+            <a:pPr algn="ctr"/>
+            <a:r>
+              <a:rPr lang="en-US" sz="5400" dirty="0"/>
+              <a:t>4 Segments: </a:t>
+            </a:r>
+          </a:p>
+          <a:p>
+            <a:pPr algn="ctr"/>
+            <a:r>
+              <a:rPr lang="th-TH" sz="5400" dirty="0"/>
+              <a:t>วัฏจักรการทำงานบน </a:t>
+            </a:r>
+            <a:r>
+              <a:rPr lang="en-US" sz="5400" dirty="0"/>
+              <a:t>MS Excel </a:t>
+            </a:r>
+          </a:p>
+          <a:p>
+            <a:pPr algn="ctr"/>
+            <a:r>
+              <a:rPr lang="en-US" sz="5400" dirty="0"/>
+              <a:t>(The Excel Workflow)</a:t>
+            </a:r>
+            <a:endParaRPr lang="en-US" sz="5400" b="0" cap="none" spc="0" dirty="0">
+              <a:ln w="0"/>
+              <a:solidFill>
+                <a:schemeClr val="accent1"/>
+              </a:solidFill>
+              <a:effectLst>
+                <a:outerShdw blurRad="38100" dist="25400" dir="5400000" algn="ctr" rotWithShape="0">
+                  <a:srgbClr val="6E747A">
+                    <a:alpha val="43000"/>
+                  </a:srgbClr>
+                </a:outerShdw>
+              </a:effectLst>
+            </a:endParaRPr>
+          </a:p>
+        </p:txBody>
+      </p:sp>
+    </p:spTree>
+    <p:extLst>
+      <p:ext uri="{BB962C8B-B14F-4D97-AF65-F5344CB8AC3E}">
+        <p14:creationId xmlns:p14="http://schemas.microsoft.com/office/powerpoint/2010/main" val="46976107"/>
+      </p:ext>
+    </p:extLst>
+  </p:cSld>
+  <p:clrMapOvr>
+    <a:masterClrMapping/>
+  </p:clrMapOvr>
+</p:sld>
+</file>
+
+<file path=ppt/slides/slide7.xml><?xml version="1.0" encoding="utf-8"?>
+<p:sld xmlns:a="http://schemas.openxmlformats.org/drawingml/2006/main" xmlns:r="http://schemas.openxmlformats.org/officeDocument/2006/relationships" xmlns:p="http://schemas.openxmlformats.org/presentationml/2006/main">
+  <p:cSld>
+    <p:spTree>
+      <p:nvGrpSpPr>
+        <p:cNvPr id="1" name=""/>
+        <p:cNvGrpSpPr/>
+        <p:nvPr/>
+      </p:nvGrpSpPr>
+      <p:grpSpPr>
+        <a:xfrm>
+          <a:off x="0" y="0"/>
+          <a:ext cx="0" cy="0"/>
+          <a:chOff x="0" y="0"/>
+          <a:chExt cx="0" cy="0"/>
+        </a:xfrm>
+      </p:grpSpPr>
+      <p:sp>
+        <p:nvSpPr>
+          <p:cNvPr id="2" name="Rectangle 1">
+            <a:extLst>
+              <a:ext uri="{FF2B5EF4-FFF2-40B4-BE49-F238E27FC236}">
+                <a16:creationId xmlns:a16="http://schemas.microsoft.com/office/drawing/2014/main" id="{DFF482F3-E2BE-7CAE-1ABF-7E954A5C8194}"/>
+              </a:ext>
+            </a:extLst>
+          </p:cNvPr>
+          <p:cNvSpPr/>
+          <p:nvPr/>
+        </p:nvSpPr>
+        <p:spPr>
+          <a:xfrm>
+            <a:off x="4418699" y="1408358"/>
+            <a:ext cx="3114763" cy="923330"/>
+          </a:xfrm>
+          <a:prstGeom prst="rect">
+            <a:avLst/>
+          </a:prstGeom>
+          <a:noFill/>
+        </p:spPr>
+        <p:txBody>
+          <a:bodyPr wrap="none" lIns="91440" tIns="45720" rIns="91440" bIns="45720">
+            <a:spAutoFit/>
+          </a:bodyPr>
+          <a:lstStyle/>
+          <a:p>
+            <a:pPr algn="ctr"/>
+            <a:r>
+              <a:rPr lang="en-US" sz="5400" b="1" cap="none" spc="0" dirty="0">
+                <a:ln w="9525">
+                  <a:solidFill>
+                    <a:schemeClr val="bg1"/>
+                  </a:solidFill>
+                  <a:prstDash val="solid"/>
+                </a:ln>
+                <a:solidFill>
+                  <a:schemeClr val="accent5"/>
+                </a:solidFill>
+                <a:effectLst>
+                  <a:outerShdw blurRad="12700" dist="38100" dir="2700000" algn="tl" rotWithShape="0">
+                    <a:schemeClr val="accent5">
+                      <a:lumMod val="60000"/>
+                      <a:lumOff val="40000"/>
+                    </a:schemeClr>
+                  </a:outerShdw>
+                </a:effectLst>
+              </a:rPr>
+              <a:t>Chapter2</a:t>
+            </a:r>
+          </a:p>
+        </p:txBody>
+      </p:sp>
+    </p:spTree>
+    <p:extLst>
+      <p:ext uri="{BB962C8B-B14F-4D97-AF65-F5344CB8AC3E}">
+        <p14:creationId xmlns:p14="http://schemas.microsoft.com/office/powerpoint/2010/main" val="2576097237"/>
+      </p:ext>
+    </p:extLst>
+  </p:cSld>
+  <p:clrMapOvr>
+    <a:masterClrMapping/>
+  </p:clrMapOvr>
+</p:sld>
+</file>
+
+<file path=ppt/slides/slide8.xml><?xml version="1.0" encoding="utf-8"?>
+<p:sld xmlns:a="http://schemas.openxmlformats.org/drawingml/2006/main" xmlns:r="http://schemas.openxmlformats.org/officeDocument/2006/relationships" xmlns:p="http://schemas.openxmlformats.org/presentationml/2006/main">
+  <p:cSld>
+    <p:spTree>
+      <p:nvGrpSpPr>
+        <p:cNvPr id="1" name="">
+          <a:extLst>
+            <a:ext uri="{FF2B5EF4-FFF2-40B4-BE49-F238E27FC236}">
+              <a16:creationId xmlns:a16="http://schemas.microsoft.com/office/drawing/2014/main" id="{A377CFDD-FE10-5372-5AB3-9584F05A89D5}"/>
+            </a:ext>
+          </a:extLst>
+        </p:cNvPr>
+        <p:cNvGrpSpPr/>
+        <p:nvPr/>
+      </p:nvGrpSpPr>
+      <p:grpSpPr>
+        <a:xfrm>
+          <a:off x="0" y="0"/>
+          <a:ext cx="0" cy="0"/>
+          <a:chOff x="0" y="0"/>
+          <a:chExt cx="0" cy="0"/>
+        </a:xfrm>
+      </p:grpSpPr>
+      <p:sp>
+        <p:nvSpPr>
+          <p:cNvPr id="3" name="TextBox 2">
+            <a:extLst>
+              <a:ext uri="{FF2B5EF4-FFF2-40B4-BE49-F238E27FC236}">
+                <a16:creationId xmlns:a16="http://schemas.microsoft.com/office/drawing/2014/main" id="{25C4BDA3-D20C-DDE0-7CF3-7F3A7831C1E1}"/>
+              </a:ext>
+            </a:extLst>
+          </p:cNvPr>
+          <p:cNvSpPr txBox="1"/>
+          <p:nvPr/>
+        </p:nvSpPr>
+        <p:spPr>
+          <a:xfrm>
+            <a:off x="948194" y="2608289"/>
+            <a:ext cx="10474311" cy="2677656"/>
+          </a:xfrm>
+          <a:prstGeom prst="rect">
+            <a:avLst/>
+          </a:prstGeom>
+          <a:noFill/>
+        </p:spPr>
+        <p:txBody>
+          <a:bodyPr wrap="square">
+            <a:spAutoFit/>
+          </a:bodyPr>
+          <a:lstStyle/>
+          <a:p>
+            <a:endParaRPr lang="th-TH" sz="2800" dirty="0">
+              <a:latin typeface="CordiaUPC" panose="020B0304020202020204" pitchFamily="34" charset="-34"/>
+              <a:cs typeface="CordiaUPC" panose="020B0304020202020204" pitchFamily="34" charset="-34"/>
+            </a:endParaRPr>
+          </a:p>
+          <a:p>
+            <a:r>
+              <a:rPr lang="th-TH" sz="2800" dirty="0">
+                <a:latin typeface="CordiaUPC" panose="020B0304020202020204" pitchFamily="34" charset="-34"/>
+                <a:cs typeface="CordiaUPC" panose="020B0304020202020204" pitchFamily="34" charset="-34"/>
+              </a:rPr>
+              <a:t>* **</a:t>
+            </a:r>
+            <a:r>
+              <a:rPr lang="en-US" sz="2800" dirty="0">
+                <a:latin typeface="CordiaUPC" panose="020B0304020202020204" pitchFamily="34" charset="-34"/>
+                <a:cs typeface="CordiaUPC" panose="020B0304020202020204" pitchFamily="34" charset="-34"/>
+              </a:rPr>
+              <a:t>Concept:** "</a:t>
+            </a:r>
+            <a:r>
+              <a:rPr lang="th-TH" sz="2800" dirty="0">
+                <a:latin typeface="CordiaUPC" panose="020B0304020202020204" pitchFamily="34" charset="-34"/>
+                <a:cs typeface="CordiaUPC" panose="020B0304020202020204" pitchFamily="34" charset="-34"/>
+              </a:rPr>
+              <a:t>ขยะเข้า ขยะออก" (</a:t>
+            </a:r>
+            <a:r>
+              <a:rPr lang="en-US" sz="2800" dirty="0">
+                <a:latin typeface="CordiaUPC" panose="020B0304020202020204" pitchFamily="34" charset="-34"/>
+                <a:cs typeface="CordiaUPC" panose="020B0304020202020204" pitchFamily="34" charset="-34"/>
+              </a:rPr>
+              <a:t>Garbage In, Garbage Out) </a:t>
+            </a:r>
+            <a:r>
+              <a:rPr lang="th-TH" sz="2800" dirty="0">
+                <a:latin typeface="CordiaUPC" panose="020B0304020202020204" pitchFamily="34" charset="-34"/>
+                <a:cs typeface="CordiaUPC" panose="020B0304020202020204" pitchFamily="34" charset="-34"/>
+              </a:rPr>
+              <a:t>ถ้าเก็บข้อมูลไม่ดี ก็เอาไปใช้อย่างอื่นไม่ได้</a:t>
+            </a:r>
+          </a:p>
+          <a:p>
+            <a:r>
+              <a:rPr lang="th-TH" sz="2800" dirty="0">
+                <a:latin typeface="CordiaUPC" panose="020B0304020202020204" pitchFamily="34" charset="-34"/>
+                <a:cs typeface="CordiaUPC" panose="020B0304020202020204" pitchFamily="34" charset="-34"/>
+              </a:rPr>
+              <a:t>* **เนื้อหาหลัก:**</a:t>
+            </a:r>
+          </a:p>
+          <a:p>
+            <a:r>
+              <a:rPr lang="th-TH" sz="2800" dirty="0">
+                <a:latin typeface="CordiaUPC" panose="020B0304020202020204" pitchFamily="34" charset="-34"/>
+                <a:cs typeface="CordiaUPC" panose="020B0304020202020204" pitchFamily="34" charset="-34"/>
+              </a:rPr>
+              <a:t>    * **</a:t>
+            </a:r>
+            <a:r>
+              <a:rPr lang="en-US" sz="2800" dirty="0">
+                <a:latin typeface="CordiaUPC" panose="020B0304020202020204" pitchFamily="34" charset="-34"/>
+                <a:cs typeface="CordiaUPC" panose="020B0304020202020204" pitchFamily="34" charset="-34"/>
+              </a:rPr>
+              <a:t>Structure:** </a:t>
+            </a:r>
+            <a:r>
+              <a:rPr lang="th-TH" sz="2800" dirty="0">
+                <a:latin typeface="CordiaUPC" panose="020B0304020202020204" pitchFamily="34" charset="-34"/>
+                <a:cs typeface="CordiaUPC" panose="020B0304020202020204" pitchFamily="34" charset="-34"/>
+              </a:rPr>
+              <a:t>การวางหัวตาราง (</a:t>
+            </a:r>
+            <a:r>
+              <a:rPr lang="en-US" sz="2800" dirty="0">
+                <a:latin typeface="CordiaUPC" panose="020B0304020202020204" pitchFamily="34" charset="-34"/>
+                <a:cs typeface="CordiaUPC" panose="020B0304020202020204" pitchFamily="34" charset="-34"/>
+              </a:rPr>
+              <a:t>Header) </a:t>
+            </a:r>
+            <a:r>
+              <a:rPr lang="th-TH" sz="2800" dirty="0">
+                <a:latin typeface="CordiaUPC" panose="020B0304020202020204" pitchFamily="34" charset="-34"/>
+                <a:cs typeface="CordiaUPC" panose="020B0304020202020204" pitchFamily="34" charset="-34"/>
+              </a:rPr>
+              <a:t>และข้อมูลแบบแนวดิ่ง (</a:t>
+            </a:r>
+            <a:r>
+              <a:rPr lang="en-US" sz="2800" dirty="0">
+                <a:latin typeface="CordiaUPC" panose="020B0304020202020204" pitchFamily="34" charset="-34"/>
+                <a:cs typeface="CordiaUPC" panose="020B0304020202020204" pitchFamily="34" charset="-34"/>
+              </a:rPr>
+              <a:t>Records)</a:t>
+            </a:r>
+          </a:p>
+          <a:p>
+            <a:r>
+              <a:rPr lang="en-US" sz="2800" dirty="0">
+                <a:latin typeface="CordiaUPC" panose="020B0304020202020204" pitchFamily="34" charset="-34"/>
+                <a:cs typeface="CordiaUPC" panose="020B0304020202020204" pitchFamily="34" charset="-34"/>
+              </a:rPr>
+              <a:t>    * **Database Mindset:** 1 </a:t>
+            </a:r>
+            <a:r>
+              <a:rPr lang="th-TH" sz="2800" dirty="0">
+                <a:latin typeface="CordiaUPC" panose="020B0304020202020204" pitchFamily="34" charset="-34"/>
+                <a:cs typeface="CordiaUPC" panose="020B0304020202020204" pitchFamily="34" charset="-34"/>
+              </a:rPr>
+              <a:t>แถว = 1 รายการ, 1 คอลัมน์ = 1 ประเภทข้อมูล</a:t>
+            </a:r>
+          </a:p>
+          <a:p>
+            <a:r>
+              <a:rPr lang="th-TH" sz="2800" dirty="0">
+                <a:latin typeface="CordiaUPC" panose="020B0304020202020204" pitchFamily="34" charset="-34"/>
+                <a:cs typeface="CordiaUPC" panose="020B0304020202020204" pitchFamily="34" charset="-34"/>
+              </a:rPr>
+              <a:t>    * **</a:t>
+            </a:r>
+            <a:r>
+              <a:rPr lang="en-US" sz="2800" dirty="0">
+                <a:latin typeface="CordiaUPC" panose="020B0304020202020204" pitchFamily="34" charset="-34"/>
+                <a:cs typeface="CordiaUPC" panose="020B0304020202020204" pitchFamily="34" charset="-34"/>
+              </a:rPr>
+              <a:t>Data Validation:** </a:t>
+            </a:r>
+            <a:r>
+              <a:rPr lang="th-TH" sz="2800" dirty="0">
+                <a:latin typeface="CordiaUPC" panose="020B0304020202020204" pitchFamily="34" charset="-34"/>
+                <a:cs typeface="CordiaUPC" panose="020B0304020202020204" pitchFamily="34" charset="-34"/>
+              </a:rPr>
+              <a:t>การสร้าง </a:t>
+            </a:r>
+            <a:r>
+              <a:rPr lang="en-US" sz="2800" dirty="0">
+                <a:latin typeface="CordiaUPC" panose="020B0304020202020204" pitchFamily="34" charset="-34"/>
+                <a:cs typeface="CordiaUPC" panose="020B0304020202020204" pitchFamily="34" charset="-34"/>
+              </a:rPr>
+              <a:t>Dropdown list </a:t>
+            </a:r>
+            <a:r>
+              <a:rPr lang="th-TH" sz="2800" dirty="0">
+                <a:latin typeface="CordiaUPC" panose="020B0304020202020204" pitchFamily="34" charset="-34"/>
+                <a:cs typeface="CordiaUPC" panose="020B0304020202020204" pitchFamily="34" charset="-34"/>
+              </a:rPr>
+              <a:t>เพื่อจำกัดข้อมูลให้ถูกต้องตั้งแต่ตอนกรอก</a:t>
+            </a:r>
+          </a:p>
+        </p:txBody>
+      </p:sp>
+      <p:sp>
+        <p:nvSpPr>
+          <p:cNvPr id="4" name="Rectangle 3">
+            <a:extLst>
+              <a:ext uri="{FF2B5EF4-FFF2-40B4-BE49-F238E27FC236}">
+                <a16:creationId xmlns:a16="http://schemas.microsoft.com/office/drawing/2014/main" id="{CCF13902-9DA0-C062-8C54-29D78F0CAE8B}"/>
+              </a:ext>
+            </a:extLst>
+          </p:cNvPr>
+          <p:cNvSpPr/>
+          <p:nvPr/>
+        </p:nvSpPr>
+        <p:spPr>
+          <a:xfrm>
+            <a:off x="1171556" y="688830"/>
+            <a:ext cx="10774103" cy="1754326"/>
+          </a:xfrm>
+          <a:prstGeom prst="rect">
+            <a:avLst/>
+          </a:prstGeom>
+          <a:noFill/>
+        </p:spPr>
+        <p:txBody>
+          <a:bodyPr wrap="none" lIns="91440" tIns="45720" rIns="91440" bIns="45720">
+            <a:spAutoFit/>
+            <a:scene3d>
+              <a:camera prst="orthographicFront"/>
+              <a:lightRig rig="soft" dir="t">
+                <a:rot lat="0" lon="0" rev="15600000"/>
+              </a:lightRig>
+            </a:scene3d>
+            <a:sp3d extrusionH="57150" prstMaterial="softEdge">
+              <a:bevelT w="25400" h="38100"/>
+            </a:sp3d>
+          </a:bodyPr>
+          <a:lstStyle/>
+          <a:p>
+            <a:pPr marL="914400" indent="-914400">
+              <a:buAutoNum type="arabicPeriod"/>
+            </a:pPr>
+            <a:r>
+              <a:rPr lang="en-US" sz="5400" dirty="0">
+                <a:latin typeface="CordiaUPC" panose="020B0304020202020204" pitchFamily="34" charset="-34"/>
+                <a:cs typeface="CordiaUPC" panose="020B0304020202020204" pitchFamily="34" charset="-34"/>
+              </a:rPr>
+              <a:t>Data Storage </a:t>
+            </a:r>
+          </a:p>
+          <a:p>
+            <a:r>
+              <a:rPr lang="en-US" sz="5400" dirty="0">
+                <a:latin typeface="CordiaUPC" panose="020B0304020202020204" pitchFamily="34" charset="-34"/>
+                <a:cs typeface="CordiaUPC" panose="020B0304020202020204" pitchFamily="34" charset="-34"/>
+              </a:rPr>
+              <a:t>(</a:t>
+            </a:r>
+            <a:r>
+              <a:rPr lang="th-TH" sz="5400" dirty="0">
+                <a:latin typeface="CordiaUPC" panose="020B0304020202020204" pitchFamily="34" charset="-34"/>
+                <a:cs typeface="CordiaUPC" panose="020B0304020202020204" pitchFamily="34" charset="-34"/>
+              </a:rPr>
+              <a:t>ต้นน้ำ: การเก็บข้อมูล</a:t>
+            </a:r>
+            <a:r>
+              <a:rPr lang="en-US" sz="5400" dirty="0">
+                <a:latin typeface="CordiaUPC" panose="020B0304020202020204" pitchFamily="34" charset="-34"/>
+                <a:cs typeface="CordiaUPC" panose="020B0304020202020204" pitchFamily="34" charset="-34"/>
+              </a:rPr>
+              <a:t> </a:t>
+            </a:r>
+            <a:r>
+              <a:rPr lang="th-TH" sz="5400" dirty="0">
+                <a:latin typeface="CordiaUPC" panose="020B0304020202020204" pitchFamily="34" charset="-34"/>
+                <a:cs typeface="CordiaUPC" panose="020B0304020202020204" pitchFamily="34" charset="-34"/>
+              </a:rPr>
+              <a:t>การนำเข้า นำออก และฐานข้อมูล)</a:t>
+            </a:r>
+            <a:endParaRPr lang="th-TH" sz="5400" dirty="0"/>
+          </a:p>
+        </p:txBody>
+      </p:sp>
+    </p:spTree>
+    <p:extLst>
+      <p:ext uri="{BB962C8B-B14F-4D97-AF65-F5344CB8AC3E}">
+        <p14:creationId xmlns:p14="http://schemas.microsoft.com/office/powerpoint/2010/main" val="2719403748"/>
+      </p:ext>
+    </p:extLst>
+  </p:cSld>
+  <p:clrMapOvr>
+    <a:masterClrMapping/>
+  </p:clrMapOvr>
+</p:sld>
+</file>
+
+<file path=ppt/slides/slide9.xml><?xml version="1.0" encoding="utf-8"?>
+<p:sld xmlns:a="http://schemas.openxmlformats.org/drawingml/2006/main" xmlns:r="http://schemas.openxmlformats.org/officeDocument/2006/relationships" xmlns:p="http://schemas.openxmlformats.org/presentationml/2006/main">
+  <p:cSld>
+    <p:spTree>
+      <p:nvGrpSpPr>
+        <p:cNvPr id="1" name="">
+          <a:extLst>
+            <a:ext uri="{FF2B5EF4-FFF2-40B4-BE49-F238E27FC236}">
+              <a16:creationId xmlns:a16="http://schemas.microsoft.com/office/drawing/2014/main" id="{EEA1742A-5DD4-AFDD-4B3E-F8B646BAE079}"/>
+            </a:ext>
+          </a:extLst>
+        </p:cNvPr>
+        <p:cNvGrpSpPr/>
+        <p:nvPr/>
+      </p:nvGrpSpPr>
+      <p:grpSpPr>
+        <a:xfrm>
+          <a:off x="0" y="0"/>
+          <a:ext cx="0" cy="0"/>
+          <a:chOff x="0" y="0"/>
+          <a:chExt cx="0" cy="0"/>
+        </a:xfrm>
+      </p:grpSpPr>
+      <p:sp>
+        <p:nvSpPr>
+          <p:cNvPr id="3" name="TextBox 2">
+            <a:extLst>
+              <a:ext uri="{FF2B5EF4-FFF2-40B4-BE49-F238E27FC236}">
+                <a16:creationId xmlns:a16="http://schemas.microsoft.com/office/drawing/2014/main" id="{5E65655C-E9FA-38C3-3CFF-D2A9CAD0E134}"/>
+              </a:ext>
+            </a:extLst>
+          </p:cNvPr>
+          <p:cNvSpPr txBox="1"/>
+          <p:nvPr/>
+        </p:nvSpPr>
+        <p:spPr>
+          <a:xfrm>
+            <a:off x="948194" y="2608289"/>
+            <a:ext cx="10474311" cy="3108543"/>
+          </a:xfrm>
+          <a:prstGeom prst="rect">
+            <a:avLst/>
+          </a:prstGeom>
+          <a:noFill/>
+        </p:spPr>
+        <p:txBody>
+          <a:bodyPr wrap="square">
+            <a:spAutoFit/>
+          </a:bodyPr>
+          <a:lstStyle/>
+          <a:p>
+            <a:endParaRPr lang="th-TH" sz="2800" dirty="0">
+              <a:latin typeface="CordiaUPC" panose="020B0304020202020204" pitchFamily="34" charset="-34"/>
+              <a:cs typeface="CordiaUPC" panose="020B0304020202020204" pitchFamily="34" charset="-34"/>
+            </a:endParaRPr>
+          </a:p>
+          <a:p>
+            <a:r>
+              <a:rPr lang="th-TH" sz="2800" dirty="0">
+                <a:latin typeface="CordiaUPC" panose="020B0304020202020204" pitchFamily="34" charset="-34"/>
+                <a:cs typeface="CordiaUPC" panose="020B0304020202020204" pitchFamily="34" charset="-34"/>
+              </a:rPr>
+              <a:t>* **</a:t>
+            </a:r>
+            <a:r>
+              <a:rPr lang="en-US" sz="2800" dirty="0">
+                <a:latin typeface="CordiaUPC" panose="020B0304020202020204" pitchFamily="34" charset="-34"/>
+                <a:cs typeface="CordiaUPC" panose="020B0304020202020204" pitchFamily="34" charset="-34"/>
+              </a:rPr>
+              <a:t>Concept:** </a:t>
+            </a:r>
+            <a:r>
+              <a:rPr lang="th-TH" sz="2800" dirty="0">
+                <a:latin typeface="CordiaUPC" panose="020B0304020202020204" pitchFamily="34" charset="-34"/>
+                <a:cs typeface="CordiaUPC" panose="020B0304020202020204" pitchFamily="34" charset="-34"/>
+              </a:rPr>
+              <a:t>การเตรียมวัตถุดิบให้พร้อมก่อนปรุง</a:t>
+            </a:r>
+          </a:p>
+          <a:p>
+            <a:r>
+              <a:rPr lang="th-TH" sz="2800" dirty="0">
+                <a:latin typeface="CordiaUPC" panose="020B0304020202020204" pitchFamily="34" charset="-34"/>
+                <a:cs typeface="CordiaUPC" panose="020B0304020202020204" pitchFamily="34" charset="-34"/>
+              </a:rPr>
+              <a:t>* **เนื้อหาหลัก:**</a:t>
+            </a:r>
+          </a:p>
+          <a:p>
+            <a:r>
+              <a:rPr lang="th-TH" sz="2800" dirty="0">
+                <a:latin typeface="CordiaUPC" panose="020B0304020202020204" pitchFamily="34" charset="-34"/>
+                <a:cs typeface="CordiaUPC" panose="020B0304020202020204" pitchFamily="34" charset="-34"/>
+              </a:rPr>
+              <a:t>    * **</a:t>
+            </a:r>
+            <a:r>
+              <a:rPr lang="en-US" sz="2800" dirty="0">
+                <a:latin typeface="CordiaUPC" panose="020B0304020202020204" pitchFamily="34" charset="-34"/>
+                <a:cs typeface="CordiaUPC" panose="020B0304020202020204" pitchFamily="34" charset="-34"/>
+              </a:rPr>
+              <a:t>Sorting &amp; Filtering:** </a:t>
+            </a:r>
+            <a:r>
+              <a:rPr lang="th-TH" sz="2800" dirty="0">
+                <a:latin typeface="CordiaUPC" panose="020B0304020202020204" pitchFamily="34" charset="-34"/>
+                <a:cs typeface="CordiaUPC" panose="020B0304020202020204" pitchFamily="34" charset="-34"/>
+              </a:rPr>
+              <a:t>การเรียงลำดับ (ก-ฮ / มากไปน้อย) และการกรองเอาเฉพาะสิ่งที่สนใจ</a:t>
+            </a:r>
+          </a:p>
+          <a:p>
+            <a:r>
+              <a:rPr lang="th-TH" sz="2800" dirty="0">
+                <a:latin typeface="CordiaUPC" panose="020B0304020202020204" pitchFamily="34" charset="-34"/>
+                <a:cs typeface="CordiaUPC" panose="020B0304020202020204" pitchFamily="34" charset="-34"/>
+              </a:rPr>
+              <a:t>    * **</a:t>
+            </a:r>
+            <a:r>
+              <a:rPr lang="en-US" sz="2800" dirty="0">
+                <a:latin typeface="CordiaUPC" panose="020B0304020202020204" pitchFamily="34" charset="-34"/>
+                <a:cs typeface="CordiaUPC" panose="020B0304020202020204" pitchFamily="34" charset="-34"/>
+              </a:rPr>
+              <a:t>Data Retrieval:** </a:t>
+            </a:r>
+            <a:r>
+              <a:rPr lang="th-TH" sz="2800" dirty="0">
+                <a:latin typeface="CordiaUPC" panose="020B0304020202020204" pitchFamily="34" charset="-34"/>
+                <a:cs typeface="CordiaUPC" panose="020B0304020202020204" pitchFamily="34" charset="-34"/>
+              </a:rPr>
+              <a:t>การดึงข้อมูลข้าม </a:t>
+            </a:r>
+            <a:r>
+              <a:rPr lang="en-US" sz="2800" dirty="0">
+                <a:latin typeface="CordiaUPC" panose="020B0304020202020204" pitchFamily="34" charset="-34"/>
+                <a:cs typeface="CordiaUPC" panose="020B0304020202020204" pitchFamily="34" charset="-34"/>
+              </a:rPr>
+              <a:t>Sheet </a:t>
+            </a:r>
+            <a:r>
+              <a:rPr lang="th-TH" sz="2800" dirty="0">
+                <a:latin typeface="CordiaUPC" panose="020B0304020202020204" pitchFamily="34" charset="-34"/>
+                <a:cs typeface="CordiaUPC" panose="020B0304020202020204" pitchFamily="34" charset="-34"/>
+              </a:rPr>
+              <a:t>หรือข้ามไฟล์ (ใช้สูตรยอดฮิตอย่าง </a:t>
+            </a:r>
+            <a:r>
+              <a:rPr lang="en-US" sz="2800" dirty="0">
+                <a:latin typeface="CordiaUPC" panose="020B0304020202020204" pitchFamily="34" charset="-34"/>
+                <a:cs typeface="CordiaUPC" panose="020B0304020202020204" pitchFamily="34" charset="-34"/>
+              </a:rPr>
+              <a:t>VLOOKUP, XLOOKUP </a:t>
+            </a:r>
+            <a:r>
+              <a:rPr lang="th-TH" sz="2800" dirty="0">
+                <a:latin typeface="CordiaUPC" panose="020B0304020202020204" pitchFamily="34" charset="-34"/>
+                <a:cs typeface="CordiaUPC" panose="020B0304020202020204" pitchFamily="34" charset="-34"/>
+              </a:rPr>
+              <a:t>หรือ </a:t>
+            </a:r>
+            <a:r>
+              <a:rPr lang="en-US" sz="2800" dirty="0">
+                <a:latin typeface="CordiaUPC" panose="020B0304020202020204" pitchFamily="34" charset="-34"/>
+                <a:cs typeface="CordiaUPC" panose="020B0304020202020204" pitchFamily="34" charset="-34"/>
+              </a:rPr>
+              <a:t>Index Match)</a:t>
+            </a:r>
+          </a:p>
+          <a:p>
+            <a:r>
+              <a:rPr lang="en-US" sz="2800" dirty="0">
+                <a:latin typeface="CordiaUPC" panose="020B0304020202020204" pitchFamily="34" charset="-34"/>
+                <a:cs typeface="CordiaUPC" panose="020B0304020202020204" pitchFamily="34" charset="-34"/>
+              </a:rPr>
+              <a:t>    * **Data Cleaning:** </a:t>
+            </a:r>
+            <a:r>
+              <a:rPr lang="th-TH" sz="2800" dirty="0">
+                <a:latin typeface="CordiaUPC" panose="020B0304020202020204" pitchFamily="34" charset="-34"/>
+                <a:cs typeface="CordiaUPC" panose="020B0304020202020204" pitchFamily="34" charset="-34"/>
+              </a:rPr>
+              <a:t>การลบข้อมูลซ้ำ (</a:t>
+            </a:r>
+            <a:r>
+              <a:rPr lang="en-US" sz="2800" dirty="0">
+                <a:latin typeface="CordiaUPC" panose="020B0304020202020204" pitchFamily="34" charset="-34"/>
+                <a:cs typeface="CordiaUPC" panose="020B0304020202020204" pitchFamily="34" charset="-34"/>
+              </a:rPr>
+              <a:t>Remove Duplicates) </a:t>
+            </a:r>
+            <a:r>
+              <a:rPr lang="th-TH" sz="2800" dirty="0">
+                <a:latin typeface="CordiaUPC" panose="020B0304020202020204" pitchFamily="34" charset="-34"/>
+                <a:cs typeface="CordiaUPC" panose="020B0304020202020204" pitchFamily="34" charset="-34"/>
+              </a:rPr>
+              <a:t>หรือการแยกข้อความ (</a:t>
+            </a:r>
+            <a:r>
+              <a:rPr lang="en-US" sz="2800" dirty="0">
+                <a:latin typeface="CordiaUPC" panose="020B0304020202020204" pitchFamily="34" charset="-34"/>
+                <a:cs typeface="CordiaUPC" panose="020B0304020202020204" pitchFamily="34" charset="-34"/>
+              </a:rPr>
+              <a:t>Text to Columns)</a:t>
+            </a:r>
+          </a:p>
+        </p:txBody>
+      </p:sp>
+      <p:sp>
+        <p:nvSpPr>
+          <p:cNvPr id="4" name="Rectangle 3">
+            <a:extLst>
+              <a:ext uri="{FF2B5EF4-FFF2-40B4-BE49-F238E27FC236}">
+                <a16:creationId xmlns:a16="http://schemas.microsoft.com/office/drawing/2014/main" id="{0035105C-5ED8-FF77-C152-E4CD7E949B87}"/>
+              </a:ext>
+            </a:extLst>
+          </p:cNvPr>
+          <p:cNvSpPr/>
+          <p:nvPr/>
+        </p:nvSpPr>
+        <p:spPr>
+          <a:xfrm>
+            <a:off x="1329452" y="688830"/>
+            <a:ext cx="6816290" cy="1754326"/>
+          </a:xfrm>
+          <a:prstGeom prst="rect">
+            <a:avLst/>
+          </a:prstGeom>
+          <a:noFill/>
+        </p:spPr>
+        <p:txBody>
+          <a:bodyPr wrap="none" lIns="91440" tIns="45720" rIns="91440" bIns="45720">
+            <a:spAutoFit/>
+            <a:scene3d>
+              <a:camera prst="orthographicFront"/>
+              <a:lightRig rig="soft" dir="t">
+                <a:rot lat="0" lon="0" rev="15600000"/>
+              </a:lightRig>
+            </a:scene3d>
+            <a:sp3d extrusionH="57150" prstMaterial="softEdge">
+              <a:bevelT w="25400" h="38100"/>
+            </a:sp3d>
+          </a:bodyPr>
+          <a:lstStyle/>
+          <a:p>
+            <a:pPr algn="ctr"/>
+            <a:r>
+              <a:rPr lang="en-US" sz="5400" dirty="0">
+                <a:latin typeface="CordiaUPC" panose="020B0304020202020204" pitchFamily="34" charset="-34"/>
+                <a:cs typeface="CordiaUPC" panose="020B0304020202020204" pitchFamily="34" charset="-34"/>
+              </a:rPr>
+              <a:t>2. Data Manipulation &amp; Retrieval </a:t>
+            </a:r>
+          </a:p>
+          <a:p>
+            <a:pPr algn="ctr"/>
+            <a:r>
+              <a:rPr lang="en-US" sz="5400" dirty="0">
+                <a:latin typeface="CordiaUPC" panose="020B0304020202020204" pitchFamily="34" charset="-34"/>
+                <a:cs typeface="CordiaUPC" panose="020B0304020202020204" pitchFamily="34" charset="-34"/>
+              </a:rPr>
+              <a:t>(</a:t>
+            </a:r>
+            <a:r>
+              <a:rPr lang="th-TH" sz="5400" dirty="0">
+                <a:latin typeface="CordiaUPC" panose="020B0304020202020204" pitchFamily="34" charset="-34"/>
+                <a:cs typeface="CordiaUPC" panose="020B0304020202020204" pitchFamily="34" charset="-34"/>
+              </a:rPr>
+              <a:t>กลางน้ำ: การจัดการและดึงข้อมูล)</a:t>
+            </a:r>
+            <a:endParaRPr lang="th-TH" sz="5400" dirty="0"/>
+          </a:p>
+        </p:txBody>
+      </p:sp>
+    </p:spTree>
+    <p:extLst>
+      <p:ext uri="{BB962C8B-B14F-4D97-AF65-F5344CB8AC3E}">
+        <p14:creationId xmlns:p14="http://schemas.microsoft.com/office/powerpoint/2010/main" val="1054559083"/>
       </p:ext>
     </p:extLst>
   </p:cSld>

--- a/Excelppt.pptx
+++ b/Excelppt.pptx
@@ -16,9 +16,11 @@
     <p:sldId id="269" r:id="rId10"/>
     <p:sldId id="268" r:id="rId11"/>
     <p:sldId id="265" r:id="rId12"/>
-    <p:sldId id="261" r:id="rId13"/>
-    <p:sldId id="264" r:id="rId14"/>
-    <p:sldId id="263" r:id="rId15"/>
+    <p:sldId id="270" r:id="rId13"/>
+    <p:sldId id="261" r:id="rId14"/>
+    <p:sldId id="271" r:id="rId15"/>
+    <p:sldId id="264" r:id="rId16"/>
+    <p:sldId id="263" r:id="rId17"/>
   </p:sldIdLst>
   <p:sldSz cx="12192000" cy="6858000"/>
   <p:notesSz cx="6858000" cy="9144000"/>
@@ -24732,6 +24734,96 @@
   <p:cSld>
     <p:spTree>
       <p:nvGrpSpPr>
+        <p:cNvPr id="1" name="">
+          <a:extLst>
+            <a:ext uri="{FF2B5EF4-FFF2-40B4-BE49-F238E27FC236}">
+              <a16:creationId xmlns:a16="http://schemas.microsoft.com/office/drawing/2014/main" id="{98CA4C4A-4445-0D58-1ABA-98AD7CEA0A05}"/>
+            </a:ext>
+          </a:extLst>
+        </p:cNvPr>
+        <p:cNvGrpSpPr/>
+        <p:nvPr/>
+      </p:nvGrpSpPr>
+      <p:grpSpPr>
+        <a:xfrm>
+          <a:off x="0" y="0"/>
+          <a:ext cx="0" cy="0"/>
+          <a:chOff x="0" y="0"/>
+          <a:chExt cx="0" cy="0"/>
+        </a:xfrm>
+      </p:grpSpPr>
+      <p:sp>
+        <p:nvSpPr>
+          <p:cNvPr id="2" name="Rectangle 1">
+            <a:extLst>
+              <a:ext uri="{FF2B5EF4-FFF2-40B4-BE49-F238E27FC236}">
+                <a16:creationId xmlns:a16="http://schemas.microsoft.com/office/drawing/2014/main" id="{F4037B83-23BC-1288-83E6-25286618A882}"/>
+              </a:ext>
+            </a:extLst>
+          </p:cNvPr>
+          <p:cNvSpPr/>
+          <p:nvPr/>
+        </p:nvSpPr>
+        <p:spPr>
+          <a:xfrm>
+            <a:off x="4418699" y="1408358"/>
+            <a:ext cx="3114763" cy="923330"/>
+          </a:xfrm>
+          <a:prstGeom prst="rect">
+            <a:avLst/>
+          </a:prstGeom>
+          <a:noFill/>
+        </p:spPr>
+        <p:txBody>
+          <a:bodyPr wrap="none" lIns="91440" tIns="45720" rIns="91440" bIns="45720">
+            <a:spAutoFit/>
+          </a:bodyPr>
+          <a:lstStyle/>
+          <a:p>
+            <a:pPr algn="ctr"/>
+            <a:r>
+              <a:rPr lang="en-US" sz="5400" b="1" cap="none" spc="0" dirty="0">
+                <a:ln w="9525">
+                  <a:solidFill>
+                    <a:schemeClr val="bg1"/>
+                  </a:solidFill>
+                  <a:prstDash val="solid"/>
+                </a:ln>
+                <a:solidFill>
+                  <a:schemeClr val="accent5"/>
+                </a:solidFill>
+                <a:effectLst>
+                  <a:outerShdw blurRad="12700" dist="38100" dir="2700000" algn="tl" rotWithShape="0">
+                    <a:schemeClr val="accent5">
+                      <a:lumMod val="60000"/>
+                      <a:lumOff val="40000"/>
+                    </a:schemeClr>
+                  </a:outerShdw>
+                </a:effectLst>
+              </a:rPr>
+              <a:t>Chapter3</a:t>
+            </a:r>
+          </a:p>
+        </p:txBody>
+      </p:sp>
+    </p:spTree>
+    <p:extLst>
+      <p:ext uri="{BB962C8B-B14F-4D97-AF65-F5344CB8AC3E}">
+        <p14:creationId xmlns:p14="http://schemas.microsoft.com/office/powerpoint/2010/main" val="782578051"/>
+      </p:ext>
+    </p:extLst>
+  </p:cSld>
+  <p:clrMapOvr>
+    <a:masterClrMapping/>
+  </p:clrMapOvr>
+</p:sld>
+</file>
+
+<file path=ppt/slides/slide13.xml><?xml version="1.0" encoding="utf-8"?>
+<p:sld xmlns:a="http://schemas.openxmlformats.org/drawingml/2006/main" xmlns:r="http://schemas.openxmlformats.org/officeDocument/2006/relationships" xmlns:p="http://schemas.openxmlformats.org/presentationml/2006/main">
+  <p:cSld>
+    <p:spTree>
+      <p:nvGrpSpPr>
         <p:cNvPr id="1" name=""/>
         <p:cNvGrpSpPr/>
         <p:nvPr/>
@@ -24744,6 +24836,265 @@
           <a:chExt cx="0" cy="0"/>
         </a:xfrm>
       </p:grpSpPr>
+      <p:sp>
+        <p:nvSpPr>
+          <p:cNvPr id="2" name="Rectangle 1">
+            <a:extLst>
+              <a:ext uri="{FF2B5EF4-FFF2-40B4-BE49-F238E27FC236}">
+                <a16:creationId xmlns:a16="http://schemas.microsoft.com/office/drawing/2014/main" id="{E7DA6AD3-CB6A-0837-8A04-F9CF78516908}"/>
+              </a:ext>
+            </a:extLst>
+          </p:cNvPr>
+          <p:cNvSpPr/>
+          <p:nvPr/>
+        </p:nvSpPr>
+        <p:spPr>
+          <a:xfrm>
+            <a:off x="1058064" y="643860"/>
+            <a:ext cx="7497565" cy="923330"/>
+          </a:xfrm>
+          <a:prstGeom prst="rect">
+            <a:avLst/>
+          </a:prstGeom>
+          <a:noFill/>
+        </p:spPr>
+        <p:txBody>
+          <a:bodyPr wrap="none" lIns="91440" tIns="45720" rIns="91440" bIns="45720">
+            <a:spAutoFit/>
+          </a:bodyPr>
+          <a:lstStyle/>
+          <a:p>
+            <a:pPr algn="ctr"/>
+            <a:r>
+              <a:rPr lang="th-TH" sz="5400" b="1" spc="50" dirty="0">
+                <a:ln w="9525" cmpd="sng">
+                  <a:solidFill>
+                    <a:schemeClr val="accent1"/>
+                  </a:solidFill>
+                  <a:prstDash val="solid"/>
+                </a:ln>
+                <a:solidFill>
+                  <a:srgbClr val="70AD47">
+                    <a:tint val="1000"/>
+                  </a:srgbClr>
+                </a:solidFill>
+                <a:effectLst>
+                  <a:glow rad="38100">
+                    <a:schemeClr val="accent1">
+                      <a:alpha val="40000"/>
+                    </a:schemeClr>
+                  </a:glow>
+                </a:effectLst>
+              </a:rPr>
+              <a:t>5 อัศวินที่เป็นรากฐานของ </a:t>
+            </a:r>
+            <a:r>
+              <a:rPr lang="en-US" sz="5400" b="1" spc="50" dirty="0">
+                <a:ln w="9525" cmpd="sng">
+                  <a:solidFill>
+                    <a:schemeClr val="accent1"/>
+                  </a:solidFill>
+                  <a:prstDash val="solid"/>
+                </a:ln>
+                <a:solidFill>
+                  <a:srgbClr val="70AD47">
+                    <a:tint val="1000"/>
+                  </a:srgbClr>
+                </a:solidFill>
+                <a:effectLst>
+                  <a:glow rad="38100">
+                    <a:schemeClr val="accent1">
+                      <a:alpha val="40000"/>
+                    </a:schemeClr>
+                  </a:glow>
+                </a:effectLst>
+              </a:rPr>
+              <a:t>Excel</a:t>
+            </a:r>
+            <a:endParaRPr lang="en-US" sz="5400" b="1" cap="none" spc="50" dirty="0">
+              <a:ln w="9525" cmpd="sng">
+                <a:solidFill>
+                  <a:schemeClr val="accent1"/>
+                </a:solidFill>
+                <a:prstDash val="solid"/>
+              </a:ln>
+              <a:solidFill>
+                <a:srgbClr val="70AD47">
+                  <a:tint val="1000"/>
+                </a:srgbClr>
+              </a:solidFill>
+              <a:effectLst>
+                <a:glow rad="38100">
+                  <a:schemeClr val="accent1">
+                    <a:alpha val="40000"/>
+                  </a:schemeClr>
+                </a:glow>
+              </a:effectLst>
+            </a:endParaRPr>
+          </a:p>
+        </p:txBody>
+      </p:sp>
+      <p:sp>
+        <p:nvSpPr>
+          <p:cNvPr id="3" name="TextBox 2">
+            <a:extLst>
+              <a:ext uri="{FF2B5EF4-FFF2-40B4-BE49-F238E27FC236}">
+                <a16:creationId xmlns:a16="http://schemas.microsoft.com/office/drawing/2014/main" id="{36B3FF82-A1CC-5131-160B-3BE259BC000D}"/>
+              </a:ext>
+            </a:extLst>
+          </p:cNvPr>
+          <p:cNvSpPr txBox="1"/>
+          <p:nvPr/>
+        </p:nvSpPr>
+        <p:spPr>
+          <a:xfrm>
+            <a:off x="2263061" y="1951672"/>
+            <a:ext cx="5471410" cy="3170099"/>
+          </a:xfrm>
+          <a:prstGeom prst="rect">
+            <a:avLst/>
+          </a:prstGeom>
+          <a:noFill/>
+        </p:spPr>
+        <p:txBody>
+          <a:bodyPr wrap="square" rtlCol="0">
+            <a:spAutoFit/>
+          </a:bodyPr>
+          <a:lstStyle/>
+          <a:p>
+            <a:pPr marL="342900" indent="-342900">
+              <a:buAutoNum type="arabicPeriod"/>
+            </a:pPr>
+            <a:r>
+              <a:rPr lang="en-US" sz="4000" dirty="0">
+                <a:latin typeface="Cordia New" panose="020B0304020202020204" pitchFamily="34" charset="-34"/>
+                <a:cs typeface="Cordia New" panose="020B0304020202020204" pitchFamily="34" charset="-34"/>
+              </a:rPr>
+              <a:t>Column (</a:t>
+            </a:r>
+            <a:r>
+              <a:rPr lang="th-TH" sz="4000" dirty="0">
+                <a:latin typeface="Cordia New" panose="020B0304020202020204" pitchFamily="34" charset="-34"/>
+                <a:cs typeface="Cordia New" panose="020B0304020202020204" pitchFamily="34" charset="-34"/>
+              </a:rPr>
+              <a:t>คอลัมน์) </a:t>
+            </a:r>
+            <a:endParaRPr lang="en-US" sz="4000" dirty="0">
+              <a:latin typeface="Cordia New" panose="020B0304020202020204" pitchFamily="34" charset="-34"/>
+              <a:cs typeface="Cordia New" panose="020B0304020202020204" pitchFamily="34" charset="-34"/>
+            </a:endParaRPr>
+          </a:p>
+          <a:p>
+            <a:pPr marL="342900" indent="-342900">
+              <a:buAutoNum type="arabicPeriod"/>
+            </a:pPr>
+            <a:r>
+              <a:rPr lang="en-US" sz="4000" dirty="0">
+                <a:latin typeface="Cordia New" panose="020B0304020202020204" pitchFamily="34" charset="-34"/>
+                <a:cs typeface="Cordia New" panose="020B0304020202020204" pitchFamily="34" charset="-34"/>
+              </a:rPr>
+              <a:t>Row (</a:t>
+            </a:r>
+            <a:r>
+              <a:rPr lang="th-TH" sz="4000" dirty="0">
+                <a:latin typeface="Cordia New" panose="020B0304020202020204" pitchFamily="34" charset="-34"/>
+                <a:cs typeface="Cordia New" panose="020B0304020202020204" pitchFamily="34" charset="-34"/>
+              </a:rPr>
+              <a:t>แถว)</a:t>
+            </a:r>
+            <a:endParaRPr lang="en-US" sz="4000" dirty="0">
+              <a:latin typeface="Cordia New" panose="020B0304020202020204" pitchFamily="34" charset="-34"/>
+              <a:cs typeface="Cordia New" panose="020B0304020202020204" pitchFamily="34" charset="-34"/>
+            </a:endParaRPr>
+          </a:p>
+          <a:p>
+            <a:pPr marL="342900" indent="-342900">
+              <a:buFont typeface="+mj-lt"/>
+              <a:buAutoNum type="arabicPeriod"/>
+            </a:pPr>
+            <a:r>
+              <a:rPr lang="en-US" sz="4000" dirty="0">
+                <a:latin typeface="Cordia New" panose="020B0304020202020204" pitchFamily="34" charset="-34"/>
+                <a:cs typeface="Cordia New" panose="020B0304020202020204" pitchFamily="34" charset="-34"/>
+              </a:rPr>
+              <a:t>Cells (</a:t>
+            </a:r>
+            <a:r>
+              <a:rPr lang="th-TH" sz="4000" dirty="0">
+                <a:latin typeface="Cordia New" panose="020B0304020202020204" pitchFamily="34" charset="-34"/>
+                <a:cs typeface="Cordia New" panose="020B0304020202020204" pitchFamily="34" charset="-34"/>
+              </a:rPr>
+              <a:t>เซลล์) &amp; </a:t>
+            </a:r>
+            <a:r>
+              <a:rPr lang="en-US" sz="4000" dirty="0">
+                <a:latin typeface="Cordia New" panose="020B0304020202020204" pitchFamily="34" charset="-34"/>
+                <a:cs typeface="Cordia New" panose="020B0304020202020204" pitchFamily="34" charset="-34"/>
+              </a:rPr>
+              <a:t>Address (</a:t>
+            </a:r>
+            <a:r>
+              <a:rPr lang="th-TH" sz="4000" dirty="0">
+                <a:latin typeface="Cordia New" panose="020B0304020202020204" pitchFamily="34" charset="-34"/>
+                <a:cs typeface="Cordia New" panose="020B0304020202020204" pitchFamily="34" charset="-34"/>
+              </a:rPr>
+              <a:t>ที่อยู่)</a:t>
+            </a:r>
+            <a:endParaRPr lang="en-US" sz="4000" dirty="0">
+              <a:latin typeface="Cordia New" panose="020B0304020202020204" pitchFamily="34" charset="-34"/>
+              <a:cs typeface="Cordia New" panose="020B0304020202020204" pitchFamily="34" charset="-34"/>
+            </a:endParaRPr>
+          </a:p>
+          <a:p>
+            <a:pPr marL="342900" indent="-342900">
+              <a:buFont typeface="+mj-lt"/>
+              <a:buAutoNum type="arabicPeriod"/>
+            </a:pPr>
+            <a:r>
+              <a:rPr lang="en-US" sz="4000" dirty="0">
+                <a:latin typeface="Cordia New" panose="020B0304020202020204" pitchFamily="34" charset="-34"/>
+                <a:cs typeface="Cordia New" panose="020B0304020202020204" pitchFamily="34" charset="-34"/>
+              </a:rPr>
+              <a:t>Range (</a:t>
+            </a:r>
+            <a:r>
+              <a:rPr lang="th-TH" sz="4000" dirty="0">
+                <a:latin typeface="Cordia New" panose="020B0304020202020204" pitchFamily="34" charset="-34"/>
+                <a:cs typeface="Cordia New" panose="020B0304020202020204" pitchFamily="34" charset="-34"/>
+              </a:rPr>
+              <a:t>ช่วงข้อมูล)</a:t>
+            </a:r>
+            <a:endParaRPr lang="en-US" sz="4000" dirty="0">
+              <a:latin typeface="Cordia New" panose="020B0304020202020204" pitchFamily="34" charset="-34"/>
+              <a:cs typeface="Cordia New" panose="020B0304020202020204" pitchFamily="34" charset="-34"/>
+            </a:endParaRPr>
+          </a:p>
+          <a:p>
+            <a:pPr marL="342900" indent="-342900">
+              <a:buFont typeface="+mj-lt"/>
+              <a:buAutoNum type="arabicPeriod"/>
+            </a:pPr>
+            <a:r>
+              <a:rPr lang="en-US" sz="4000" dirty="0">
+                <a:latin typeface="Cordia New" panose="020B0304020202020204" pitchFamily="34" charset="-34"/>
+                <a:cs typeface="Cordia New" panose="020B0304020202020204" pitchFamily="34" charset="-34"/>
+              </a:rPr>
+              <a:t>Worksheet (</a:t>
+            </a:r>
+            <a:r>
+              <a:rPr lang="th-TH" sz="4000" dirty="0">
+                <a:latin typeface="Cordia New" panose="020B0304020202020204" pitchFamily="34" charset="-34"/>
+                <a:cs typeface="Cordia New" panose="020B0304020202020204" pitchFamily="34" charset="-34"/>
+              </a:rPr>
+              <a:t>แผ่นงาน)</a:t>
+            </a:r>
+            <a:endParaRPr lang="en-US" sz="4000" dirty="0">
+              <a:latin typeface="Cordia New" panose="020B0304020202020204" pitchFamily="34" charset="-34"/>
+              <a:cs typeface="Cordia New" panose="020B0304020202020204" pitchFamily="34" charset="-34"/>
+            </a:endParaRPr>
+          </a:p>
+        </p:txBody>
+      </p:sp>
     </p:spTree>
     <p:extLst>
       <p:ext uri="{BB962C8B-B14F-4D97-AF65-F5344CB8AC3E}">
@@ -24757,7 +25108,138 @@
 </p:sld>
 </file>
 
-<file path=ppt/slides/slide13.xml><?xml version="1.0" encoding="utf-8"?>
+<file path=ppt/slides/slide14.xml><?xml version="1.0" encoding="utf-8"?>
+<p:sld xmlns:a="http://schemas.openxmlformats.org/drawingml/2006/main" xmlns:r="http://schemas.openxmlformats.org/officeDocument/2006/relationships" xmlns:p="http://schemas.openxmlformats.org/presentationml/2006/main">
+  <p:cSld>
+    <p:spTree>
+      <p:nvGrpSpPr>
+        <p:cNvPr id="1" name="">
+          <a:extLst>
+            <a:ext uri="{FF2B5EF4-FFF2-40B4-BE49-F238E27FC236}">
+              <a16:creationId xmlns:a16="http://schemas.microsoft.com/office/drawing/2014/main" id="{DC7FF857-0067-6152-71A7-5A44019A41BC}"/>
+            </a:ext>
+          </a:extLst>
+        </p:cNvPr>
+        <p:cNvGrpSpPr/>
+        <p:nvPr/>
+      </p:nvGrpSpPr>
+      <p:grpSpPr>
+        <a:xfrm>
+          <a:off x="0" y="0"/>
+          <a:ext cx="0" cy="0"/>
+          <a:chOff x="0" y="0"/>
+          <a:chExt cx="0" cy="0"/>
+        </a:xfrm>
+      </p:grpSpPr>
+      <p:sp>
+        <p:nvSpPr>
+          <p:cNvPr id="2" name="Rectangle 1">
+            <a:extLst>
+              <a:ext uri="{FF2B5EF4-FFF2-40B4-BE49-F238E27FC236}">
+                <a16:creationId xmlns:a16="http://schemas.microsoft.com/office/drawing/2014/main" id="{934BB50C-B350-7FB0-509A-BA819EF9B92D}"/>
+              </a:ext>
+            </a:extLst>
+          </p:cNvPr>
+          <p:cNvSpPr/>
+          <p:nvPr/>
+        </p:nvSpPr>
+        <p:spPr>
+          <a:xfrm>
+            <a:off x="4418699" y="1408358"/>
+            <a:ext cx="3114763" cy="923330"/>
+          </a:xfrm>
+          <a:prstGeom prst="rect">
+            <a:avLst/>
+          </a:prstGeom>
+          <a:noFill/>
+        </p:spPr>
+        <p:txBody>
+          <a:bodyPr wrap="none" lIns="91440" tIns="45720" rIns="91440" bIns="45720">
+            <a:spAutoFit/>
+          </a:bodyPr>
+          <a:lstStyle/>
+          <a:p>
+            <a:pPr algn="ctr"/>
+            <a:r>
+              <a:rPr lang="en-US" sz="5400" b="1" cap="none" spc="0" dirty="0">
+                <a:ln w="9525">
+                  <a:solidFill>
+                    <a:schemeClr val="bg1"/>
+                  </a:solidFill>
+                  <a:prstDash val="solid"/>
+                </a:ln>
+                <a:solidFill>
+                  <a:schemeClr val="accent5"/>
+                </a:solidFill>
+                <a:effectLst>
+                  <a:outerShdw blurRad="12700" dist="38100" dir="2700000" algn="tl" rotWithShape="0">
+                    <a:schemeClr val="accent5">
+                      <a:lumMod val="60000"/>
+                      <a:lumOff val="40000"/>
+                    </a:schemeClr>
+                  </a:outerShdw>
+                </a:effectLst>
+              </a:rPr>
+              <a:t>Chapter</a:t>
+            </a:r>
+            <a:r>
+              <a:rPr lang="en-US" sz="5400" b="1" dirty="0">
+                <a:ln w="9525">
+                  <a:solidFill>
+                    <a:schemeClr val="bg1"/>
+                  </a:solidFill>
+                  <a:prstDash val="solid"/>
+                </a:ln>
+                <a:solidFill>
+                  <a:schemeClr val="accent5"/>
+                </a:solidFill>
+                <a:effectLst>
+                  <a:outerShdw blurRad="12700" dist="38100" dir="2700000" algn="tl" rotWithShape="0">
+                    <a:schemeClr val="accent5">
+                      <a:lumMod val="60000"/>
+                      <a:lumOff val="40000"/>
+                    </a:schemeClr>
+                  </a:outerShdw>
+                </a:effectLst>
+              </a:rPr>
+              <a:t>4</a:t>
+            </a:r>
+            <a:endParaRPr lang="en-US" sz="5400" b="1" cap="none" spc="0" dirty="0">
+              <a:ln w="9525">
+                <a:solidFill>
+                  <a:schemeClr val="bg1"/>
+                </a:solidFill>
+                <a:prstDash val="solid"/>
+              </a:ln>
+              <a:solidFill>
+                <a:schemeClr val="accent5"/>
+              </a:solidFill>
+              <a:effectLst>
+                <a:outerShdw blurRad="12700" dist="38100" dir="2700000" algn="tl" rotWithShape="0">
+                  <a:schemeClr val="accent5">
+                    <a:lumMod val="60000"/>
+                    <a:lumOff val="40000"/>
+                  </a:schemeClr>
+                </a:outerShdw>
+              </a:effectLst>
+            </a:endParaRPr>
+          </a:p>
+        </p:txBody>
+      </p:sp>
+    </p:spTree>
+    <p:extLst>
+      <p:ext uri="{BB962C8B-B14F-4D97-AF65-F5344CB8AC3E}">
+        <p14:creationId xmlns:p14="http://schemas.microsoft.com/office/powerpoint/2010/main" val="2426260116"/>
+      </p:ext>
+    </p:extLst>
+  </p:cSld>
+  <p:clrMapOvr>
+    <a:masterClrMapping/>
+  </p:clrMapOvr>
+</p:sld>
+</file>
+
+<file path=ppt/slides/slide15.xml><?xml version="1.0" encoding="utf-8"?>
 <p:sld xmlns:a="http://schemas.openxmlformats.org/drawingml/2006/main" xmlns:r="http://schemas.openxmlformats.org/officeDocument/2006/relationships" xmlns:p="http://schemas.openxmlformats.org/presentationml/2006/main">
   <p:cSld>
     <p:spTree>
@@ -24793,7 +25275,7 @@
 </p:sld>
 </file>
 
-<file path=ppt/slides/slide14.xml><?xml version="1.0" encoding="utf-8"?>
+<file path=ppt/slides/slide16.xml><?xml version="1.0" encoding="utf-8"?>
 <p:sld xmlns:a="http://schemas.openxmlformats.org/drawingml/2006/main" xmlns:r="http://schemas.openxmlformats.org/officeDocument/2006/relationships" xmlns:p="http://schemas.openxmlformats.org/presentationml/2006/main">
   <p:cSld>
     <p:spTree>
@@ -24816,6 +25298,2046 @@
           <a:chExt cx="0" cy="0"/>
         </a:xfrm>
       </p:grpSpPr>
+      <p:graphicFrame>
+        <p:nvGraphicFramePr>
+          <p:cNvPr id="2" name="Table 1">
+            <a:extLst>
+              <a:ext uri="{FF2B5EF4-FFF2-40B4-BE49-F238E27FC236}">
+                <a16:creationId xmlns:a16="http://schemas.microsoft.com/office/drawing/2014/main" id="{352D2BA5-C61D-1996-F5AD-59099759AAE5}"/>
+              </a:ext>
+            </a:extLst>
+          </p:cNvPr>
+          <p:cNvGraphicFramePr>
+            <a:graphicFrameLocks noGrp="1"/>
+          </p:cNvGraphicFramePr>
+          <p:nvPr/>
+        </p:nvGraphicFramePr>
+        <p:xfrm>
+          <a:off x="838199" y="2949734"/>
+          <a:ext cx="10515603" cy="2103120"/>
+        </p:xfrm>
+        <a:graphic>
+          <a:graphicData uri="http://schemas.openxmlformats.org/drawingml/2006/table">
+            <a:tbl>
+              <a:tblPr/>
+              <a:tblGrid>
+                <a:gridCol w="1502229">
+                  <a:extLst>
+                    <a:ext uri="{9D8B030D-6E8A-4147-A177-3AD203B41FA5}">
+                      <a16:colId xmlns:a16="http://schemas.microsoft.com/office/drawing/2014/main" val="4185519787"/>
+                    </a:ext>
+                  </a:extLst>
+                </a:gridCol>
+                <a:gridCol w="1502229">
+                  <a:extLst>
+                    <a:ext uri="{9D8B030D-6E8A-4147-A177-3AD203B41FA5}">
+                      <a16:colId xmlns:a16="http://schemas.microsoft.com/office/drawing/2014/main" val="4113654598"/>
+                    </a:ext>
+                  </a:extLst>
+                </a:gridCol>
+                <a:gridCol w="1502229">
+                  <a:extLst>
+                    <a:ext uri="{9D8B030D-6E8A-4147-A177-3AD203B41FA5}">
+                      <a16:colId xmlns:a16="http://schemas.microsoft.com/office/drawing/2014/main" val="3677270883"/>
+                    </a:ext>
+                  </a:extLst>
+                </a:gridCol>
+                <a:gridCol w="1502229">
+                  <a:extLst>
+                    <a:ext uri="{9D8B030D-6E8A-4147-A177-3AD203B41FA5}">
+                      <a16:colId xmlns:a16="http://schemas.microsoft.com/office/drawing/2014/main" val="643078999"/>
+                    </a:ext>
+                  </a:extLst>
+                </a:gridCol>
+                <a:gridCol w="1502229">
+                  <a:extLst>
+                    <a:ext uri="{9D8B030D-6E8A-4147-A177-3AD203B41FA5}">
+                      <a16:colId xmlns:a16="http://schemas.microsoft.com/office/drawing/2014/main" val="2107906648"/>
+                    </a:ext>
+                  </a:extLst>
+                </a:gridCol>
+                <a:gridCol w="1502229">
+                  <a:extLst>
+                    <a:ext uri="{9D8B030D-6E8A-4147-A177-3AD203B41FA5}">
+                      <a16:colId xmlns:a16="http://schemas.microsoft.com/office/drawing/2014/main" val="2154861930"/>
+                    </a:ext>
+                  </a:extLst>
+                </a:gridCol>
+                <a:gridCol w="1502229">
+                  <a:extLst>
+                    <a:ext uri="{9D8B030D-6E8A-4147-A177-3AD203B41FA5}">
+                      <a16:colId xmlns:a16="http://schemas.microsoft.com/office/drawing/2014/main" val="2407393748"/>
+                    </a:ext>
+                  </a:extLst>
+                </a:gridCol>
+              </a:tblGrid>
+              <a:tr h="640080">
+                <a:tc>
+                  <a:txBody>
+                    <a:bodyPr/>
+                    <a:lstStyle/>
+                    <a:p>
+                      <a:pPr>
+                        <a:buNone/>
+                      </a:pPr>
+                      <a:r>
+                        <a:rPr lang="en-US" sz="1800" b="1">
+                          <a:effectLst/>
+                          <a:latin typeface="Google Sans Text"/>
+                        </a:rPr>
+                        <a:t>Date (</a:t>
+                      </a:r>
+                      <a:r>
+                        <a:rPr lang="th-TH" sz="1800" b="1">
+                          <a:effectLst/>
+                          <a:latin typeface="Google Sans Text"/>
+                        </a:rPr>
+                        <a:t>วันที่)</a:t>
+                      </a:r>
+                      <a:endParaRPr lang="th-TH" sz="1800">
+                        <a:effectLst/>
+                        <a:latin typeface="Google Sans Text"/>
+                      </a:endParaRPr>
+                    </a:p>
+                  </a:txBody>
+                  <a:tcPr anchor="ctr">
+                    <a:lnL w="9525" cap="flat" cmpd="sng" algn="ctr">
+                      <a:solidFill>
+                        <a:schemeClr val="bg1"/>
+                      </a:solidFill>
+                      <a:prstDash val="solid"/>
+                      <a:round/>
+                      <a:headEnd type="none" w="med" len="med"/>
+                      <a:tailEnd type="none" w="med" len="med"/>
+                    </a:lnL>
+                    <a:lnR w="9525" cap="flat" cmpd="sng" algn="ctr">
+                      <a:solidFill>
+                        <a:schemeClr val="bg1"/>
+                      </a:solidFill>
+                      <a:prstDash val="solid"/>
+                      <a:round/>
+                      <a:headEnd type="none" w="med" len="med"/>
+                      <a:tailEnd type="none" w="med" len="med"/>
+                    </a:lnR>
+                    <a:lnT w="9525" cap="flat" cmpd="sng" algn="ctr">
+                      <a:solidFill>
+                        <a:schemeClr val="bg1"/>
+                      </a:solidFill>
+                      <a:prstDash val="solid"/>
+                      <a:round/>
+                      <a:headEnd type="none" w="med" len="med"/>
+                      <a:tailEnd type="none" w="med" len="med"/>
+                    </a:lnT>
+                    <a:lnB w="9525" cap="flat" cmpd="sng" algn="ctr">
+                      <a:solidFill>
+                        <a:schemeClr val="bg1"/>
+                      </a:solidFill>
+                      <a:prstDash val="solid"/>
+                      <a:round/>
+                      <a:headEnd type="none" w="med" len="med"/>
+                      <a:tailEnd type="none" w="med" len="med"/>
+                    </a:lnB>
+                    <a:noFill/>
+                  </a:tcPr>
+                </a:tc>
+                <a:tc>
+                  <a:txBody>
+                    <a:bodyPr/>
+                    <a:lstStyle/>
+                    <a:p>
+                      <a:pPr>
+                        <a:buNone/>
+                      </a:pPr>
+                      <a:r>
+                        <a:rPr lang="en-US" sz="1800" b="1">
+                          <a:effectLst/>
+                          <a:latin typeface="Google Sans Text"/>
+                        </a:rPr>
+                        <a:t>Product ID (Text)</a:t>
+                      </a:r>
+                      <a:endParaRPr lang="en-US" sz="1800">
+                        <a:effectLst/>
+                        <a:latin typeface="Google Sans Text"/>
+                      </a:endParaRPr>
+                    </a:p>
+                  </a:txBody>
+                  <a:tcPr anchor="ctr">
+                    <a:lnL w="9525" cap="flat" cmpd="sng" algn="ctr">
+                      <a:solidFill>
+                        <a:schemeClr val="bg1"/>
+                      </a:solidFill>
+                      <a:prstDash val="solid"/>
+                      <a:round/>
+                      <a:headEnd type="none" w="med" len="med"/>
+                      <a:tailEnd type="none" w="med" len="med"/>
+                    </a:lnL>
+                    <a:lnR w="9525" cap="flat" cmpd="sng" algn="ctr">
+                      <a:solidFill>
+                        <a:schemeClr val="bg1"/>
+                      </a:solidFill>
+                      <a:prstDash val="solid"/>
+                      <a:round/>
+                      <a:headEnd type="none" w="med" len="med"/>
+                      <a:tailEnd type="none" w="med" len="med"/>
+                    </a:lnR>
+                    <a:lnT w="9525" cap="flat" cmpd="sng" algn="ctr">
+                      <a:solidFill>
+                        <a:schemeClr val="bg1"/>
+                      </a:solidFill>
+                      <a:prstDash val="solid"/>
+                      <a:round/>
+                      <a:headEnd type="none" w="med" len="med"/>
+                      <a:tailEnd type="none" w="med" len="med"/>
+                    </a:lnT>
+                    <a:lnB w="9525" cap="flat" cmpd="sng" algn="ctr">
+                      <a:solidFill>
+                        <a:schemeClr val="bg1"/>
+                      </a:solidFill>
+                      <a:prstDash val="solid"/>
+                      <a:round/>
+                      <a:headEnd type="none" w="med" len="med"/>
+                      <a:tailEnd type="none" w="med" len="med"/>
+                    </a:lnB>
+                    <a:noFill/>
+                  </a:tcPr>
+                </a:tc>
+                <a:tc>
+                  <a:txBody>
+                    <a:bodyPr/>
+                    <a:lstStyle/>
+                    <a:p>
+                      <a:pPr>
+                        <a:buNone/>
+                      </a:pPr>
+                      <a:r>
+                        <a:rPr lang="en-US" sz="1800" b="1">
+                          <a:effectLst/>
+                          <a:latin typeface="Google Sans Text"/>
+                        </a:rPr>
+                        <a:t>Product Name (Text)</a:t>
+                      </a:r>
+                      <a:endParaRPr lang="en-US" sz="1800">
+                        <a:effectLst/>
+                        <a:latin typeface="Google Sans Text"/>
+                      </a:endParaRPr>
+                    </a:p>
+                  </a:txBody>
+                  <a:tcPr anchor="ctr">
+                    <a:lnL w="9525" cap="flat" cmpd="sng" algn="ctr">
+                      <a:solidFill>
+                        <a:schemeClr val="bg1"/>
+                      </a:solidFill>
+                      <a:prstDash val="solid"/>
+                      <a:round/>
+                      <a:headEnd type="none" w="med" len="med"/>
+                      <a:tailEnd type="none" w="med" len="med"/>
+                    </a:lnL>
+                    <a:lnR w="9525" cap="flat" cmpd="sng" algn="ctr">
+                      <a:solidFill>
+                        <a:schemeClr val="bg1"/>
+                      </a:solidFill>
+                      <a:prstDash val="solid"/>
+                      <a:round/>
+                      <a:headEnd type="none" w="med" len="med"/>
+                      <a:tailEnd type="none" w="med" len="med"/>
+                    </a:lnR>
+                    <a:lnT w="9525" cap="flat" cmpd="sng" algn="ctr">
+                      <a:solidFill>
+                        <a:schemeClr val="bg1"/>
+                      </a:solidFill>
+                      <a:prstDash val="solid"/>
+                      <a:round/>
+                      <a:headEnd type="none" w="med" len="med"/>
+                      <a:tailEnd type="none" w="med" len="med"/>
+                    </a:lnT>
+                    <a:lnB w="9525" cap="flat" cmpd="sng" algn="ctr">
+                      <a:solidFill>
+                        <a:schemeClr val="bg1"/>
+                      </a:solidFill>
+                      <a:prstDash val="solid"/>
+                      <a:round/>
+                      <a:headEnd type="none" w="med" len="med"/>
+                      <a:tailEnd type="none" w="med" len="med"/>
+                    </a:lnB>
+                    <a:noFill/>
+                  </a:tcPr>
+                </a:tc>
+                <a:tc>
+                  <a:txBody>
+                    <a:bodyPr/>
+                    <a:lstStyle/>
+                    <a:p>
+                      <a:pPr>
+                        <a:buNone/>
+                      </a:pPr>
+                      <a:r>
+                        <a:rPr lang="en-US" sz="1800" b="1">
+                          <a:effectLst/>
+                          <a:latin typeface="Google Sans Text"/>
+                        </a:rPr>
+                        <a:t>Unit Price (Number)</a:t>
+                      </a:r>
+                      <a:endParaRPr lang="en-US" sz="1800">
+                        <a:effectLst/>
+                        <a:latin typeface="Google Sans Text"/>
+                      </a:endParaRPr>
+                    </a:p>
+                  </a:txBody>
+                  <a:tcPr anchor="ctr">
+                    <a:lnL w="9525" cap="flat" cmpd="sng" algn="ctr">
+                      <a:solidFill>
+                        <a:schemeClr val="bg1"/>
+                      </a:solidFill>
+                      <a:prstDash val="solid"/>
+                      <a:round/>
+                      <a:headEnd type="none" w="med" len="med"/>
+                      <a:tailEnd type="none" w="med" len="med"/>
+                    </a:lnL>
+                    <a:lnR w="9525" cap="flat" cmpd="sng" algn="ctr">
+                      <a:solidFill>
+                        <a:schemeClr val="bg1"/>
+                      </a:solidFill>
+                      <a:prstDash val="solid"/>
+                      <a:round/>
+                      <a:headEnd type="none" w="med" len="med"/>
+                      <a:tailEnd type="none" w="med" len="med"/>
+                    </a:lnR>
+                    <a:lnT w="9525" cap="flat" cmpd="sng" algn="ctr">
+                      <a:solidFill>
+                        <a:schemeClr val="bg1"/>
+                      </a:solidFill>
+                      <a:prstDash val="solid"/>
+                      <a:round/>
+                      <a:headEnd type="none" w="med" len="med"/>
+                      <a:tailEnd type="none" w="med" len="med"/>
+                    </a:lnT>
+                    <a:lnB w="9525" cap="flat" cmpd="sng" algn="ctr">
+                      <a:solidFill>
+                        <a:schemeClr val="bg1"/>
+                      </a:solidFill>
+                      <a:prstDash val="solid"/>
+                      <a:round/>
+                      <a:headEnd type="none" w="med" len="med"/>
+                      <a:tailEnd type="none" w="med" len="med"/>
+                    </a:lnB>
+                    <a:noFill/>
+                  </a:tcPr>
+                </a:tc>
+                <a:tc>
+                  <a:txBody>
+                    <a:bodyPr/>
+                    <a:lstStyle/>
+                    <a:p>
+                      <a:pPr>
+                        <a:buNone/>
+                      </a:pPr>
+                      <a:r>
+                        <a:rPr lang="en-US" sz="1800" b="1">
+                          <a:effectLst/>
+                          <a:latin typeface="Google Sans Text"/>
+                        </a:rPr>
+                        <a:t>Qty (Number)</a:t>
+                      </a:r>
+                      <a:endParaRPr lang="en-US" sz="1800">
+                        <a:effectLst/>
+                        <a:latin typeface="Google Sans Text"/>
+                      </a:endParaRPr>
+                    </a:p>
+                  </a:txBody>
+                  <a:tcPr anchor="ctr">
+                    <a:lnL w="9525" cap="flat" cmpd="sng" algn="ctr">
+                      <a:solidFill>
+                        <a:schemeClr val="bg1"/>
+                      </a:solidFill>
+                      <a:prstDash val="solid"/>
+                      <a:round/>
+                      <a:headEnd type="none" w="med" len="med"/>
+                      <a:tailEnd type="none" w="med" len="med"/>
+                    </a:lnL>
+                    <a:lnR w="9525" cap="flat" cmpd="sng" algn="ctr">
+                      <a:solidFill>
+                        <a:schemeClr val="bg1"/>
+                      </a:solidFill>
+                      <a:prstDash val="solid"/>
+                      <a:round/>
+                      <a:headEnd type="none" w="med" len="med"/>
+                      <a:tailEnd type="none" w="med" len="med"/>
+                    </a:lnR>
+                    <a:lnT w="9525" cap="flat" cmpd="sng" algn="ctr">
+                      <a:solidFill>
+                        <a:schemeClr val="bg1"/>
+                      </a:solidFill>
+                      <a:prstDash val="solid"/>
+                      <a:round/>
+                      <a:headEnd type="none" w="med" len="med"/>
+                      <a:tailEnd type="none" w="med" len="med"/>
+                    </a:lnT>
+                    <a:lnB w="9525" cap="flat" cmpd="sng" algn="ctr">
+                      <a:solidFill>
+                        <a:schemeClr val="bg1"/>
+                      </a:solidFill>
+                      <a:prstDash val="solid"/>
+                      <a:round/>
+                      <a:headEnd type="none" w="med" len="med"/>
+                      <a:tailEnd type="none" w="med" len="med"/>
+                    </a:lnB>
+                    <a:noFill/>
+                  </a:tcPr>
+                </a:tc>
+                <a:tc>
+                  <a:txBody>
+                    <a:bodyPr/>
+                    <a:lstStyle/>
+                    <a:p>
+                      <a:pPr>
+                        <a:buNone/>
+                      </a:pPr>
+                      <a:r>
+                        <a:rPr lang="en-US" sz="1800" b="1">
+                          <a:effectLst/>
+                          <a:latin typeface="Google Sans Text"/>
+                        </a:rPr>
+                        <a:t>Total (Formula)</a:t>
+                      </a:r>
+                      <a:endParaRPr lang="en-US" sz="1800">
+                        <a:effectLst/>
+                        <a:latin typeface="Google Sans Text"/>
+                      </a:endParaRPr>
+                    </a:p>
+                  </a:txBody>
+                  <a:tcPr anchor="ctr">
+                    <a:lnL w="9525" cap="flat" cmpd="sng" algn="ctr">
+                      <a:solidFill>
+                        <a:schemeClr val="bg1"/>
+                      </a:solidFill>
+                      <a:prstDash val="solid"/>
+                      <a:round/>
+                      <a:headEnd type="none" w="med" len="med"/>
+                      <a:tailEnd type="none" w="med" len="med"/>
+                    </a:lnL>
+                    <a:lnR w="9525" cap="flat" cmpd="sng" algn="ctr">
+                      <a:solidFill>
+                        <a:schemeClr val="bg1"/>
+                      </a:solidFill>
+                      <a:prstDash val="solid"/>
+                      <a:round/>
+                      <a:headEnd type="none" w="med" len="med"/>
+                      <a:tailEnd type="none" w="med" len="med"/>
+                    </a:lnR>
+                    <a:lnT w="9525" cap="flat" cmpd="sng" algn="ctr">
+                      <a:solidFill>
+                        <a:schemeClr val="bg1"/>
+                      </a:solidFill>
+                      <a:prstDash val="solid"/>
+                      <a:round/>
+                      <a:headEnd type="none" w="med" len="med"/>
+                      <a:tailEnd type="none" w="med" len="med"/>
+                    </a:lnT>
+                    <a:lnB w="9525" cap="flat" cmpd="sng" algn="ctr">
+                      <a:solidFill>
+                        <a:schemeClr val="bg1"/>
+                      </a:solidFill>
+                      <a:prstDash val="solid"/>
+                      <a:round/>
+                      <a:headEnd type="none" w="med" len="med"/>
+                      <a:tailEnd type="none" w="med" len="med"/>
+                    </a:lnB>
+                    <a:noFill/>
+                  </a:tcPr>
+                </a:tc>
+                <a:tc>
+                  <a:txBody>
+                    <a:bodyPr/>
+                    <a:lstStyle/>
+                    <a:p>
+                      <a:pPr>
+                        <a:buNone/>
+                      </a:pPr>
+                      <a:r>
+                        <a:rPr lang="en-US" sz="1800" b="1">
+                          <a:effectLst/>
+                          <a:latin typeface="Google Sans Text"/>
+                        </a:rPr>
+                        <a:t>Membership (Logical)</a:t>
+                      </a:r>
+                      <a:endParaRPr lang="en-US" sz="1800">
+                        <a:effectLst/>
+                        <a:latin typeface="Google Sans Text"/>
+                      </a:endParaRPr>
+                    </a:p>
+                  </a:txBody>
+                  <a:tcPr anchor="ctr">
+                    <a:lnL w="9525" cap="flat" cmpd="sng" algn="ctr">
+                      <a:solidFill>
+                        <a:schemeClr val="bg1"/>
+                      </a:solidFill>
+                      <a:prstDash val="solid"/>
+                      <a:round/>
+                      <a:headEnd type="none" w="med" len="med"/>
+                      <a:tailEnd type="none" w="med" len="med"/>
+                    </a:lnL>
+                    <a:lnR w="9525" cap="flat" cmpd="sng" algn="ctr">
+                      <a:solidFill>
+                        <a:schemeClr val="bg1"/>
+                      </a:solidFill>
+                      <a:prstDash val="solid"/>
+                      <a:round/>
+                      <a:headEnd type="none" w="med" len="med"/>
+                      <a:tailEnd type="none" w="med" len="med"/>
+                    </a:lnR>
+                    <a:lnT w="9525" cap="flat" cmpd="sng" algn="ctr">
+                      <a:solidFill>
+                        <a:schemeClr val="bg1"/>
+                      </a:solidFill>
+                      <a:prstDash val="solid"/>
+                      <a:round/>
+                      <a:headEnd type="none" w="med" len="med"/>
+                      <a:tailEnd type="none" w="med" len="med"/>
+                    </a:lnT>
+                    <a:lnB w="9525" cap="flat" cmpd="sng" algn="ctr">
+                      <a:solidFill>
+                        <a:schemeClr val="bg1"/>
+                      </a:solidFill>
+                      <a:prstDash val="solid"/>
+                      <a:round/>
+                      <a:headEnd type="none" w="med" len="med"/>
+                      <a:tailEnd type="none" w="med" len="med"/>
+                    </a:lnB>
+                    <a:noFill/>
+                  </a:tcPr>
+                </a:tc>
+                <a:extLst>
+                  <a:ext uri="{0D108BD9-81ED-4DB2-BD59-A6C34878D82A}">
+                    <a16:rowId xmlns:a16="http://schemas.microsoft.com/office/drawing/2014/main" val="383281898"/>
+                  </a:ext>
+                </a:extLst>
+              </a:tr>
+              <a:tr h="365760">
+                <a:tc>
+                  <a:txBody>
+                    <a:bodyPr/>
+                    <a:lstStyle/>
+                    <a:p>
+                      <a:pPr>
+                        <a:buNone/>
+                      </a:pPr>
+                      <a:r>
+                        <a:rPr lang="en-US" sz="1800">
+                          <a:effectLst/>
+                          <a:latin typeface="Google Sans Text"/>
+                        </a:rPr>
+                        <a:t>2026-03-01</a:t>
+                      </a:r>
+                    </a:p>
+                  </a:txBody>
+                  <a:tcPr anchor="ctr">
+                    <a:lnL w="9525" cap="flat" cmpd="sng" algn="ctr">
+                      <a:solidFill>
+                        <a:schemeClr val="bg1"/>
+                      </a:solidFill>
+                      <a:prstDash val="solid"/>
+                      <a:round/>
+                      <a:headEnd type="none" w="med" len="med"/>
+                      <a:tailEnd type="none" w="med" len="med"/>
+                    </a:lnL>
+                    <a:lnR w="9525" cap="flat" cmpd="sng" algn="ctr">
+                      <a:solidFill>
+                        <a:schemeClr val="bg1"/>
+                      </a:solidFill>
+                      <a:prstDash val="solid"/>
+                      <a:round/>
+                      <a:headEnd type="none" w="med" len="med"/>
+                      <a:tailEnd type="none" w="med" len="med"/>
+                    </a:lnR>
+                    <a:lnT w="9525" cap="flat" cmpd="sng" algn="ctr">
+                      <a:solidFill>
+                        <a:schemeClr val="bg1"/>
+                      </a:solidFill>
+                      <a:prstDash val="solid"/>
+                      <a:round/>
+                      <a:headEnd type="none" w="med" len="med"/>
+                      <a:tailEnd type="none" w="med" len="med"/>
+                    </a:lnT>
+                    <a:lnB w="9525" cap="flat" cmpd="sng" algn="ctr">
+                      <a:solidFill>
+                        <a:schemeClr val="bg1"/>
+                      </a:solidFill>
+                      <a:prstDash val="solid"/>
+                      <a:round/>
+                      <a:headEnd type="none" w="med" len="med"/>
+                      <a:tailEnd type="none" w="med" len="med"/>
+                    </a:lnB>
+                    <a:noFill/>
+                  </a:tcPr>
+                </a:tc>
+                <a:tc>
+                  <a:txBody>
+                    <a:bodyPr/>
+                    <a:lstStyle/>
+                    <a:p>
+                      <a:pPr>
+                        <a:buNone/>
+                      </a:pPr>
+                      <a:r>
+                        <a:rPr lang="en-US" sz="1800">
+                          <a:effectLst/>
+                          <a:latin typeface="Google Sans Text"/>
+                        </a:rPr>
+                        <a:t>'001</a:t>
+                      </a:r>
+                    </a:p>
+                  </a:txBody>
+                  <a:tcPr anchor="ctr">
+                    <a:lnL w="9525" cap="flat" cmpd="sng" algn="ctr">
+                      <a:solidFill>
+                        <a:schemeClr val="bg1"/>
+                      </a:solidFill>
+                      <a:prstDash val="solid"/>
+                      <a:round/>
+                      <a:headEnd type="none" w="med" len="med"/>
+                      <a:tailEnd type="none" w="med" len="med"/>
+                    </a:lnL>
+                    <a:lnR w="9525" cap="flat" cmpd="sng" algn="ctr">
+                      <a:solidFill>
+                        <a:schemeClr val="bg1"/>
+                      </a:solidFill>
+                      <a:prstDash val="solid"/>
+                      <a:round/>
+                      <a:headEnd type="none" w="med" len="med"/>
+                      <a:tailEnd type="none" w="med" len="med"/>
+                    </a:lnR>
+                    <a:lnT w="9525" cap="flat" cmpd="sng" algn="ctr">
+                      <a:solidFill>
+                        <a:schemeClr val="bg1"/>
+                      </a:solidFill>
+                      <a:prstDash val="solid"/>
+                      <a:round/>
+                      <a:headEnd type="none" w="med" len="med"/>
+                      <a:tailEnd type="none" w="med" len="med"/>
+                    </a:lnT>
+                    <a:lnB w="9525" cap="flat" cmpd="sng" algn="ctr">
+                      <a:solidFill>
+                        <a:schemeClr val="bg1"/>
+                      </a:solidFill>
+                      <a:prstDash val="solid"/>
+                      <a:round/>
+                      <a:headEnd type="none" w="med" len="med"/>
+                      <a:tailEnd type="none" w="med" len="med"/>
+                    </a:lnB>
+                    <a:noFill/>
+                  </a:tcPr>
+                </a:tc>
+                <a:tc>
+                  <a:txBody>
+                    <a:bodyPr/>
+                    <a:lstStyle/>
+                    <a:p>
+                      <a:pPr>
+                        <a:buNone/>
+                      </a:pPr>
+                      <a:r>
+                        <a:rPr lang="en-US" sz="1800">
+                          <a:effectLst/>
+                          <a:latin typeface="Google Sans Text"/>
+                        </a:rPr>
+                        <a:t>Laptop</a:t>
+                      </a:r>
+                    </a:p>
+                  </a:txBody>
+                  <a:tcPr anchor="ctr">
+                    <a:lnL w="9525" cap="flat" cmpd="sng" algn="ctr">
+                      <a:solidFill>
+                        <a:schemeClr val="bg1"/>
+                      </a:solidFill>
+                      <a:prstDash val="solid"/>
+                      <a:round/>
+                      <a:headEnd type="none" w="med" len="med"/>
+                      <a:tailEnd type="none" w="med" len="med"/>
+                    </a:lnL>
+                    <a:lnR w="9525" cap="flat" cmpd="sng" algn="ctr">
+                      <a:solidFill>
+                        <a:schemeClr val="bg1"/>
+                      </a:solidFill>
+                      <a:prstDash val="solid"/>
+                      <a:round/>
+                      <a:headEnd type="none" w="med" len="med"/>
+                      <a:tailEnd type="none" w="med" len="med"/>
+                    </a:lnR>
+                    <a:lnT w="9525" cap="flat" cmpd="sng" algn="ctr">
+                      <a:solidFill>
+                        <a:schemeClr val="bg1"/>
+                      </a:solidFill>
+                      <a:prstDash val="solid"/>
+                      <a:round/>
+                      <a:headEnd type="none" w="med" len="med"/>
+                      <a:tailEnd type="none" w="med" len="med"/>
+                    </a:lnT>
+                    <a:lnB w="9525" cap="flat" cmpd="sng" algn="ctr">
+                      <a:solidFill>
+                        <a:schemeClr val="bg1"/>
+                      </a:solidFill>
+                      <a:prstDash val="solid"/>
+                      <a:round/>
+                      <a:headEnd type="none" w="med" len="med"/>
+                      <a:tailEnd type="none" w="med" len="med"/>
+                    </a:lnB>
+                    <a:noFill/>
+                  </a:tcPr>
+                </a:tc>
+                <a:tc>
+                  <a:txBody>
+                    <a:bodyPr/>
+                    <a:lstStyle/>
+                    <a:p>
+                      <a:pPr>
+                        <a:buNone/>
+                      </a:pPr>
+                      <a:r>
+                        <a:rPr lang="en-US" sz="1800">
+                          <a:effectLst/>
+                          <a:latin typeface="Google Sans Text"/>
+                        </a:rPr>
+                        <a:t>25000</a:t>
+                      </a:r>
+                    </a:p>
+                  </a:txBody>
+                  <a:tcPr anchor="ctr">
+                    <a:lnL w="9525" cap="flat" cmpd="sng" algn="ctr">
+                      <a:solidFill>
+                        <a:schemeClr val="bg1"/>
+                      </a:solidFill>
+                      <a:prstDash val="solid"/>
+                      <a:round/>
+                      <a:headEnd type="none" w="med" len="med"/>
+                      <a:tailEnd type="none" w="med" len="med"/>
+                    </a:lnL>
+                    <a:lnR w="9525" cap="flat" cmpd="sng" algn="ctr">
+                      <a:solidFill>
+                        <a:schemeClr val="bg1"/>
+                      </a:solidFill>
+                      <a:prstDash val="solid"/>
+                      <a:round/>
+                      <a:headEnd type="none" w="med" len="med"/>
+                      <a:tailEnd type="none" w="med" len="med"/>
+                    </a:lnR>
+                    <a:lnT w="9525" cap="flat" cmpd="sng" algn="ctr">
+                      <a:solidFill>
+                        <a:schemeClr val="bg1"/>
+                      </a:solidFill>
+                      <a:prstDash val="solid"/>
+                      <a:round/>
+                      <a:headEnd type="none" w="med" len="med"/>
+                      <a:tailEnd type="none" w="med" len="med"/>
+                    </a:lnT>
+                    <a:lnB w="9525" cap="flat" cmpd="sng" algn="ctr">
+                      <a:solidFill>
+                        <a:schemeClr val="bg1"/>
+                      </a:solidFill>
+                      <a:prstDash val="solid"/>
+                      <a:round/>
+                      <a:headEnd type="none" w="med" len="med"/>
+                      <a:tailEnd type="none" w="med" len="med"/>
+                    </a:lnB>
+                    <a:noFill/>
+                  </a:tcPr>
+                </a:tc>
+                <a:tc>
+                  <a:txBody>
+                    <a:bodyPr/>
+                    <a:lstStyle/>
+                    <a:p>
+                      <a:pPr>
+                        <a:buNone/>
+                      </a:pPr>
+                      <a:r>
+                        <a:rPr lang="en-US" sz="1800">
+                          <a:effectLst/>
+                          <a:latin typeface="Google Sans Text"/>
+                        </a:rPr>
+                        <a:t>2</a:t>
+                      </a:r>
+                    </a:p>
+                  </a:txBody>
+                  <a:tcPr anchor="ctr">
+                    <a:lnL w="9525" cap="flat" cmpd="sng" algn="ctr">
+                      <a:solidFill>
+                        <a:schemeClr val="bg1"/>
+                      </a:solidFill>
+                      <a:prstDash val="solid"/>
+                      <a:round/>
+                      <a:headEnd type="none" w="med" len="med"/>
+                      <a:tailEnd type="none" w="med" len="med"/>
+                    </a:lnL>
+                    <a:lnR w="9525" cap="flat" cmpd="sng" algn="ctr">
+                      <a:solidFill>
+                        <a:schemeClr val="bg1"/>
+                      </a:solidFill>
+                      <a:prstDash val="solid"/>
+                      <a:round/>
+                      <a:headEnd type="none" w="med" len="med"/>
+                      <a:tailEnd type="none" w="med" len="med"/>
+                    </a:lnR>
+                    <a:lnT w="9525" cap="flat" cmpd="sng" algn="ctr">
+                      <a:solidFill>
+                        <a:schemeClr val="bg1"/>
+                      </a:solidFill>
+                      <a:prstDash val="solid"/>
+                      <a:round/>
+                      <a:headEnd type="none" w="med" len="med"/>
+                      <a:tailEnd type="none" w="med" len="med"/>
+                    </a:lnT>
+                    <a:lnB w="9525" cap="flat" cmpd="sng" algn="ctr">
+                      <a:solidFill>
+                        <a:schemeClr val="bg1"/>
+                      </a:solidFill>
+                      <a:prstDash val="solid"/>
+                      <a:round/>
+                      <a:headEnd type="none" w="med" len="med"/>
+                      <a:tailEnd type="none" w="med" len="med"/>
+                    </a:lnB>
+                    <a:noFill/>
+                  </a:tcPr>
+                </a:tc>
+                <a:tc>
+                  <a:txBody>
+                    <a:bodyPr/>
+                    <a:lstStyle/>
+                    <a:p>
+                      <a:pPr>
+                        <a:buNone/>
+                      </a:pPr>
+                      <a:r>
+                        <a:rPr lang="en-US" sz="1800">
+                          <a:effectLst/>
+                          <a:latin typeface="Google Sans Text"/>
+                        </a:rPr>
+                        <a:t>=D2*E2</a:t>
+                      </a:r>
+                    </a:p>
+                  </a:txBody>
+                  <a:tcPr anchor="ctr">
+                    <a:lnL w="9525" cap="flat" cmpd="sng" algn="ctr">
+                      <a:solidFill>
+                        <a:schemeClr val="bg1"/>
+                      </a:solidFill>
+                      <a:prstDash val="solid"/>
+                      <a:round/>
+                      <a:headEnd type="none" w="med" len="med"/>
+                      <a:tailEnd type="none" w="med" len="med"/>
+                    </a:lnL>
+                    <a:lnR w="9525" cap="flat" cmpd="sng" algn="ctr">
+                      <a:solidFill>
+                        <a:schemeClr val="bg1"/>
+                      </a:solidFill>
+                      <a:prstDash val="solid"/>
+                      <a:round/>
+                      <a:headEnd type="none" w="med" len="med"/>
+                      <a:tailEnd type="none" w="med" len="med"/>
+                    </a:lnR>
+                    <a:lnT w="9525" cap="flat" cmpd="sng" algn="ctr">
+                      <a:solidFill>
+                        <a:schemeClr val="bg1"/>
+                      </a:solidFill>
+                      <a:prstDash val="solid"/>
+                      <a:round/>
+                      <a:headEnd type="none" w="med" len="med"/>
+                      <a:tailEnd type="none" w="med" len="med"/>
+                    </a:lnT>
+                    <a:lnB w="9525" cap="flat" cmpd="sng" algn="ctr">
+                      <a:solidFill>
+                        <a:schemeClr val="bg1"/>
+                      </a:solidFill>
+                      <a:prstDash val="solid"/>
+                      <a:round/>
+                      <a:headEnd type="none" w="med" len="med"/>
+                      <a:tailEnd type="none" w="med" len="med"/>
+                    </a:lnB>
+                    <a:noFill/>
+                  </a:tcPr>
+                </a:tc>
+                <a:tc>
+                  <a:txBody>
+                    <a:bodyPr/>
+                    <a:lstStyle/>
+                    <a:p>
+                      <a:pPr>
+                        <a:buNone/>
+                      </a:pPr>
+                      <a:r>
+                        <a:rPr lang="en-US" sz="1800">
+                          <a:effectLst/>
+                          <a:latin typeface="Google Sans Text"/>
+                        </a:rPr>
+                        <a:t>TRUE</a:t>
+                      </a:r>
+                    </a:p>
+                  </a:txBody>
+                  <a:tcPr anchor="ctr">
+                    <a:lnL w="9525" cap="flat" cmpd="sng" algn="ctr">
+                      <a:solidFill>
+                        <a:schemeClr val="bg1"/>
+                      </a:solidFill>
+                      <a:prstDash val="solid"/>
+                      <a:round/>
+                      <a:headEnd type="none" w="med" len="med"/>
+                      <a:tailEnd type="none" w="med" len="med"/>
+                    </a:lnL>
+                    <a:lnR w="9525" cap="flat" cmpd="sng" algn="ctr">
+                      <a:solidFill>
+                        <a:schemeClr val="bg1"/>
+                      </a:solidFill>
+                      <a:prstDash val="solid"/>
+                      <a:round/>
+                      <a:headEnd type="none" w="med" len="med"/>
+                      <a:tailEnd type="none" w="med" len="med"/>
+                    </a:lnR>
+                    <a:lnT w="9525" cap="flat" cmpd="sng" algn="ctr">
+                      <a:solidFill>
+                        <a:schemeClr val="bg1"/>
+                      </a:solidFill>
+                      <a:prstDash val="solid"/>
+                      <a:round/>
+                      <a:headEnd type="none" w="med" len="med"/>
+                      <a:tailEnd type="none" w="med" len="med"/>
+                    </a:lnT>
+                    <a:lnB w="9525" cap="flat" cmpd="sng" algn="ctr">
+                      <a:solidFill>
+                        <a:schemeClr val="bg1"/>
+                      </a:solidFill>
+                      <a:prstDash val="solid"/>
+                      <a:round/>
+                      <a:headEnd type="none" w="med" len="med"/>
+                      <a:tailEnd type="none" w="med" len="med"/>
+                    </a:lnB>
+                    <a:noFill/>
+                  </a:tcPr>
+                </a:tc>
+                <a:extLst>
+                  <a:ext uri="{0D108BD9-81ED-4DB2-BD59-A6C34878D82A}">
+                    <a16:rowId xmlns:a16="http://schemas.microsoft.com/office/drawing/2014/main" val="2095987811"/>
+                  </a:ext>
+                </a:extLst>
+              </a:tr>
+              <a:tr h="365760">
+                <a:tc>
+                  <a:txBody>
+                    <a:bodyPr/>
+                    <a:lstStyle/>
+                    <a:p>
+                      <a:pPr>
+                        <a:buNone/>
+                      </a:pPr>
+                      <a:r>
+                        <a:rPr lang="en-US" sz="1800">
+                          <a:effectLst/>
+                          <a:latin typeface="Google Sans Text"/>
+                        </a:rPr>
+                        <a:t>2026-03-02</a:t>
+                      </a:r>
+                    </a:p>
+                  </a:txBody>
+                  <a:tcPr anchor="ctr">
+                    <a:lnL w="9525" cap="flat" cmpd="sng" algn="ctr">
+                      <a:solidFill>
+                        <a:schemeClr val="bg1"/>
+                      </a:solidFill>
+                      <a:prstDash val="solid"/>
+                      <a:round/>
+                      <a:headEnd type="none" w="med" len="med"/>
+                      <a:tailEnd type="none" w="med" len="med"/>
+                    </a:lnL>
+                    <a:lnR w="9525" cap="flat" cmpd="sng" algn="ctr">
+                      <a:solidFill>
+                        <a:schemeClr val="bg1"/>
+                      </a:solidFill>
+                      <a:prstDash val="solid"/>
+                      <a:round/>
+                      <a:headEnd type="none" w="med" len="med"/>
+                      <a:tailEnd type="none" w="med" len="med"/>
+                    </a:lnR>
+                    <a:lnT w="9525" cap="flat" cmpd="sng" algn="ctr">
+                      <a:solidFill>
+                        <a:schemeClr val="bg1"/>
+                      </a:solidFill>
+                      <a:prstDash val="solid"/>
+                      <a:round/>
+                      <a:headEnd type="none" w="med" len="med"/>
+                      <a:tailEnd type="none" w="med" len="med"/>
+                    </a:lnT>
+                    <a:lnB w="9525" cap="flat" cmpd="sng" algn="ctr">
+                      <a:solidFill>
+                        <a:schemeClr val="bg1"/>
+                      </a:solidFill>
+                      <a:prstDash val="solid"/>
+                      <a:round/>
+                      <a:headEnd type="none" w="med" len="med"/>
+                      <a:tailEnd type="none" w="med" len="med"/>
+                    </a:lnB>
+                    <a:noFill/>
+                  </a:tcPr>
+                </a:tc>
+                <a:tc>
+                  <a:txBody>
+                    <a:bodyPr/>
+                    <a:lstStyle/>
+                    <a:p>
+                      <a:pPr>
+                        <a:buNone/>
+                      </a:pPr>
+                      <a:r>
+                        <a:rPr lang="en-US" sz="1800">
+                          <a:effectLst/>
+                          <a:latin typeface="Google Sans Text"/>
+                        </a:rPr>
+                        <a:t>'002</a:t>
+                      </a:r>
+                    </a:p>
+                  </a:txBody>
+                  <a:tcPr anchor="ctr">
+                    <a:lnL w="9525" cap="flat" cmpd="sng" algn="ctr">
+                      <a:solidFill>
+                        <a:schemeClr val="bg1"/>
+                      </a:solidFill>
+                      <a:prstDash val="solid"/>
+                      <a:round/>
+                      <a:headEnd type="none" w="med" len="med"/>
+                      <a:tailEnd type="none" w="med" len="med"/>
+                    </a:lnL>
+                    <a:lnR w="9525" cap="flat" cmpd="sng" algn="ctr">
+                      <a:solidFill>
+                        <a:schemeClr val="bg1"/>
+                      </a:solidFill>
+                      <a:prstDash val="solid"/>
+                      <a:round/>
+                      <a:headEnd type="none" w="med" len="med"/>
+                      <a:tailEnd type="none" w="med" len="med"/>
+                    </a:lnR>
+                    <a:lnT w="9525" cap="flat" cmpd="sng" algn="ctr">
+                      <a:solidFill>
+                        <a:schemeClr val="bg1"/>
+                      </a:solidFill>
+                      <a:prstDash val="solid"/>
+                      <a:round/>
+                      <a:headEnd type="none" w="med" len="med"/>
+                      <a:tailEnd type="none" w="med" len="med"/>
+                    </a:lnT>
+                    <a:lnB w="9525" cap="flat" cmpd="sng" algn="ctr">
+                      <a:solidFill>
+                        <a:schemeClr val="bg1"/>
+                      </a:solidFill>
+                      <a:prstDash val="solid"/>
+                      <a:round/>
+                      <a:headEnd type="none" w="med" len="med"/>
+                      <a:tailEnd type="none" w="med" len="med"/>
+                    </a:lnB>
+                    <a:noFill/>
+                  </a:tcPr>
+                </a:tc>
+                <a:tc>
+                  <a:txBody>
+                    <a:bodyPr/>
+                    <a:lstStyle/>
+                    <a:p>
+                      <a:pPr>
+                        <a:buNone/>
+                      </a:pPr>
+                      <a:r>
+                        <a:rPr lang="en-US" sz="1800">
+                          <a:effectLst/>
+                          <a:latin typeface="Google Sans Text"/>
+                        </a:rPr>
+                        <a:t>Mouse</a:t>
+                      </a:r>
+                    </a:p>
+                  </a:txBody>
+                  <a:tcPr anchor="ctr">
+                    <a:lnL w="9525" cap="flat" cmpd="sng" algn="ctr">
+                      <a:solidFill>
+                        <a:schemeClr val="bg1"/>
+                      </a:solidFill>
+                      <a:prstDash val="solid"/>
+                      <a:round/>
+                      <a:headEnd type="none" w="med" len="med"/>
+                      <a:tailEnd type="none" w="med" len="med"/>
+                    </a:lnL>
+                    <a:lnR w="9525" cap="flat" cmpd="sng" algn="ctr">
+                      <a:solidFill>
+                        <a:schemeClr val="bg1"/>
+                      </a:solidFill>
+                      <a:prstDash val="solid"/>
+                      <a:round/>
+                      <a:headEnd type="none" w="med" len="med"/>
+                      <a:tailEnd type="none" w="med" len="med"/>
+                    </a:lnR>
+                    <a:lnT w="9525" cap="flat" cmpd="sng" algn="ctr">
+                      <a:solidFill>
+                        <a:schemeClr val="bg1"/>
+                      </a:solidFill>
+                      <a:prstDash val="solid"/>
+                      <a:round/>
+                      <a:headEnd type="none" w="med" len="med"/>
+                      <a:tailEnd type="none" w="med" len="med"/>
+                    </a:lnT>
+                    <a:lnB w="9525" cap="flat" cmpd="sng" algn="ctr">
+                      <a:solidFill>
+                        <a:schemeClr val="bg1"/>
+                      </a:solidFill>
+                      <a:prstDash val="solid"/>
+                      <a:round/>
+                      <a:headEnd type="none" w="med" len="med"/>
+                      <a:tailEnd type="none" w="med" len="med"/>
+                    </a:lnB>
+                    <a:noFill/>
+                  </a:tcPr>
+                </a:tc>
+                <a:tc>
+                  <a:txBody>
+                    <a:bodyPr/>
+                    <a:lstStyle/>
+                    <a:p>
+                      <a:pPr>
+                        <a:buNone/>
+                      </a:pPr>
+                      <a:r>
+                        <a:rPr lang="en-US" sz="1800">
+                          <a:effectLst/>
+                          <a:latin typeface="Google Sans Text"/>
+                        </a:rPr>
+                        <a:t>550.50</a:t>
+                      </a:r>
+                    </a:p>
+                  </a:txBody>
+                  <a:tcPr anchor="ctr">
+                    <a:lnL w="9525" cap="flat" cmpd="sng" algn="ctr">
+                      <a:solidFill>
+                        <a:schemeClr val="bg1"/>
+                      </a:solidFill>
+                      <a:prstDash val="solid"/>
+                      <a:round/>
+                      <a:headEnd type="none" w="med" len="med"/>
+                      <a:tailEnd type="none" w="med" len="med"/>
+                    </a:lnL>
+                    <a:lnR w="9525" cap="flat" cmpd="sng" algn="ctr">
+                      <a:solidFill>
+                        <a:schemeClr val="bg1"/>
+                      </a:solidFill>
+                      <a:prstDash val="solid"/>
+                      <a:round/>
+                      <a:headEnd type="none" w="med" len="med"/>
+                      <a:tailEnd type="none" w="med" len="med"/>
+                    </a:lnR>
+                    <a:lnT w="9525" cap="flat" cmpd="sng" algn="ctr">
+                      <a:solidFill>
+                        <a:schemeClr val="bg1"/>
+                      </a:solidFill>
+                      <a:prstDash val="solid"/>
+                      <a:round/>
+                      <a:headEnd type="none" w="med" len="med"/>
+                      <a:tailEnd type="none" w="med" len="med"/>
+                    </a:lnT>
+                    <a:lnB w="9525" cap="flat" cmpd="sng" algn="ctr">
+                      <a:solidFill>
+                        <a:schemeClr val="bg1"/>
+                      </a:solidFill>
+                      <a:prstDash val="solid"/>
+                      <a:round/>
+                      <a:headEnd type="none" w="med" len="med"/>
+                      <a:tailEnd type="none" w="med" len="med"/>
+                    </a:lnB>
+                    <a:noFill/>
+                  </a:tcPr>
+                </a:tc>
+                <a:tc>
+                  <a:txBody>
+                    <a:bodyPr/>
+                    <a:lstStyle/>
+                    <a:p>
+                      <a:pPr>
+                        <a:buNone/>
+                      </a:pPr>
+                      <a:r>
+                        <a:rPr lang="en-US" sz="1800">
+                          <a:effectLst/>
+                          <a:latin typeface="Google Sans Text"/>
+                        </a:rPr>
+                        <a:t>10</a:t>
+                      </a:r>
+                    </a:p>
+                  </a:txBody>
+                  <a:tcPr anchor="ctr">
+                    <a:lnL w="9525" cap="flat" cmpd="sng" algn="ctr">
+                      <a:solidFill>
+                        <a:schemeClr val="bg1"/>
+                      </a:solidFill>
+                      <a:prstDash val="solid"/>
+                      <a:round/>
+                      <a:headEnd type="none" w="med" len="med"/>
+                      <a:tailEnd type="none" w="med" len="med"/>
+                    </a:lnL>
+                    <a:lnR w="9525" cap="flat" cmpd="sng" algn="ctr">
+                      <a:solidFill>
+                        <a:schemeClr val="bg1"/>
+                      </a:solidFill>
+                      <a:prstDash val="solid"/>
+                      <a:round/>
+                      <a:headEnd type="none" w="med" len="med"/>
+                      <a:tailEnd type="none" w="med" len="med"/>
+                    </a:lnR>
+                    <a:lnT w="9525" cap="flat" cmpd="sng" algn="ctr">
+                      <a:solidFill>
+                        <a:schemeClr val="bg1"/>
+                      </a:solidFill>
+                      <a:prstDash val="solid"/>
+                      <a:round/>
+                      <a:headEnd type="none" w="med" len="med"/>
+                      <a:tailEnd type="none" w="med" len="med"/>
+                    </a:lnT>
+                    <a:lnB w="9525" cap="flat" cmpd="sng" algn="ctr">
+                      <a:solidFill>
+                        <a:schemeClr val="bg1"/>
+                      </a:solidFill>
+                      <a:prstDash val="solid"/>
+                      <a:round/>
+                      <a:headEnd type="none" w="med" len="med"/>
+                      <a:tailEnd type="none" w="med" len="med"/>
+                    </a:lnB>
+                    <a:noFill/>
+                  </a:tcPr>
+                </a:tc>
+                <a:tc>
+                  <a:txBody>
+                    <a:bodyPr/>
+                    <a:lstStyle/>
+                    <a:p>
+                      <a:pPr>
+                        <a:buNone/>
+                      </a:pPr>
+                      <a:r>
+                        <a:rPr lang="en-US" sz="1800">
+                          <a:effectLst/>
+                          <a:latin typeface="Google Sans Text"/>
+                        </a:rPr>
+                        <a:t>=D3*E3</a:t>
+                      </a:r>
+                    </a:p>
+                  </a:txBody>
+                  <a:tcPr anchor="ctr">
+                    <a:lnL w="9525" cap="flat" cmpd="sng" algn="ctr">
+                      <a:solidFill>
+                        <a:schemeClr val="bg1"/>
+                      </a:solidFill>
+                      <a:prstDash val="solid"/>
+                      <a:round/>
+                      <a:headEnd type="none" w="med" len="med"/>
+                      <a:tailEnd type="none" w="med" len="med"/>
+                    </a:lnL>
+                    <a:lnR w="9525" cap="flat" cmpd="sng" algn="ctr">
+                      <a:solidFill>
+                        <a:schemeClr val="bg1"/>
+                      </a:solidFill>
+                      <a:prstDash val="solid"/>
+                      <a:round/>
+                      <a:headEnd type="none" w="med" len="med"/>
+                      <a:tailEnd type="none" w="med" len="med"/>
+                    </a:lnR>
+                    <a:lnT w="9525" cap="flat" cmpd="sng" algn="ctr">
+                      <a:solidFill>
+                        <a:schemeClr val="bg1"/>
+                      </a:solidFill>
+                      <a:prstDash val="solid"/>
+                      <a:round/>
+                      <a:headEnd type="none" w="med" len="med"/>
+                      <a:tailEnd type="none" w="med" len="med"/>
+                    </a:lnT>
+                    <a:lnB w="9525" cap="flat" cmpd="sng" algn="ctr">
+                      <a:solidFill>
+                        <a:schemeClr val="bg1"/>
+                      </a:solidFill>
+                      <a:prstDash val="solid"/>
+                      <a:round/>
+                      <a:headEnd type="none" w="med" len="med"/>
+                      <a:tailEnd type="none" w="med" len="med"/>
+                    </a:lnB>
+                    <a:noFill/>
+                  </a:tcPr>
+                </a:tc>
+                <a:tc>
+                  <a:txBody>
+                    <a:bodyPr/>
+                    <a:lstStyle/>
+                    <a:p>
+                      <a:pPr>
+                        <a:buNone/>
+                      </a:pPr>
+                      <a:r>
+                        <a:rPr lang="en-US" sz="1800">
+                          <a:effectLst/>
+                          <a:latin typeface="Google Sans Text"/>
+                        </a:rPr>
+                        <a:t>FALSE</a:t>
+                      </a:r>
+                    </a:p>
+                  </a:txBody>
+                  <a:tcPr anchor="ctr">
+                    <a:lnL w="9525" cap="flat" cmpd="sng" algn="ctr">
+                      <a:solidFill>
+                        <a:schemeClr val="bg1"/>
+                      </a:solidFill>
+                      <a:prstDash val="solid"/>
+                      <a:round/>
+                      <a:headEnd type="none" w="med" len="med"/>
+                      <a:tailEnd type="none" w="med" len="med"/>
+                    </a:lnL>
+                    <a:lnR w="9525" cap="flat" cmpd="sng" algn="ctr">
+                      <a:solidFill>
+                        <a:schemeClr val="bg1"/>
+                      </a:solidFill>
+                      <a:prstDash val="solid"/>
+                      <a:round/>
+                      <a:headEnd type="none" w="med" len="med"/>
+                      <a:tailEnd type="none" w="med" len="med"/>
+                    </a:lnR>
+                    <a:lnT w="9525" cap="flat" cmpd="sng" algn="ctr">
+                      <a:solidFill>
+                        <a:schemeClr val="bg1"/>
+                      </a:solidFill>
+                      <a:prstDash val="solid"/>
+                      <a:round/>
+                      <a:headEnd type="none" w="med" len="med"/>
+                      <a:tailEnd type="none" w="med" len="med"/>
+                    </a:lnT>
+                    <a:lnB w="9525" cap="flat" cmpd="sng" algn="ctr">
+                      <a:solidFill>
+                        <a:schemeClr val="bg1"/>
+                      </a:solidFill>
+                      <a:prstDash val="solid"/>
+                      <a:round/>
+                      <a:headEnd type="none" w="med" len="med"/>
+                      <a:tailEnd type="none" w="med" len="med"/>
+                    </a:lnB>
+                    <a:noFill/>
+                  </a:tcPr>
+                </a:tc>
+                <a:extLst>
+                  <a:ext uri="{0D108BD9-81ED-4DB2-BD59-A6C34878D82A}">
+                    <a16:rowId xmlns:a16="http://schemas.microsoft.com/office/drawing/2014/main" val="4145453160"/>
+                  </a:ext>
+                </a:extLst>
+              </a:tr>
+              <a:tr h="365760">
+                <a:tc>
+                  <a:txBody>
+                    <a:bodyPr/>
+                    <a:lstStyle/>
+                    <a:p>
+                      <a:pPr>
+                        <a:buNone/>
+                      </a:pPr>
+                      <a:r>
+                        <a:rPr lang="en-US" sz="1800">
+                          <a:effectLst/>
+                          <a:latin typeface="Google Sans Text"/>
+                        </a:rPr>
+                        <a:t>2026-03-02</a:t>
+                      </a:r>
+                    </a:p>
+                  </a:txBody>
+                  <a:tcPr anchor="ctr">
+                    <a:lnL w="9525" cap="flat" cmpd="sng" algn="ctr">
+                      <a:solidFill>
+                        <a:schemeClr val="bg1"/>
+                      </a:solidFill>
+                      <a:prstDash val="solid"/>
+                      <a:round/>
+                      <a:headEnd type="none" w="med" len="med"/>
+                      <a:tailEnd type="none" w="med" len="med"/>
+                    </a:lnL>
+                    <a:lnR w="9525" cap="flat" cmpd="sng" algn="ctr">
+                      <a:solidFill>
+                        <a:schemeClr val="bg1"/>
+                      </a:solidFill>
+                      <a:prstDash val="solid"/>
+                      <a:round/>
+                      <a:headEnd type="none" w="med" len="med"/>
+                      <a:tailEnd type="none" w="med" len="med"/>
+                    </a:lnR>
+                    <a:lnT w="9525" cap="flat" cmpd="sng" algn="ctr">
+                      <a:solidFill>
+                        <a:schemeClr val="bg1"/>
+                      </a:solidFill>
+                      <a:prstDash val="solid"/>
+                      <a:round/>
+                      <a:headEnd type="none" w="med" len="med"/>
+                      <a:tailEnd type="none" w="med" len="med"/>
+                    </a:lnT>
+                    <a:lnB w="9525" cap="flat" cmpd="sng" algn="ctr">
+                      <a:solidFill>
+                        <a:schemeClr val="bg1"/>
+                      </a:solidFill>
+                      <a:prstDash val="solid"/>
+                      <a:round/>
+                      <a:headEnd type="none" w="med" len="med"/>
+                      <a:tailEnd type="none" w="med" len="med"/>
+                    </a:lnB>
+                    <a:noFill/>
+                  </a:tcPr>
+                </a:tc>
+                <a:tc>
+                  <a:txBody>
+                    <a:bodyPr/>
+                    <a:lstStyle/>
+                    <a:p>
+                      <a:pPr>
+                        <a:buNone/>
+                      </a:pPr>
+                      <a:r>
+                        <a:rPr lang="en-US" sz="1800">
+                          <a:effectLst/>
+                          <a:latin typeface="Google Sans Text"/>
+                        </a:rPr>
+                        <a:t>'003</a:t>
+                      </a:r>
+                    </a:p>
+                  </a:txBody>
+                  <a:tcPr anchor="ctr">
+                    <a:lnL w="9525" cap="flat" cmpd="sng" algn="ctr">
+                      <a:solidFill>
+                        <a:schemeClr val="bg1"/>
+                      </a:solidFill>
+                      <a:prstDash val="solid"/>
+                      <a:round/>
+                      <a:headEnd type="none" w="med" len="med"/>
+                      <a:tailEnd type="none" w="med" len="med"/>
+                    </a:lnL>
+                    <a:lnR w="9525" cap="flat" cmpd="sng" algn="ctr">
+                      <a:solidFill>
+                        <a:schemeClr val="bg1"/>
+                      </a:solidFill>
+                      <a:prstDash val="solid"/>
+                      <a:round/>
+                      <a:headEnd type="none" w="med" len="med"/>
+                      <a:tailEnd type="none" w="med" len="med"/>
+                    </a:lnR>
+                    <a:lnT w="9525" cap="flat" cmpd="sng" algn="ctr">
+                      <a:solidFill>
+                        <a:schemeClr val="bg1"/>
+                      </a:solidFill>
+                      <a:prstDash val="solid"/>
+                      <a:round/>
+                      <a:headEnd type="none" w="med" len="med"/>
+                      <a:tailEnd type="none" w="med" len="med"/>
+                    </a:lnT>
+                    <a:lnB w="9525" cap="flat" cmpd="sng" algn="ctr">
+                      <a:solidFill>
+                        <a:schemeClr val="bg1"/>
+                      </a:solidFill>
+                      <a:prstDash val="solid"/>
+                      <a:round/>
+                      <a:headEnd type="none" w="med" len="med"/>
+                      <a:tailEnd type="none" w="med" len="med"/>
+                    </a:lnB>
+                    <a:noFill/>
+                  </a:tcPr>
+                </a:tc>
+                <a:tc>
+                  <a:txBody>
+                    <a:bodyPr/>
+                    <a:lstStyle/>
+                    <a:p>
+                      <a:pPr>
+                        <a:buNone/>
+                      </a:pPr>
+                      <a:r>
+                        <a:rPr lang="en-US" sz="1800">
+                          <a:effectLst/>
+                          <a:latin typeface="Google Sans Text"/>
+                        </a:rPr>
+                        <a:t>Keyboard</a:t>
+                      </a:r>
+                    </a:p>
+                  </a:txBody>
+                  <a:tcPr anchor="ctr">
+                    <a:lnL w="9525" cap="flat" cmpd="sng" algn="ctr">
+                      <a:solidFill>
+                        <a:schemeClr val="bg1"/>
+                      </a:solidFill>
+                      <a:prstDash val="solid"/>
+                      <a:round/>
+                      <a:headEnd type="none" w="med" len="med"/>
+                      <a:tailEnd type="none" w="med" len="med"/>
+                    </a:lnL>
+                    <a:lnR w="9525" cap="flat" cmpd="sng" algn="ctr">
+                      <a:solidFill>
+                        <a:schemeClr val="bg1"/>
+                      </a:solidFill>
+                      <a:prstDash val="solid"/>
+                      <a:round/>
+                      <a:headEnd type="none" w="med" len="med"/>
+                      <a:tailEnd type="none" w="med" len="med"/>
+                    </a:lnR>
+                    <a:lnT w="9525" cap="flat" cmpd="sng" algn="ctr">
+                      <a:solidFill>
+                        <a:schemeClr val="bg1"/>
+                      </a:solidFill>
+                      <a:prstDash val="solid"/>
+                      <a:round/>
+                      <a:headEnd type="none" w="med" len="med"/>
+                      <a:tailEnd type="none" w="med" len="med"/>
+                    </a:lnT>
+                    <a:lnB w="9525" cap="flat" cmpd="sng" algn="ctr">
+                      <a:solidFill>
+                        <a:schemeClr val="bg1"/>
+                      </a:solidFill>
+                      <a:prstDash val="solid"/>
+                      <a:round/>
+                      <a:headEnd type="none" w="med" len="med"/>
+                      <a:tailEnd type="none" w="med" len="med"/>
+                    </a:lnB>
+                    <a:noFill/>
+                  </a:tcPr>
+                </a:tc>
+                <a:tc>
+                  <a:txBody>
+                    <a:bodyPr/>
+                    <a:lstStyle/>
+                    <a:p>
+                      <a:pPr>
+                        <a:buNone/>
+                      </a:pPr>
+                      <a:r>
+                        <a:rPr lang="en-US" sz="1800">
+                          <a:effectLst/>
+                          <a:latin typeface="Google Sans Text"/>
+                        </a:rPr>
+                        <a:t>1200</a:t>
+                      </a:r>
+                    </a:p>
+                  </a:txBody>
+                  <a:tcPr anchor="ctr">
+                    <a:lnL w="9525" cap="flat" cmpd="sng" algn="ctr">
+                      <a:solidFill>
+                        <a:schemeClr val="bg1"/>
+                      </a:solidFill>
+                      <a:prstDash val="solid"/>
+                      <a:round/>
+                      <a:headEnd type="none" w="med" len="med"/>
+                      <a:tailEnd type="none" w="med" len="med"/>
+                    </a:lnL>
+                    <a:lnR w="9525" cap="flat" cmpd="sng" algn="ctr">
+                      <a:solidFill>
+                        <a:schemeClr val="bg1"/>
+                      </a:solidFill>
+                      <a:prstDash val="solid"/>
+                      <a:round/>
+                      <a:headEnd type="none" w="med" len="med"/>
+                      <a:tailEnd type="none" w="med" len="med"/>
+                    </a:lnR>
+                    <a:lnT w="9525" cap="flat" cmpd="sng" algn="ctr">
+                      <a:solidFill>
+                        <a:schemeClr val="bg1"/>
+                      </a:solidFill>
+                      <a:prstDash val="solid"/>
+                      <a:round/>
+                      <a:headEnd type="none" w="med" len="med"/>
+                      <a:tailEnd type="none" w="med" len="med"/>
+                    </a:lnT>
+                    <a:lnB w="9525" cap="flat" cmpd="sng" algn="ctr">
+                      <a:solidFill>
+                        <a:schemeClr val="bg1"/>
+                      </a:solidFill>
+                      <a:prstDash val="solid"/>
+                      <a:round/>
+                      <a:headEnd type="none" w="med" len="med"/>
+                      <a:tailEnd type="none" w="med" len="med"/>
+                    </a:lnB>
+                    <a:noFill/>
+                  </a:tcPr>
+                </a:tc>
+                <a:tc>
+                  <a:txBody>
+                    <a:bodyPr/>
+                    <a:lstStyle/>
+                    <a:p>
+                      <a:pPr>
+                        <a:buNone/>
+                      </a:pPr>
+                      <a:r>
+                        <a:rPr lang="en-US" sz="1800">
+                          <a:effectLst/>
+                          <a:latin typeface="Google Sans Text"/>
+                        </a:rPr>
+                        <a:t>5</a:t>
+                      </a:r>
+                    </a:p>
+                  </a:txBody>
+                  <a:tcPr anchor="ctr">
+                    <a:lnL w="9525" cap="flat" cmpd="sng" algn="ctr">
+                      <a:solidFill>
+                        <a:schemeClr val="bg1"/>
+                      </a:solidFill>
+                      <a:prstDash val="solid"/>
+                      <a:round/>
+                      <a:headEnd type="none" w="med" len="med"/>
+                      <a:tailEnd type="none" w="med" len="med"/>
+                    </a:lnL>
+                    <a:lnR w="9525" cap="flat" cmpd="sng" algn="ctr">
+                      <a:solidFill>
+                        <a:schemeClr val="bg1"/>
+                      </a:solidFill>
+                      <a:prstDash val="solid"/>
+                      <a:round/>
+                      <a:headEnd type="none" w="med" len="med"/>
+                      <a:tailEnd type="none" w="med" len="med"/>
+                    </a:lnR>
+                    <a:lnT w="9525" cap="flat" cmpd="sng" algn="ctr">
+                      <a:solidFill>
+                        <a:schemeClr val="bg1"/>
+                      </a:solidFill>
+                      <a:prstDash val="solid"/>
+                      <a:round/>
+                      <a:headEnd type="none" w="med" len="med"/>
+                      <a:tailEnd type="none" w="med" len="med"/>
+                    </a:lnT>
+                    <a:lnB w="9525" cap="flat" cmpd="sng" algn="ctr">
+                      <a:solidFill>
+                        <a:schemeClr val="bg1"/>
+                      </a:solidFill>
+                      <a:prstDash val="solid"/>
+                      <a:round/>
+                      <a:headEnd type="none" w="med" len="med"/>
+                      <a:tailEnd type="none" w="med" len="med"/>
+                    </a:lnB>
+                    <a:noFill/>
+                  </a:tcPr>
+                </a:tc>
+                <a:tc>
+                  <a:txBody>
+                    <a:bodyPr/>
+                    <a:lstStyle/>
+                    <a:p>
+                      <a:pPr>
+                        <a:buNone/>
+                      </a:pPr>
+                      <a:r>
+                        <a:rPr lang="en-US" sz="1800">
+                          <a:effectLst/>
+                          <a:latin typeface="Google Sans Text"/>
+                        </a:rPr>
+                        <a:t>=D4*E4</a:t>
+                      </a:r>
+                    </a:p>
+                  </a:txBody>
+                  <a:tcPr anchor="ctr">
+                    <a:lnL w="9525" cap="flat" cmpd="sng" algn="ctr">
+                      <a:solidFill>
+                        <a:schemeClr val="bg1"/>
+                      </a:solidFill>
+                      <a:prstDash val="solid"/>
+                      <a:round/>
+                      <a:headEnd type="none" w="med" len="med"/>
+                      <a:tailEnd type="none" w="med" len="med"/>
+                    </a:lnL>
+                    <a:lnR w="9525" cap="flat" cmpd="sng" algn="ctr">
+                      <a:solidFill>
+                        <a:schemeClr val="bg1"/>
+                      </a:solidFill>
+                      <a:prstDash val="solid"/>
+                      <a:round/>
+                      <a:headEnd type="none" w="med" len="med"/>
+                      <a:tailEnd type="none" w="med" len="med"/>
+                    </a:lnR>
+                    <a:lnT w="9525" cap="flat" cmpd="sng" algn="ctr">
+                      <a:solidFill>
+                        <a:schemeClr val="bg1"/>
+                      </a:solidFill>
+                      <a:prstDash val="solid"/>
+                      <a:round/>
+                      <a:headEnd type="none" w="med" len="med"/>
+                      <a:tailEnd type="none" w="med" len="med"/>
+                    </a:lnT>
+                    <a:lnB w="9525" cap="flat" cmpd="sng" algn="ctr">
+                      <a:solidFill>
+                        <a:schemeClr val="bg1"/>
+                      </a:solidFill>
+                      <a:prstDash val="solid"/>
+                      <a:round/>
+                      <a:headEnd type="none" w="med" len="med"/>
+                      <a:tailEnd type="none" w="med" len="med"/>
+                    </a:lnB>
+                    <a:noFill/>
+                  </a:tcPr>
+                </a:tc>
+                <a:tc>
+                  <a:txBody>
+                    <a:bodyPr/>
+                    <a:lstStyle/>
+                    <a:p>
+                      <a:pPr>
+                        <a:buNone/>
+                      </a:pPr>
+                      <a:r>
+                        <a:rPr lang="en-US" sz="1800">
+                          <a:effectLst/>
+                          <a:latin typeface="Google Sans Text"/>
+                        </a:rPr>
+                        <a:t>TRUE</a:t>
+                      </a:r>
+                    </a:p>
+                  </a:txBody>
+                  <a:tcPr anchor="ctr">
+                    <a:lnL w="9525" cap="flat" cmpd="sng" algn="ctr">
+                      <a:solidFill>
+                        <a:schemeClr val="bg1"/>
+                      </a:solidFill>
+                      <a:prstDash val="solid"/>
+                      <a:round/>
+                      <a:headEnd type="none" w="med" len="med"/>
+                      <a:tailEnd type="none" w="med" len="med"/>
+                    </a:lnL>
+                    <a:lnR w="9525" cap="flat" cmpd="sng" algn="ctr">
+                      <a:solidFill>
+                        <a:schemeClr val="bg1"/>
+                      </a:solidFill>
+                      <a:prstDash val="solid"/>
+                      <a:round/>
+                      <a:headEnd type="none" w="med" len="med"/>
+                      <a:tailEnd type="none" w="med" len="med"/>
+                    </a:lnR>
+                    <a:lnT w="9525" cap="flat" cmpd="sng" algn="ctr">
+                      <a:solidFill>
+                        <a:schemeClr val="bg1"/>
+                      </a:solidFill>
+                      <a:prstDash val="solid"/>
+                      <a:round/>
+                      <a:headEnd type="none" w="med" len="med"/>
+                      <a:tailEnd type="none" w="med" len="med"/>
+                    </a:lnT>
+                    <a:lnB w="9525" cap="flat" cmpd="sng" algn="ctr">
+                      <a:solidFill>
+                        <a:schemeClr val="bg1"/>
+                      </a:solidFill>
+                      <a:prstDash val="solid"/>
+                      <a:round/>
+                      <a:headEnd type="none" w="med" len="med"/>
+                      <a:tailEnd type="none" w="med" len="med"/>
+                    </a:lnB>
+                    <a:noFill/>
+                  </a:tcPr>
+                </a:tc>
+                <a:extLst>
+                  <a:ext uri="{0D108BD9-81ED-4DB2-BD59-A6C34878D82A}">
+                    <a16:rowId xmlns:a16="http://schemas.microsoft.com/office/drawing/2014/main" val="2409736401"/>
+                  </a:ext>
+                </a:extLst>
+              </a:tr>
+              <a:tr h="365760">
+                <a:tc>
+                  <a:txBody>
+                    <a:bodyPr/>
+                    <a:lstStyle/>
+                    <a:p>
+                      <a:pPr>
+                        <a:buNone/>
+                      </a:pPr>
+                      <a:r>
+                        <a:rPr lang="en-US" sz="1800">
+                          <a:effectLst/>
+                          <a:latin typeface="Google Sans Text"/>
+                        </a:rPr>
+                        <a:t>2026-03-03</a:t>
+                      </a:r>
+                    </a:p>
+                  </a:txBody>
+                  <a:tcPr anchor="ctr">
+                    <a:lnL w="9525" cap="flat" cmpd="sng" algn="ctr">
+                      <a:solidFill>
+                        <a:schemeClr val="bg1"/>
+                      </a:solidFill>
+                      <a:prstDash val="solid"/>
+                      <a:round/>
+                      <a:headEnd type="none" w="med" len="med"/>
+                      <a:tailEnd type="none" w="med" len="med"/>
+                    </a:lnL>
+                    <a:lnR w="9525" cap="flat" cmpd="sng" algn="ctr">
+                      <a:solidFill>
+                        <a:schemeClr val="bg1"/>
+                      </a:solidFill>
+                      <a:prstDash val="solid"/>
+                      <a:round/>
+                      <a:headEnd type="none" w="med" len="med"/>
+                      <a:tailEnd type="none" w="med" len="med"/>
+                    </a:lnR>
+                    <a:lnT w="9525" cap="flat" cmpd="sng" algn="ctr">
+                      <a:solidFill>
+                        <a:schemeClr val="bg1"/>
+                      </a:solidFill>
+                      <a:prstDash val="solid"/>
+                      <a:round/>
+                      <a:headEnd type="none" w="med" len="med"/>
+                      <a:tailEnd type="none" w="med" len="med"/>
+                    </a:lnT>
+                    <a:lnB w="9525" cap="flat" cmpd="sng" algn="ctr">
+                      <a:solidFill>
+                        <a:schemeClr val="bg1"/>
+                      </a:solidFill>
+                      <a:prstDash val="solid"/>
+                      <a:round/>
+                      <a:headEnd type="none" w="med" len="med"/>
+                      <a:tailEnd type="none" w="med" len="med"/>
+                    </a:lnB>
+                    <a:noFill/>
+                  </a:tcPr>
+                </a:tc>
+                <a:tc>
+                  <a:txBody>
+                    <a:bodyPr/>
+                    <a:lstStyle/>
+                    <a:p>
+                      <a:pPr>
+                        <a:buNone/>
+                      </a:pPr>
+                      <a:r>
+                        <a:rPr lang="en-US" sz="1800">
+                          <a:effectLst/>
+                          <a:latin typeface="Google Sans Text"/>
+                        </a:rPr>
+                        <a:t>'004</a:t>
+                      </a:r>
+                    </a:p>
+                  </a:txBody>
+                  <a:tcPr anchor="ctr">
+                    <a:lnL w="9525" cap="flat" cmpd="sng" algn="ctr">
+                      <a:solidFill>
+                        <a:schemeClr val="bg1"/>
+                      </a:solidFill>
+                      <a:prstDash val="solid"/>
+                      <a:round/>
+                      <a:headEnd type="none" w="med" len="med"/>
+                      <a:tailEnd type="none" w="med" len="med"/>
+                    </a:lnL>
+                    <a:lnR w="9525" cap="flat" cmpd="sng" algn="ctr">
+                      <a:solidFill>
+                        <a:schemeClr val="bg1"/>
+                      </a:solidFill>
+                      <a:prstDash val="solid"/>
+                      <a:round/>
+                      <a:headEnd type="none" w="med" len="med"/>
+                      <a:tailEnd type="none" w="med" len="med"/>
+                    </a:lnR>
+                    <a:lnT w="9525" cap="flat" cmpd="sng" algn="ctr">
+                      <a:solidFill>
+                        <a:schemeClr val="bg1"/>
+                      </a:solidFill>
+                      <a:prstDash val="solid"/>
+                      <a:round/>
+                      <a:headEnd type="none" w="med" len="med"/>
+                      <a:tailEnd type="none" w="med" len="med"/>
+                    </a:lnT>
+                    <a:lnB w="9525" cap="flat" cmpd="sng" algn="ctr">
+                      <a:solidFill>
+                        <a:schemeClr val="bg1"/>
+                      </a:solidFill>
+                      <a:prstDash val="solid"/>
+                      <a:round/>
+                      <a:headEnd type="none" w="med" len="med"/>
+                      <a:tailEnd type="none" w="med" len="med"/>
+                    </a:lnB>
+                    <a:noFill/>
+                  </a:tcPr>
+                </a:tc>
+                <a:tc>
+                  <a:txBody>
+                    <a:bodyPr/>
+                    <a:lstStyle/>
+                    <a:p>
+                      <a:pPr>
+                        <a:buNone/>
+                      </a:pPr>
+                      <a:r>
+                        <a:rPr lang="en-US" sz="1800">
+                          <a:effectLst/>
+                          <a:latin typeface="Google Sans Text"/>
+                        </a:rPr>
+                        <a:t>Monitor</a:t>
+                      </a:r>
+                    </a:p>
+                  </a:txBody>
+                  <a:tcPr anchor="ctr">
+                    <a:lnL w="9525" cap="flat" cmpd="sng" algn="ctr">
+                      <a:solidFill>
+                        <a:schemeClr val="bg1"/>
+                      </a:solidFill>
+                      <a:prstDash val="solid"/>
+                      <a:round/>
+                      <a:headEnd type="none" w="med" len="med"/>
+                      <a:tailEnd type="none" w="med" len="med"/>
+                    </a:lnL>
+                    <a:lnR w="9525" cap="flat" cmpd="sng" algn="ctr">
+                      <a:solidFill>
+                        <a:schemeClr val="bg1"/>
+                      </a:solidFill>
+                      <a:prstDash val="solid"/>
+                      <a:round/>
+                      <a:headEnd type="none" w="med" len="med"/>
+                      <a:tailEnd type="none" w="med" len="med"/>
+                    </a:lnR>
+                    <a:lnT w="9525" cap="flat" cmpd="sng" algn="ctr">
+                      <a:solidFill>
+                        <a:schemeClr val="bg1"/>
+                      </a:solidFill>
+                      <a:prstDash val="solid"/>
+                      <a:round/>
+                      <a:headEnd type="none" w="med" len="med"/>
+                      <a:tailEnd type="none" w="med" len="med"/>
+                    </a:lnT>
+                    <a:lnB w="9525" cap="flat" cmpd="sng" algn="ctr">
+                      <a:solidFill>
+                        <a:schemeClr val="bg1"/>
+                      </a:solidFill>
+                      <a:prstDash val="solid"/>
+                      <a:round/>
+                      <a:headEnd type="none" w="med" len="med"/>
+                      <a:tailEnd type="none" w="med" len="med"/>
+                    </a:lnB>
+                    <a:noFill/>
+                  </a:tcPr>
+                </a:tc>
+                <a:tc>
+                  <a:txBody>
+                    <a:bodyPr/>
+                    <a:lstStyle/>
+                    <a:p>
+                      <a:pPr>
+                        <a:buNone/>
+                      </a:pPr>
+                      <a:r>
+                        <a:rPr lang="en-US" sz="1800">
+                          <a:effectLst/>
+                          <a:latin typeface="Google Sans Text"/>
+                        </a:rPr>
+                        <a:t>4500</a:t>
+                      </a:r>
+                    </a:p>
+                  </a:txBody>
+                  <a:tcPr anchor="ctr">
+                    <a:lnL w="9525" cap="flat" cmpd="sng" algn="ctr">
+                      <a:solidFill>
+                        <a:schemeClr val="bg1"/>
+                      </a:solidFill>
+                      <a:prstDash val="solid"/>
+                      <a:round/>
+                      <a:headEnd type="none" w="med" len="med"/>
+                      <a:tailEnd type="none" w="med" len="med"/>
+                    </a:lnL>
+                    <a:lnR w="9525" cap="flat" cmpd="sng" algn="ctr">
+                      <a:solidFill>
+                        <a:schemeClr val="bg1"/>
+                      </a:solidFill>
+                      <a:prstDash val="solid"/>
+                      <a:round/>
+                      <a:headEnd type="none" w="med" len="med"/>
+                      <a:tailEnd type="none" w="med" len="med"/>
+                    </a:lnR>
+                    <a:lnT w="9525" cap="flat" cmpd="sng" algn="ctr">
+                      <a:solidFill>
+                        <a:schemeClr val="bg1"/>
+                      </a:solidFill>
+                      <a:prstDash val="solid"/>
+                      <a:round/>
+                      <a:headEnd type="none" w="med" len="med"/>
+                      <a:tailEnd type="none" w="med" len="med"/>
+                    </a:lnT>
+                    <a:lnB w="9525" cap="flat" cmpd="sng" algn="ctr">
+                      <a:solidFill>
+                        <a:schemeClr val="bg1"/>
+                      </a:solidFill>
+                      <a:prstDash val="solid"/>
+                      <a:round/>
+                      <a:headEnd type="none" w="med" len="med"/>
+                      <a:tailEnd type="none" w="med" len="med"/>
+                    </a:lnB>
+                    <a:noFill/>
+                  </a:tcPr>
+                </a:tc>
+                <a:tc>
+                  <a:txBody>
+                    <a:bodyPr/>
+                    <a:lstStyle/>
+                    <a:p>
+                      <a:endParaRPr lang="en-US" sz="1800"/>
+                    </a:p>
+                  </a:txBody>
+                  <a:tcPr>
+                    <a:lnL w="9525" cap="flat" cmpd="sng" algn="ctr">
+                      <a:solidFill>
+                        <a:schemeClr val="bg1"/>
+                      </a:solidFill>
+                      <a:prstDash val="solid"/>
+                      <a:round/>
+                      <a:headEnd type="none" w="med" len="med"/>
+                      <a:tailEnd type="none" w="med" len="med"/>
+                    </a:lnL>
+                    <a:lnT w="9525" cap="flat" cmpd="sng" algn="ctr">
+                      <a:solidFill>
+                        <a:schemeClr val="bg1"/>
+                      </a:solidFill>
+                      <a:prstDash val="solid"/>
+                      <a:round/>
+                      <a:headEnd type="none" w="med" len="med"/>
+                      <a:tailEnd type="none" w="med" len="med"/>
+                    </a:lnT>
+                  </a:tcPr>
+                </a:tc>
+                <a:tc>
+                  <a:txBody>
+                    <a:bodyPr/>
+                    <a:lstStyle/>
+                    <a:p>
+                      <a:endParaRPr lang="en-US" sz="1800"/>
+                    </a:p>
+                  </a:txBody>
+                  <a:tcPr>
+                    <a:lnT w="9525" cap="flat" cmpd="sng" algn="ctr">
+                      <a:solidFill>
+                        <a:schemeClr val="bg1"/>
+                      </a:solidFill>
+                      <a:prstDash val="solid"/>
+                      <a:round/>
+                      <a:headEnd type="none" w="med" len="med"/>
+                      <a:tailEnd type="none" w="med" len="med"/>
+                    </a:lnT>
+                  </a:tcPr>
+                </a:tc>
+                <a:tc>
+                  <a:txBody>
+                    <a:bodyPr/>
+                    <a:lstStyle/>
+                    <a:p>
+                      <a:endParaRPr lang="en-US" sz="1800" dirty="0"/>
+                    </a:p>
+                  </a:txBody>
+                  <a:tcPr>
+                    <a:lnT w="9525" cap="flat" cmpd="sng" algn="ctr">
+                      <a:solidFill>
+                        <a:schemeClr val="bg1"/>
+                      </a:solidFill>
+                      <a:prstDash val="solid"/>
+                      <a:round/>
+                      <a:headEnd type="none" w="med" len="med"/>
+                      <a:tailEnd type="none" w="med" len="med"/>
+                    </a:lnT>
+                  </a:tcPr>
+                </a:tc>
+                <a:extLst>
+                  <a:ext uri="{0D108BD9-81ED-4DB2-BD59-A6C34878D82A}">
+                    <a16:rowId xmlns:a16="http://schemas.microsoft.com/office/drawing/2014/main" val="2887696370"/>
+                  </a:ext>
+                </a:extLst>
+              </a:tr>
+            </a:tbl>
+          </a:graphicData>
+        </a:graphic>
+      </p:graphicFrame>
     </p:spTree>
     <p:extLst>
       <p:ext uri="{BB962C8B-B14F-4D97-AF65-F5344CB8AC3E}">
